--- a/results/Тексты/Презентация_ВКР Черных.pptx
+++ b/results/Тексты/Презентация_ВКР Черных.pptx
@@ -1,6 +1,6 @@
 
 <file path=ppt/presentation.xml><?xml version="1.0" encoding="utf-8"?>
-<p:presentation xmlns:a="http://schemas.openxmlformats.org/drawingml/2006/main" xmlns:r="http://schemas.openxmlformats.org/officeDocument/2006/relationships" xmlns:p="http://schemas.openxmlformats.org/presentationml/2006/main" showSpecialPlsOnTitleSld="0" saveSubsetFonts="1">
+<p:presentation xmlns:a="http://schemas.openxmlformats.org/drawingml/2006/main" xmlns:r="http://schemas.openxmlformats.org/officeDocument/2006/relationships" xmlns:p="http://schemas.openxmlformats.org/presentationml/2006/main" showSpecialPlsOnTitleSld="0">
   <p:sldMasterIdLst>
     <p:sldMasterId id="2147483648" r:id="rId1"/>
   </p:sldMasterIdLst>
@@ -8,17 +8,20 @@
     <p:notesMasterId r:id="rId13"/>
   </p:notesMasterIdLst>
   <p:sldIdLst>
-    <p:sldId id="256" r:id="rId2"/>
-    <p:sldId id="259" r:id="rId3"/>
-    <p:sldId id="258" r:id="rId4"/>
-    <p:sldId id="270" r:id="rId5"/>
-    <p:sldId id="268" r:id="rId6"/>
-    <p:sldId id="271" r:id="rId7"/>
-    <p:sldId id="262" r:id="rId8"/>
-    <p:sldId id="272" r:id="rId9"/>
-    <p:sldId id="263" r:id="rId10"/>
-    <p:sldId id="264" r:id="rId11"/>
-    <p:sldId id="269" r:id="rId12"/>
+    <p:sldId id="256" r:id="rId3"/>
+    <p:sldId id="259" r:id="rId4"/>
+    <p:sldId id="258" r:id="rId5"/>
+    <p:sldId id="270" r:id="rId6"/>
+    <p:sldId id="268" r:id="rId7"/>
+    <p:sldId id="271" r:id="rId8"/>
+    <p:sldId id="262" r:id="rId9"/>
+    <p:sldId id="272" r:id="rId10"/>
+    <p:sldId id="263" r:id="rId11"/>
+    <p:sldId id="273" r:id="rId12"/>
+    <p:sldId id="274" r:id="rId14"/>
+    <p:sldId id="275" r:id="rId15"/>
+    <p:sldId id="276" r:id="rId16"/>
+    <p:sldId id="264" r:id="rId17"/>
   </p:sldIdLst>
   <p:sldSz cx="12192000" cy="6858000"/>
   <p:notesSz cx="6858000" cy="9144000"/>
@@ -117,11 +120,6 @@
       </a:defRPr>
     </a:lvl9pPr>
   </p:defaultTextStyle>
-  <p:extLst>
-    <p:ext uri="{EFAFB233-063F-42B5-8137-9DF3F51BA10A}">
-      <p15:sldGuideLst xmlns:p15="http://schemas.microsoft.com/office/powerpoint/2012/main"/>
-    </p:ext>
-  </p:extLst>
 </p:presentation>
 </file>
 
@@ -207,7 +205,6 @@
           <a:p>
             <a:fld id="{21FA7797-00FD-4366-A7DD-DDB70299F94B}" type="datetimeFigureOut">
               <a:rPr lang="en-US" smtClean="0"/>
-              <a:t>5/23/2026</a:t>
             </a:fld>
             <a:endParaRPr lang="en-US"/>
           </a:p>
@@ -274,6 +271,7 @@
               <a:rPr lang="ru-RU"/>
               <a:t>Образец текста</a:t>
             </a:r>
+            <a:endParaRPr lang="ru-RU"/>
           </a:p>
           <a:p>
             <a:pPr lvl="1"/>
@@ -281,6 +279,7 @@
               <a:rPr lang="ru-RU"/>
               <a:t>Второй уровень</a:t>
             </a:r>
+            <a:endParaRPr lang="ru-RU"/>
           </a:p>
           <a:p>
             <a:pPr lvl="2"/>
@@ -288,6 +287,7 @@
               <a:rPr lang="ru-RU"/>
               <a:t>Третий уровень</a:t>
             </a:r>
+            <a:endParaRPr lang="ru-RU"/>
           </a:p>
           <a:p>
             <a:pPr lvl="3"/>
@@ -295,6 +295,7 @@
               <a:rPr lang="ru-RU"/>
               <a:t>Четвертый уровень</a:t>
             </a:r>
+            <a:endParaRPr lang="ru-RU"/>
           </a:p>
           <a:p>
             <a:pPr lvl="4"/>
@@ -366,18 +367,12 @@
           <a:p>
             <a:fld id="{2BE35E0A-4247-4819-B9AA-855A9160BAD1}" type="slidenum">
               <a:rPr lang="en-US" smtClean="0"/>
-              <a:t>‹#›</a:t>
             </a:fld>
             <a:endParaRPr lang="en-US"/>
           </a:p>
         </p:txBody>
       </p:sp>
     </p:spTree>
-    <p:extLst>
-      <p:ext uri="{BB962C8B-B14F-4D97-AF65-F5344CB8AC3E}">
-        <p14:creationId xmlns:p14="http://schemas.microsoft.com/office/powerpoint/2010/main" val="1178496492"/>
-      </p:ext>
-    </p:extLst>
   </p:cSld>
   <p:clrMap bg1="lt1" tx1="dk1" bg2="lt2" tx2="dk2" accent1="accent1" accent2="accent2" accent3="accent3" accent4="accent4" accent5="accent5" accent6="accent6" hlink="hlink" folHlink="folHlink"/>
   <p:notesStyle>
@@ -475,6 +470,54 @@
 </p:notesMaster>
 </file>
 
+<file path=ppt/notesSlides/notesSlide1.xml><?xml version="1.0" encoding="utf-8"?>
+<p:notes xmlns:a="http://schemas.openxmlformats.org/drawingml/2006/main" xmlns:r="http://schemas.openxmlformats.org/officeDocument/2006/relationships" xmlns:p="http://schemas.openxmlformats.org/presentationml/2006/main">
+  <p:cSld>
+    <p:spTree>
+      <p:nvGrpSpPr>
+        <p:cNvPr id="1" name=""/>
+        <p:cNvGrpSpPr/>
+        <p:nvPr/>
+      </p:nvGrpSpPr>
+      <p:grpSpPr/>
+      <p:sp>
+        <p:nvSpPr>
+          <p:cNvPr id="2" name="Slide Image Placeholder 1"/>
+          <p:cNvSpPr>
+            <a:spLocks noGrp="1"/>
+          </p:cNvSpPr>
+          <p:nvPr>
+            <p:ph type="sldImg" idx="2"/>
+          </p:nvPr>
+        </p:nvSpPr>
+        <p:spPr/>
+      </p:sp>
+      <p:sp>
+        <p:nvSpPr>
+          <p:cNvPr id="3" name="Text Placeholder 2"/>
+          <p:cNvSpPr>
+            <a:spLocks noGrp="1"/>
+          </p:cNvSpPr>
+          <p:nvPr>
+            <p:ph type="body" idx="3"/>
+          </p:nvPr>
+        </p:nvSpPr>
+        <p:spPr/>
+        <p:txBody>
+          <a:bodyPr/>
+          <a:p>
+            <a:endParaRPr lang="en-US"/>
+          </a:p>
+        </p:txBody>
+      </p:sp>
+    </p:spTree>
+  </p:cSld>
+  <p:clrMapOvr>
+    <a:masterClrMapping/>
+  </p:clrMapOvr>
+</p:notes>
+</file>
+
 <file path=ppt/slideLayouts/slideLayout1.xml><?xml version="1.0" encoding="utf-8"?>
 <p:sldLayout xmlns:a="http://schemas.openxmlformats.org/drawingml/2006/main" xmlns:r="http://schemas.openxmlformats.org/officeDocument/2006/relationships" xmlns:p="http://schemas.openxmlformats.org/presentationml/2006/main" type="title" preserve="1">
   <p:cSld name="Титульный слайд">
@@ -494,13 +537,7 @@
       </p:grpSpPr>
       <p:sp>
         <p:nvSpPr>
-          <p:cNvPr id="2" name="Заголовок 1">
-            <a:extLst>
-              <a:ext uri="{FF2B5EF4-FFF2-40B4-BE49-F238E27FC236}">
-                <a16:creationId xmlns:a16="http://schemas.microsoft.com/office/drawing/2014/main" id="{9FAFBC99-734F-F357-C1F8-E67C5B72B09C}"/>
-              </a:ext>
-            </a:extLst>
-          </p:cNvPr>
+          <p:cNvPr id="2" name="Заголовок 1"/>
           <p:cNvSpPr>
             <a:spLocks noGrp="1"/>
           </p:cNvSpPr>
@@ -537,13 +574,7 @@
       </p:sp>
       <p:sp>
         <p:nvSpPr>
-          <p:cNvPr id="3" name="Подзаголовок 2">
-            <a:extLst>
-              <a:ext uri="{FF2B5EF4-FFF2-40B4-BE49-F238E27FC236}">
-                <a16:creationId xmlns:a16="http://schemas.microsoft.com/office/drawing/2014/main" id="{72CF6078-5A76-2329-47F7-A95A42689851}"/>
-              </a:ext>
-            </a:extLst>
-          </p:cNvPr>
+          <p:cNvPr id="3" name="Подзаголовок 2"/>
           <p:cNvSpPr>
             <a:spLocks noGrp="1"/>
           </p:cNvSpPr>
@@ -613,13 +644,7 @@
       </p:sp>
       <p:sp>
         <p:nvSpPr>
-          <p:cNvPr id="4" name="Дата 3">
-            <a:extLst>
-              <a:ext uri="{FF2B5EF4-FFF2-40B4-BE49-F238E27FC236}">
-                <a16:creationId xmlns:a16="http://schemas.microsoft.com/office/drawing/2014/main" id="{18CB6DB9-D813-BBC1-C01C-82958301AC80}"/>
-              </a:ext>
-            </a:extLst>
-          </p:cNvPr>
+          <p:cNvPr id="4" name="Дата 3"/>
           <p:cNvSpPr>
             <a:spLocks noGrp="1"/>
           </p:cNvSpPr>
@@ -634,7 +659,6 @@
           <a:p>
             <a:fld id="{7552D2F9-902E-45BE-B09B-749FE4E7C635}" type="datetime1">
               <a:rPr lang="en-US" smtClean="0"/>
-              <a:t>5/23/2026</a:t>
             </a:fld>
             <a:endParaRPr lang="en-US"/>
           </a:p>
@@ -642,13 +666,7 @@
       </p:sp>
       <p:sp>
         <p:nvSpPr>
-          <p:cNvPr id="5" name="Нижний колонтитул 4">
-            <a:extLst>
-              <a:ext uri="{FF2B5EF4-FFF2-40B4-BE49-F238E27FC236}">
-                <a16:creationId xmlns:a16="http://schemas.microsoft.com/office/drawing/2014/main" id="{9C064B82-BEA2-19ED-E214-CD34E53BDA76}"/>
-              </a:ext>
-            </a:extLst>
-          </p:cNvPr>
+          <p:cNvPr id="5" name="Нижний колонтитул 4"/>
           <p:cNvSpPr>
             <a:spLocks noGrp="1"/>
           </p:cNvSpPr>
@@ -667,13 +685,7 @@
       </p:sp>
       <p:sp>
         <p:nvSpPr>
-          <p:cNvPr id="6" name="Номер слайда 5">
-            <a:extLst>
-              <a:ext uri="{FF2B5EF4-FFF2-40B4-BE49-F238E27FC236}">
-                <a16:creationId xmlns:a16="http://schemas.microsoft.com/office/drawing/2014/main" id="{81BD9895-AA4E-DBDE-7DB1-787DF28DB397}"/>
-              </a:ext>
-            </a:extLst>
-          </p:cNvPr>
+          <p:cNvPr id="6" name="Номер слайда 5"/>
           <p:cNvSpPr>
             <a:spLocks noGrp="1"/>
           </p:cNvSpPr>
@@ -688,18 +700,12 @@
           <a:p>
             <a:fld id="{39D93D24-9446-4BD4-975C-09DCDF7E2057}" type="slidenum">
               <a:rPr lang="en-US" smtClean="0"/>
-              <a:t>‹#›</a:t>
             </a:fld>
             <a:endParaRPr lang="en-US"/>
           </a:p>
         </p:txBody>
       </p:sp>
     </p:spTree>
-    <p:extLst>
-      <p:ext uri="{BB962C8B-B14F-4D97-AF65-F5344CB8AC3E}">
-        <p14:creationId xmlns:p14="http://schemas.microsoft.com/office/powerpoint/2010/main" val="3657241171"/>
-      </p:ext>
-    </p:extLst>
   </p:cSld>
   <p:clrMapOvr>
     <a:masterClrMapping/>
@@ -726,13 +732,7 @@
       </p:grpSpPr>
       <p:sp>
         <p:nvSpPr>
-          <p:cNvPr id="2" name="Заголовок 1">
-            <a:extLst>
-              <a:ext uri="{FF2B5EF4-FFF2-40B4-BE49-F238E27FC236}">
-                <a16:creationId xmlns:a16="http://schemas.microsoft.com/office/drawing/2014/main" id="{07E4DB91-8553-DE77-F4C6-D7FF5B60EF8D}"/>
-              </a:ext>
-            </a:extLst>
-          </p:cNvPr>
+          <p:cNvPr id="2" name="Заголовок 1"/>
           <p:cNvSpPr>
             <a:spLocks noGrp="1"/>
           </p:cNvSpPr>
@@ -755,13 +755,7 @@
       </p:sp>
       <p:sp>
         <p:nvSpPr>
-          <p:cNvPr id="3" name="Вертикальный текст 2">
-            <a:extLst>
-              <a:ext uri="{FF2B5EF4-FFF2-40B4-BE49-F238E27FC236}">
-                <a16:creationId xmlns:a16="http://schemas.microsoft.com/office/drawing/2014/main" id="{81DA2B01-A865-E877-0E35-984827A3FB4B}"/>
-              </a:ext>
-            </a:extLst>
-          </p:cNvPr>
+          <p:cNvPr id="3" name="Вертикальный текст 2"/>
           <p:cNvSpPr>
             <a:spLocks noGrp="1"/>
           </p:cNvSpPr>
@@ -779,6 +773,7 @@
               <a:rPr lang="ru-RU"/>
               <a:t>Образец текста</a:t>
             </a:r>
+            <a:endParaRPr lang="ru-RU"/>
           </a:p>
           <a:p>
             <a:pPr lvl="1"/>
@@ -786,6 +781,7 @@
               <a:rPr lang="ru-RU"/>
               <a:t>Второй уровень</a:t>
             </a:r>
+            <a:endParaRPr lang="ru-RU"/>
           </a:p>
           <a:p>
             <a:pPr lvl="2"/>
@@ -793,6 +789,7 @@
               <a:rPr lang="ru-RU"/>
               <a:t>Третий уровень</a:t>
             </a:r>
+            <a:endParaRPr lang="ru-RU"/>
           </a:p>
           <a:p>
             <a:pPr lvl="3"/>
@@ -800,6 +797,7 @@
               <a:rPr lang="ru-RU"/>
               <a:t>Четвертый уровень</a:t>
             </a:r>
+            <a:endParaRPr lang="ru-RU"/>
           </a:p>
           <a:p>
             <a:pPr lvl="4"/>
@@ -813,13 +811,7 @@
       </p:sp>
       <p:sp>
         <p:nvSpPr>
-          <p:cNvPr id="4" name="Дата 3">
-            <a:extLst>
-              <a:ext uri="{FF2B5EF4-FFF2-40B4-BE49-F238E27FC236}">
-                <a16:creationId xmlns:a16="http://schemas.microsoft.com/office/drawing/2014/main" id="{00C21ADE-C57A-E958-E10E-CB7D08AADE01}"/>
-              </a:ext>
-            </a:extLst>
-          </p:cNvPr>
+          <p:cNvPr id="4" name="Дата 3"/>
           <p:cNvSpPr>
             <a:spLocks noGrp="1"/>
           </p:cNvSpPr>
@@ -834,7 +826,6 @@
           <a:p>
             <a:fld id="{2BC4809F-93B5-4C67-BCEE-6C99C20201B7}" type="datetime1">
               <a:rPr lang="en-US" smtClean="0"/>
-              <a:t>5/23/2026</a:t>
             </a:fld>
             <a:endParaRPr lang="en-US"/>
           </a:p>
@@ -842,13 +833,7 @@
       </p:sp>
       <p:sp>
         <p:nvSpPr>
-          <p:cNvPr id="5" name="Нижний колонтитул 4">
-            <a:extLst>
-              <a:ext uri="{FF2B5EF4-FFF2-40B4-BE49-F238E27FC236}">
-                <a16:creationId xmlns:a16="http://schemas.microsoft.com/office/drawing/2014/main" id="{10D968AB-4996-9760-B60B-679C3F40E421}"/>
-              </a:ext>
-            </a:extLst>
-          </p:cNvPr>
+          <p:cNvPr id="5" name="Нижний колонтитул 4"/>
           <p:cNvSpPr>
             <a:spLocks noGrp="1"/>
           </p:cNvSpPr>
@@ -867,13 +852,7 @@
       </p:sp>
       <p:sp>
         <p:nvSpPr>
-          <p:cNvPr id="6" name="Номер слайда 5">
-            <a:extLst>
-              <a:ext uri="{FF2B5EF4-FFF2-40B4-BE49-F238E27FC236}">
-                <a16:creationId xmlns:a16="http://schemas.microsoft.com/office/drawing/2014/main" id="{6DE05783-B924-7BBD-F6FF-406323C8210D}"/>
-              </a:ext>
-            </a:extLst>
-          </p:cNvPr>
+          <p:cNvPr id="6" name="Номер слайда 5"/>
           <p:cNvSpPr>
             <a:spLocks noGrp="1"/>
           </p:cNvSpPr>
@@ -888,18 +867,12 @@
           <a:p>
             <a:fld id="{39D93D24-9446-4BD4-975C-09DCDF7E2057}" type="slidenum">
               <a:rPr lang="en-US" smtClean="0"/>
-              <a:t>‹#›</a:t>
             </a:fld>
             <a:endParaRPr lang="en-US"/>
           </a:p>
         </p:txBody>
       </p:sp>
     </p:spTree>
-    <p:extLst>
-      <p:ext uri="{BB962C8B-B14F-4D97-AF65-F5344CB8AC3E}">
-        <p14:creationId xmlns:p14="http://schemas.microsoft.com/office/powerpoint/2010/main" val="380901587"/>
-      </p:ext>
-    </p:extLst>
   </p:cSld>
   <p:clrMapOvr>
     <a:masterClrMapping/>
@@ -926,13 +899,7 @@
       </p:grpSpPr>
       <p:sp>
         <p:nvSpPr>
-          <p:cNvPr id="2" name="Вертикальный заголовок 1">
-            <a:extLst>
-              <a:ext uri="{FF2B5EF4-FFF2-40B4-BE49-F238E27FC236}">
-                <a16:creationId xmlns:a16="http://schemas.microsoft.com/office/drawing/2014/main" id="{90382825-438E-DB2B-223B-FDCA1ECBD2AA}"/>
-              </a:ext>
-            </a:extLst>
-          </p:cNvPr>
+          <p:cNvPr id="2" name="Вертикальный заголовок 1"/>
           <p:cNvSpPr>
             <a:spLocks noGrp="1"/>
           </p:cNvSpPr>
@@ -960,13 +927,7 @@
       </p:sp>
       <p:sp>
         <p:nvSpPr>
-          <p:cNvPr id="3" name="Вертикальный текст 2">
-            <a:extLst>
-              <a:ext uri="{FF2B5EF4-FFF2-40B4-BE49-F238E27FC236}">
-                <a16:creationId xmlns:a16="http://schemas.microsoft.com/office/drawing/2014/main" id="{C34C1F21-BF02-26E9-A63A-5572983CB85E}"/>
-              </a:ext>
-            </a:extLst>
-          </p:cNvPr>
+          <p:cNvPr id="3" name="Вертикальный текст 2"/>
           <p:cNvSpPr>
             <a:spLocks noGrp="1"/>
           </p:cNvSpPr>
@@ -989,6 +950,7 @@
               <a:rPr lang="ru-RU"/>
               <a:t>Образец текста</a:t>
             </a:r>
+            <a:endParaRPr lang="ru-RU"/>
           </a:p>
           <a:p>
             <a:pPr lvl="1"/>
@@ -996,6 +958,7 @@
               <a:rPr lang="ru-RU"/>
               <a:t>Второй уровень</a:t>
             </a:r>
+            <a:endParaRPr lang="ru-RU"/>
           </a:p>
           <a:p>
             <a:pPr lvl="2"/>
@@ -1003,6 +966,7 @@
               <a:rPr lang="ru-RU"/>
               <a:t>Третий уровень</a:t>
             </a:r>
+            <a:endParaRPr lang="ru-RU"/>
           </a:p>
           <a:p>
             <a:pPr lvl="3"/>
@@ -1010,6 +974,7 @@
               <a:rPr lang="ru-RU"/>
               <a:t>Четвертый уровень</a:t>
             </a:r>
+            <a:endParaRPr lang="ru-RU"/>
           </a:p>
           <a:p>
             <a:pPr lvl="4"/>
@@ -1023,13 +988,7 @@
       </p:sp>
       <p:sp>
         <p:nvSpPr>
-          <p:cNvPr id="4" name="Дата 3">
-            <a:extLst>
-              <a:ext uri="{FF2B5EF4-FFF2-40B4-BE49-F238E27FC236}">
-                <a16:creationId xmlns:a16="http://schemas.microsoft.com/office/drawing/2014/main" id="{7B43972B-C5CE-EFAB-D4EC-A88BA6809EA8}"/>
-              </a:ext>
-            </a:extLst>
-          </p:cNvPr>
+          <p:cNvPr id="4" name="Дата 3"/>
           <p:cNvSpPr>
             <a:spLocks noGrp="1"/>
           </p:cNvSpPr>
@@ -1044,7 +1003,6 @@
           <a:p>
             <a:fld id="{2ED322FC-41C7-4131-A9A8-0AE44A257B23}" type="datetime1">
               <a:rPr lang="en-US" smtClean="0"/>
-              <a:t>5/23/2026</a:t>
             </a:fld>
             <a:endParaRPr lang="en-US"/>
           </a:p>
@@ -1052,13 +1010,7 @@
       </p:sp>
       <p:sp>
         <p:nvSpPr>
-          <p:cNvPr id="5" name="Нижний колонтитул 4">
-            <a:extLst>
-              <a:ext uri="{FF2B5EF4-FFF2-40B4-BE49-F238E27FC236}">
-                <a16:creationId xmlns:a16="http://schemas.microsoft.com/office/drawing/2014/main" id="{46EC4AD9-4F0E-7857-B45B-3D7BCBA72B5A}"/>
-              </a:ext>
-            </a:extLst>
-          </p:cNvPr>
+          <p:cNvPr id="5" name="Нижний колонтитул 4"/>
           <p:cNvSpPr>
             <a:spLocks noGrp="1"/>
           </p:cNvSpPr>
@@ -1077,13 +1029,7 @@
       </p:sp>
       <p:sp>
         <p:nvSpPr>
-          <p:cNvPr id="6" name="Номер слайда 5">
-            <a:extLst>
-              <a:ext uri="{FF2B5EF4-FFF2-40B4-BE49-F238E27FC236}">
-                <a16:creationId xmlns:a16="http://schemas.microsoft.com/office/drawing/2014/main" id="{AFDE2720-791D-7DC3-D56D-41A7DC2FAB9D}"/>
-              </a:ext>
-            </a:extLst>
-          </p:cNvPr>
+          <p:cNvPr id="6" name="Номер слайда 5"/>
           <p:cNvSpPr>
             <a:spLocks noGrp="1"/>
           </p:cNvSpPr>
@@ -1098,18 +1044,12 @@
           <a:p>
             <a:fld id="{39D93D24-9446-4BD4-975C-09DCDF7E2057}" type="slidenum">
               <a:rPr lang="en-US" smtClean="0"/>
-              <a:t>‹#›</a:t>
             </a:fld>
             <a:endParaRPr lang="en-US"/>
           </a:p>
         </p:txBody>
       </p:sp>
     </p:spTree>
-    <p:extLst>
-      <p:ext uri="{BB962C8B-B14F-4D97-AF65-F5344CB8AC3E}">
-        <p14:creationId xmlns:p14="http://schemas.microsoft.com/office/powerpoint/2010/main" val="1382663148"/>
-      </p:ext>
-    </p:extLst>
   </p:cSld>
   <p:clrMapOvr>
     <a:masterClrMapping/>
@@ -1136,13 +1076,7 @@
       </p:grpSpPr>
       <p:sp>
         <p:nvSpPr>
-          <p:cNvPr id="2" name="Заголовок 1">
-            <a:extLst>
-              <a:ext uri="{FF2B5EF4-FFF2-40B4-BE49-F238E27FC236}">
-                <a16:creationId xmlns:a16="http://schemas.microsoft.com/office/drawing/2014/main" id="{6CE539EE-736C-E408-8C86-A8A0B33C4082}"/>
-              </a:ext>
-            </a:extLst>
-          </p:cNvPr>
+          <p:cNvPr id="2" name="Заголовок 1"/>
           <p:cNvSpPr>
             <a:spLocks noGrp="1"/>
           </p:cNvSpPr>
@@ -1165,13 +1099,7 @@
       </p:sp>
       <p:sp>
         <p:nvSpPr>
-          <p:cNvPr id="3" name="Объект 2">
-            <a:extLst>
-              <a:ext uri="{FF2B5EF4-FFF2-40B4-BE49-F238E27FC236}">
-                <a16:creationId xmlns:a16="http://schemas.microsoft.com/office/drawing/2014/main" id="{44E97B53-13BB-EB28-500D-84F89728263C}"/>
-              </a:ext>
-            </a:extLst>
-          </p:cNvPr>
+          <p:cNvPr id="3" name="Объект 2"/>
           <p:cNvSpPr>
             <a:spLocks noGrp="1"/>
           </p:cNvSpPr>
@@ -1189,6 +1117,7 @@
               <a:rPr lang="ru-RU"/>
               <a:t>Образец текста</a:t>
             </a:r>
+            <a:endParaRPr lang="ru-RU"/>
           </a:p>
           <a:p>
             <a:pPr lvl="1"/>
@@ -1196,6 +1125,7 @@
               <a:rPr lang="ru-RU"/>
               <a:t>Второй уровень</a:t>
             </a:r>
+            <a:endParaRPr lang="ru-RU"/>
           </a:p>
           <a:p>
             <a:pPr lvl="2"/>
@@ -1203,6 +1133,7 @@
               <a:rPr lang="ru-RU"/>
               <a:t>Третий уровень</a:t>
             </a:r>
+            <a:endParaRPr lang="ru-RU"/>
           </a:p>
           <a:p>
             <a:pPr lvl="3"/>
@@ -1210,6 +1141,7 @@
               <a:rPr lang="ru-RU"/>
               <a:t>Четвертый уровень</a:t>
             </a:r>
+            <a:endParaRPr lang="ru-RU"/>
           </a:p>
           <a:p>
             <a:pPr lvl="4"/>
@@ -1223,13 +1155,7 @@
       </p:sp>
       <p:sp>
         <p:nvSpPr>
-          <p:cNvPr id="4" name="Дата 3">
-            <a:extLst>
-              <a:ext uri="{FF2B5EF4-FFF2-40B4-BE49-F238E27FC236}">
-                <a16:creationId xmlns:a16="http://schemas.microsoft.com/office/drawing/2014/main" id="{1999428F-4660-BEFD-BC20-E64D967F11DB}"/>
-              </a:ext>
-            </a:extLst>
-          </p:cNvPr>
+          <p:cNvPr id="4" name="Дата 3"/>
           <p:cNvSpPr>
             <a:spLocks noGrp="1"/>
           </p:cNvSpPr>
@@ -1244,7 +1170,6 @@
           <a:p>
             <a:fld id="{09BB4562-EE48-46C3-92EF-5FADBBFDBB53}" type="datetime1">
               <a:rPr lang="en-US" smtClean="0"/>
-              <a:t>5/23/2026</a:t>
             </a:fld>
             <a:endParaRPr lang="en-US"/>
           </a:p>
@@ -1252,13 +1177,7 @@
       </p:sp>
       <p:sp>
         <p:nvSpPr>
-          <p:cNvPr id="5" name="Нижний колонтитул 4">
-            <a:extLst>
-              <a:ext uri="{FF2B5EF4-FFF2-40B4-BE49-F238E27FC236}">
-                <a16:creationId xmlns:a16="http://schemas.microsoft.com/office/drawing/2014/main" id="{1AFFC447-C330-2B46-E7B6-F6278E4B9DA8}"/>
-              </a:ext>
-            </a:extLst>
-          </p:cNvPr>
+          <p:cNvPr id="5" name="Нижний колонтитул 4"/>
           <p:cNvSpPr>
             <a:spLocks noGrp="1"/>
           </p:cNvSpPr>
@@ -1277,13 +1196,7 @@
       </p:sp>
       <p:sp>
         <p:nvSpPr>
-          <p:cNvPr id="6" name="Номер слайда 5">
-            <a:extLst>
-              <a:ext uri="{FF2B5EF4-FFF2-40B4-BE49-F238E27FC236}">
-                <a16:creationId xmlns:a16="http://schemas.microsoft.com/office/drawing/2014/main" id="{7A831778-4060-0CF5-37F8-F55072475149}"/>
-              </a:ext>
-            </a:extLst>
-          </p:cNvPr>
+          <p:cNvPr id="6" name="Номер слайда 5"/>
           <p:cNvSpPr>
             <a:spLocks noGrp="1"/>
           </p:cNvSpPr>
@@ -1298,18 +1211,12 @@
           <a:p>
             <a:fld id="{39D93D24-9446-4BD4-975C-09DCDF7E2057}" type="slidenum">
               <a:rPr lang="en-US" smtClean="0"/>
-              <a:t>‹#›</a:t>
             </a:fld>
             <a:endParaRPr lang="en-US"/>
           </a:p>
         </p:txBody>
       </p:sp>
     </p:spTree>
-    <p:extLst>
-      <p:ext uri="{BB962C8B-B14F-4D97-AF65-F5344CB8AC3E}">
-        <p14:creationId xmlns:p14="http://schemas.microsoft.com/office/powerpoint/2010/main" val="3998423158"/>
-      </p:ext>
-    </p:extLst>
   </p:cSld>
   <p:clrMapOvr>
     <a:masterClrMapping/>
@@ -1336,13 +1243,7 @@
       </p:grpSpPr>
       <p:sp>
         <p:nvSpPr>
-          <p:cNvPr id="2" name="Заголовок 1">
-            <a:extLst>
-              <a:ext uri="{FF2B5EF4-FFF2-40B4-BE49-F238E27FC236}">
-                <a16:creationId xmlns:a16="http://schemas.microsoft.com/office/drawing/2014/main" id="{0B887629-BECA-E0E0-A781-BB36C915094F}"/>
-              </a:ext>
-            </a:extLst>
-          </p:cNvPr>
+          <p:cNvPr id="2" name="Заголовок 1"/>
           <p:cNvSpPr>
             <a:spLocks noGrp="1"/>
           </p:cNvSpPr>
@@ -1376,13 +1277,7 @@
       </p:sp>
       <p:sp>
         <p:nvSpPr>
-          <p:cNvPr id="3" name="Текст 2">
-            <a:extLst>
-              <a:ext uri="{FF2B5EF4-FFF2-40B4-BE49-F238E27FC236}">
-                <a16:creationId xmlns:a16="http://schemas.microsoft.com/office/drawing/2014/main" id="{F1BEA0D2-22D3-C3E0-FD73-B5629166D0B3}"/>
-              </a:ext>
-            </a:extLst>
-          </p:cNvPr>
+          <p:cNvPr id="3" name="Текст 2"/>
           <p:cNvSpPr>
             <a:spLocks noGrp="1"/>
           </p:cNvSpPr>
@@ -1498,18 +1393,13 @@
               <a:rPr lang="ru-RU" dirty="0"/>
               <a:t>Образец текста</a:t>
             </a:r>
-          </a:p>
-        </p:txBody>
-      </p:sp>
-      <p:sp>
-        <p:nvSpPr>
-          <p:cNvPr id="4" name="Дата 3">
-            <a:extLst>
-              <a:ext uri="{FF2B5EF4-FFF2-40B4-BE49-F238E27FC236}">
-                <a16:creationId xmlns:a16="http://schemas.microsoft.com/office/drawing/2014/main" id="{38387D5D-4980-F459-D8CB-CE1895C8C778}"/>
-              </a:ext>
-            </a:extLst>
-          </p:cNvPr>
+            <a:endParaRPr lang="ru-RU" dirty="0"/>
+          </a:p>
+        </p:txBody>
+      </p:sp>
+      <p:sp>
+        <p:nvSpPr>
+          <p:cNvPr id="4" name="Дата 3"/>
           <p:cNvSpPr>
             <a:spLocks noGrp="1"/>
           </p:cNvSpPr>
@@ -1524,7 +1414,6 @@
           <a:p>
             <a:fld id="{F610E3C8-8A0E-4E15-B33E-2B4AD00BB11C}" type="datetime1">
               <a:rPr lang="en-US" smtClean="0"/>
-              <a:t>5/23/2026</a:t>
             </a:fld>
             <a:endParaRPr lang="en-US"/>
           </a:p>
@@ -1532,13 +1421,7 @@
       </p:sp>
       <p:sp>
         <p:nvSpPr>
-          <p:cNvPr id="5" name="Нижний колонтитул 4">
-            <a:extLst>
-              <a:ext uri="{FF2B5EF4-FFF2-40B4-BE49-F238E27FC236}">
-                <a16:creationId xmlns:a16="http://schemas.microsoft.com/office/drawing/2014/main" id="{FD620B8D-BDB8-1E0D-2FCF-F1B1693BEF01}"/>
-              </a:ext>
-            </a:extLst>
-          </p:cNvPr>
+          <p:cNvPr id="5" name="Нижний колонтитул 4"/>
           <p:cNvSpPr>
             <a:spLocks noGrp="1"/>
           </p:cNvSpPr>
@@ -1557,13 +1440,7 @@
       </p:sp>
       <p:sp>
         <p:nvSpPr>
-          <p:cNvPr id="6" name="Номер слайда 5">
-            <a:extLst>
-              <a:ext uri="{FF2B5EF4-FFF2-40B4-BE49-F238E27FC236}">
-                <a16:creationId xmlns:a16="http://schemas.microsoft.com/office/drawing/2014/main" id="{0BB476C8-D459-8405-02D5-42CE5E75E104}"/>
-              </a:ext>
-            </a:extLst>
-          </p:cNvPr>
+          <p:cNvPr id="6" name="Номер слайда 5"/>
           <p:cNvSpPr>
             <a:spLocks noGrp="1"/>
           </p:cNvSpPr>
@@ -1578,18 +1455,12 @@
           <a:p>
             <a:fld id="{39D93D24-9446-4BD4-975C-09DCDF7E2057}" type="slidenum">
               <a:rPr lang="en-US" smtClean="0"/>
-              <a:t>‹#›</a:t>
             </a:fld>
             <a:endParaRPr lang="en-US" dirty="0"/>
           </a:p>
         </p:txBody>
       </p:sp>
     </p:spTree>
-    <p:extLst>
-      <p:ext uri="{BB962C8B-B14F-4D97-AF65-F5344CB8AC3E}">
-        <p14:creationId xmlns:p14="http://schemas.microsoft.com/office/powerpoint/2010/main" val="500536214"/>
-      </p:ext>
-    </p:extLst>
   </p:cSld>
   <p:clrMapOvr>
     <a:masterClrMapping/>
@@ -1616,13 +1487,7 @@
       </p:grpSpPr>
       <p:sp>
         <p:nvSpPr>
-          <p:cNvPr id="2" name="Заголовок 1">
-            <a:extLst>
-              <a:ext uri="{FF2B5EF4-FFF2-40B4-BE49-F238E27FC236}">
-                <a16:creationId xmlns:a16="http://schemas.microsoft.com/office/drawing/2014/main" id="{4F8C6864-A7E4-8FCF-61E3-628EAA8863D0}"/>
-              </a:ext>
-            </a:extLst>
-          </p:cNvPr>
+          <p:cNvPr id="2" name="Заголовок 1"/>
           <p:cNvSpPr>
             <a:spLocks noGrp="1"/>
           </p:cNvSpPr>
@@ -1645,13 +1510,7 @@
       </p:sp>
       <p:sp>
         <p:nvSpPr>
-          <p:cNvPr id="3" name="Объект 2">
-            <a:extLst>
-              <a:ext uri="{FF2B5EF4-FFF2-40B4-BE49-F238E27FC236}">
-                <a16:creationId xmlns:a16="http://schemas.microsoft.com/office/drawing/2014/main" id="{D661A951-EAD2-EB4E-9E5D-0996CDC3582C}"/>
-              </a:ext>
-            </a:extLst>
-          </p:cNvPr>
+          <p:cNvPr id="3" name="Объект 2"/>
           <p:cNvSpPr>
             <a:spLocks noGrp="1"/>
           </p:cNvSpPr>
@@ -1674,6 +1533,7 @@
               <a:rPr lang="ru-RU"/>
               <a:t>Образец текста</a:t>
             </a:r>
+            <a:endParaRPr lang="ru-RU"/>
           </a:p>
           <a:p>
             <a:pPr lvl="1"/>
@@ -1681,6 +1541,7 @@
               <a:rPr lang="ru-RU"/>
               <a:t>Второй уровень</a:t>
             </a:r>
+            <a:endParaRPr lang="ru-RU"/>
           </a:p>
           <a:p>
             <a:pPr lvl="2"/>
@@ -1688,6 +1549,7 @@
               <a:rPr lang="ru-RU"/>
               <a:t>Третий уровень</a:t>
             </a:r>
+            <a:endParaRPr lang="ru-RU"/>
           </a:p>
           <a:p>
             <a:pPr lvl="3"/>
@@ -1695,6 +1557,7 @@
               <a:rPr lang="ru-RU"/>
               <a:t>Четвертый уровень</a:t>
             </a:r>
+            <a:endParaRPr lang="ru-RU"/>
           </a:p>
           <a:p>
             <a:pPr lvl="4"/>
@@ -1708,13 +1571,7 @@
       </p:sp>
       <p:sp>
         <p:nvSpPr>
-          <p:cNvPr id="4" name="Объект 3">
-            <a:extLst>
-              <a:ext uri="{FF2B5EF4-FFF2-40B4-BE49-F238E27FC236}">
-                <a16:creationId xmlns:a16="http://schemas.microsoft.com/office/drawing/2014/main" id="{BA3300D6-56CA-C887-19F0-A40D041A2523}"/>
-              </a:ext>
-            </a:extLst>
-          </p:cNvPr>
+          <p:cNvPr id="4" name="Объект 3"/>
           <p:cNvSpPr>
             <a:spLocks noGrp="1"/>
           </p:cNvSpPr>
@@ -1737,6 +1594,7 @@
               <a:rPr lang="ru-RU"/>
               <a:t>Образец текста</a:t>
             </a:r>
+            <a:endParaRPr lang="ru-RU"/>
           </a:p>
           <a:p>
             <a:pPr lvl="1"/>
@@ -1744,6 +1602,7 @@
               <a:rPr lang="ru-RU"/>
               <a:t>Второй уровень</a:t>
             </a:r>
+            <a:endParaRPr lang="ru-RU"/>
           </a:p>
           <a:p>
             <a:pPr lvl="2"/>
@@ -1751,6 +1610,7 @@
               <a:rPr lang="ru-RU"/>
               <a:t>Третий уровень</a:t>
             </a:r>
+            <a:endParaRPr lang="ru-RU"/>
           </a:p>
           <a:p>
             <a:pPr lvl="3"/>
@@ -1758,6 +1618,7 @@
               <a:rPr lang="ru-RU"/>
               <a:t>Четвертый уровень</a:t>
             </a:r>
+            <a:endParaRPr lang="ru-RU"/>
           </a:p>
           <a:p>
             <a:pPr lvl="4"/>
@@ -1771,13 +1632,7 @@
       </p:sp>
       <p:sp>
         <p:nvSpPr>
-          <p:cNvPr id="5" name="Дата 4">
-            <a:extLst>
-              <a:ext uri="{FF2B5EF4-FFF2-40B4-BE49-F238E27FC236}">
-                <a16:creationId xmlns:a16="http://schemas.microsoft.com/office/drawing/2014/main" id="{73D3B82C-C55C-8490-71EA-CFB099CC92C3}"/>
-              </a:ext>
-            </a:extLst>
-          </p:cNvPr>
+          <p:cNvPr id="5" name="Дата 4"/>
           <p:cNvSpPr>
             <a:spLocks noGrp="1"/>
           </p:cNvSpPr>
@@ -1792,7 +1647,6 @@
           <a:p>
             <a:fld id="{42B60939-686C-479D-AFE8-70FB7B5470C6}" type="datetime1">
               <a:rPr lang="en-US" smtClean="0"/>
-              <a:t>5/23/2026</a:t>
             </a:fld>
             <a:endParaRPr lang="en-US"/>
           </a:p>
@@ -1800,13 +1654,7 @@
       </p:sp>
       <p:sp>
         <p:nvSpPr>
-          <p:cNvPr id="6" name="Нижний колонтитул 5">
-            <a:extLst>
-              <a:ext uri="{FF2B5EF4-FFF2-40B4-BE49-F238E27FC236}">
-                <a16:creationId xmlns:a16="http://schemas.microsoft.com/office/drawing/2014/main" id="{5886093E-A9C3-6853-420E-82C38F1B4C22}"/>
-              </a:ext>
-            </a:extLst>
-          </p:cNvPr>
+          <p:cNvPr id="6" name="Нижний колонтитул 5"/>
           <p:cNvSpPr>
             <a:spLocks noGrp="1"/>
           </p:cNvSpPr>
@@ -1825,13 +1673,7 @@
       </p:sp>
       <p:sp>
         <p:nvSpPr>
-          <p:cNvPr id="7" name="Номер слайда 6">
-            <a:extLst>
-              <a:ext uri="{FF2B5EF4-FFF2-40B4-BE49-F238E27FC236}">
-                <a16:creationId xmlns:a16="http://schemas.microsoft.com/office/drawing/2014/main" id="{A0E96929-A095-C6CB-ECB5-D4368F668F27}"/>
-              </a:ext>
-            </a:extLst>
-          </p:cNvPr>
+          <p:cNvPr id="7" name="Номер слайда 6"/>
           <p:cNvSpPr>
             <a:spLocks noGrp="1"/>
           </p:cNvSpPr>
@@ -1846,18 +1688,12 @@
           <a:p>
             <a:fld id="{39D93D24-9446-4BD4-975C-09DCDF7E2057}" type="slidenum">
               <a:rPr lang="en-US" smtClean="0"/>
-              <a:t>‹#›</a:t>
             </a:fld>
             <a:endParaRPr lang="en-US"/>
           </a:p>
         </p:txBody>
       </p:sp>
     </p:spTree>
-    <p:extLst>
-      <p:ext uri="{BB962C8B-B14F-4D97-AF65-F5344CB8AC3E}">
-        <p14:creationId xmlns:p14="http://schemas.microsoft.com/office/powerpoint/2010/main" val="1564819064"/>
-      </p:ext>
-    </p:extLst>
   </p:cSld>
   <p:clrMapOvr>
     <a:masterClrMapping/>
@@ -1884,13 +1720,7 @@
       </p:grpSpPr>
       <p:sp>
         <p:nvSpPr>
-          <p:cNvPr id="2" name="Заголовок 1">
-            <a:extLst>
-              <a:ext uri="{FF2B5EF4-FFF2-40B4-BE49-F238E27FC236}">
-                <a16:creationId xmlns:a16="http://schemas.microsoft.com/office/drawing/2014/main" id="{168798EA-D361-4904-B109-6BFE1E3572C4}"/>
-              </a:ext>
-            </a:extLst>
-          </p:cNvPr>
+          <p:cNvPr id="2" name="Заголовок 1"/>
           <p:cNvSpPr>
             <a:spLocks noGrp="1"/>
           </p:cNvSpPr>
@@ -1918,13 +1748,7 @@
       </p:sp>
       <p:sp>
         <p:nvSpPr>
-          <p:cNvPr id="3" name="Текст 2">
-            <a:extLst>
-              <a:ext uri="{FF2B5EF4-FFF2-40B4-BE49-F238E27FC236}">
-                <a16:creationId xmlns:a16="http://schemas.microsoft.com/office/drawing/2014/main" id="{E12776D9-70CB-78A1-EDB2-36E35719C38A}"/>
-              </a:ext>
-            </a:extLst>
-          </p:cNvPr>
+          <p:cNvPr id="3" name="Текст 2"/>
           <p:cNvSpPr>
             <a:spLocks noGrp="1"/>
           </p:cNvSpPr>
@@ -1984,18 +1808,13 @@
               <a:rPr lang="ru-RU"/>
               <a:t>Образец текста</a:t>
             </a:r>
-          </a:p>
-        </p:txBody>
-      </p:sp>
-      <p:sp>
-        <p:nvSpPr>
-          <p:cNvPr id="4" name="Объект 3">
-            <a:extLst>
-              <a:ext uri="{FF2B5EF4-FFF2-40B4-BE49-F238E27FC236}">
-                <a16:creationId xmlns:a16="http://schemas.microsoft.com/office/drawing/2014/main" id="{B6B9D825-55DA-01A2-8315-B05F7F3E93A4}"/>
-              </a:ext>
-            </a:extLst>
-          </p:cNvPr>
+            <a:endParaRPr lang="ru-RU"/>
+          </a:p>
+        </p:txBody>
+      </p:sp>
+      <p:sp>
+        <p:nvSpPr>
+          <p:cNvPr id="4" name="Объект 3"/>
           <p:cNvSpPr>
             <a:spLocks noGrp="1"/>
           </p:cNvSpPr>
@@ -2018,6 +1837,7 @@
               <a:rPr lang="ru-RU"/>
               <a:t>Образец текста</a:t>
             </a:r>
+            <a:endParaRPr lang="ru-RU"/>
           </a:p>
           <a:p>
             <a:pPr lvl="1"/>
@@ -2025,6 +1845,7 @@
               <a:rPr lang="ru-RU"/>
               <a:t>Второй уровень</a:t>
             </a:r>
+            <a:endParaRPr lang="ru-RU"/>
           </a:p>
           <a:p>
             <a:pPr lvl="2"/>
@@ -2032,6 +1853,7 @@
               <a:rPr lang="ru-RU"/>
               <a:t>Третий уровень</a:t>
             </a:r>
+            <a:endParaRPr lang="ru-RU"/>
           </a:p>
           <a:p>
             <a:pPr lvl="3"/>
@@ -2039,6 +1861,7 @@
               <a:rPr lang="ru-RU"/>
               <a:t>Четвертый уровень</a:t>
             </a:r>
+            <a:endParaRPr lang="ru-RU"/>
           </a:p>
           <a:p>
             <a:pPr lvl="4"/>
@@ -2052,13 +1875,7 @@
       </p:sp>
       <p:sp>
         <p:nvSpPr>
-          <p:cNvPr id="5" name="Текст 4">
-            <a:extLst>
-              <a:ext uri="{FF2B5EF4-FFF2-40B4-BE49-F238E27FC236}">
-                <a16:creationId xmlns:a16="http://schemas.microsoft.com/office/drawing/2014/main" id="{8397A8FB-563F-98BD-2BEE-A86DB0DE3264}"/>
-              </a:ext>
-            </a:extLst>
-          </p:cNvPr>
+          <p:cNvPr id="5" name="Текст 4"/>
           <p:cNvSpPr>
             <a:spLocks noGrp="1"/>
           </p:cNvSpPr>
@@ -2118,18 +1935,13 @@
               <a:rPr lang="ru-RU"/>
               <a:t>Образец текста</a:t>
             </a:r>
-          </a:p>
-        </p:txBody>
-      </p:sp>
-      <p:sp>
-        <p:nvSpPr>
-          <p:cNvPr id="6" name="Объект 5">
-            <a:extLst>
-              <a:ext uri="{FF2B5EF4-FFF2-40B4-BE49-F238E27FC236}">
-                <a16:creationId xmlns:a16="http://schemas.microsoft.com/office/drawing/2014/main" id="{3AE169AE-65CC-B2C8-ED62-AAC98A188EA0}"/>
-              </a:ext>
-            </a:extLst>
-          </p:cNvPr>
+            <a:endParaRPr lang="ru-RU"/>
+          </a:p>
+        </p:txBody>
+      </p:sp>
+      <p:sp>
+        <p:nvSpPr>
+          <p:cNvPr id="6" name="Объект 5"/>
           <p:cNvSpPr>
             <a:spLocks noGrp="1"/>
           </p:cNvSpPr>
@@ -2152,6 +1964,7 @@
               <a:rPr lang="ru-RU"/>
               <a:t>Образец текста</a:t>
             </a:r>
+            <a:endParaRPr lang="ru-RU"/>
           </a:p>
           <a:p>
             <a:pPr lvl="1"/>
@@ -2159,6 +1972,7 @@
               <a:rPr lang="ru-RU"/>
               <a:t>Второй уровень</a:t>
             </a:r>
+            <a:endParaRPr lang="ru-RU"/>
           </a:p>
           <a:p>
             <a:pPr lvl="2"/>
@@ -2166,6 +1980,7 @@
               <a:rPr lang="ru-RU"/>
               <a:t>Третий уровень</a:t>
             </a:r>
+            <a:endParaRPr lang="ru-RU"/>
           </a:p>
           <a:p>
             <a:pPr lvl="3"/>
@@ -2173,6 +1988,7 @@
               <a:rPr lang="ru-RU"/>
               <a:t>Четвертый уровень</a:t>
             </a:r>
+            <a:endParaRPr lang="ru-RU"/>
           </a:p>
           <a:p>
             <a:pPr lvl="4"/>
@@ -2186,13 +2002,7 @@
       </p:sp>
       <p:sp>
         <p:nvSpPr>
-          <p:cNvPr id="7" name="Дата 6">
-            <a:extLst>
-              <a:ext uri="{FF2B5EF4-FFF2-40B4-BE49-F238E27FC236}">
-                <a16:creationId xmlns:a16="http://schemas.microsoft.com/office/drawing/2014/main" id="{73E68E94-7A54-0500-BD26-9DA359369C05}"/>
-              </a:ext>
-            </a:extLst>
-          </p:cNvPr>
+          <p:cNvPr id="7" name="Дата 6"/>
           <p:cNvSpPr>
             <a:spLocks noGrp="1"/>
           </p:cNvSpPr>
@@ -2207,7 +2017,6 @@
           <a:p>
             <a:fld id="{5D1B2C66-1229-40FD-AD20-409E946D1EFB}" type="datetime1">
               <a:rPr lang="en-US" smtClean="0"/>
-              <a:t>5/23/2026</a:t>
             </a:fld>
             <a:endParaRPr lang="en-US"/>
           </a:p>
@@ -2215,13 +2024,7 @@
       </p:sp>
       <p:sp>
         <p:nvSpPr>
-          <p:cNvPr id="8" name="Нижний колонтитул 7">
-            <a:extLst>
-              <a:ext uri="{FF2B5EF4-FFF2-40B4-BE49-F238E27FC236}">
-                <a16:creationId xmlns:a16="http://schemas.microsoft.com/office/drawing/2014/main" id="{0D76FB30-271A-9BEC-F8CC-BB335D3ADBB0}"/>
-              </a:ext>
-            </a:extLst>
-          </p:cNvPr>
+          <p:cNvPr id="8" name="Нижний колонтитул 7"/>
           <p:cNvSpPr>
             <a:spLocks noGrp="1"/>
           </p:cNvSpPr>
@@ -2240,13 +2043,7 @@
       </p:sp>
       <p:sp>
         <p:nvSpPr>
-          <p:cNvPr id="9" name="Номер слайда 8">
-            <a:extLst>
-              <a:ext uri="{FF2B5EF4-FFF2-40B4-BE49-F238E27FC236}">
-                <a16:creationId xmlns:a16="http://schemas.microsoft.com/office/drawing/2014/main" id="{256A6424-21D2-159A-63AB-D36D5ACEE298}"/>
-              </a:ext>
-            </a:extLst>
-          </p:cNvPr>
+          <p:cNvPr id="9" name="Номер слайда 8"/>
           <p:cNvSpPr>
             <a:spLocks noGrp="1"/>
           </p:cNvSpPr>
@@ -2261,18 +2058,12 @@
           <a:p>
             <a:fld id="{39D93D24-9446-4BD4-975C-09DCDF7E2057}" type="slidenum">
               <a:rPr lang="en-US" smtClean="0"/>
-              <a:t>‹#›</a:t>
             </a:fld>
             <a:endParaRPr lang="en-US"/>
           </a:p>
         </p:txBody>
       </p:sp>
     </p:spTree>
-    <p:extLst>
-      <p:ext uri="{BB962C8B-B14F-4D97-AF65-F5344CB8AC3E}">
-        <p14:creationId xmlns:p14="http://schemas.microsoft.com/office/powerpoint/2010/main" val="3716941016"/>
-      </p:ext>
-    </p:extLst>
   </p:cSld>
   <p:clrMapOvr>
     <a:masterClrMapping/>
@@ -2299,13 +2090,7 @@
       </p:grpSpPr>
       <p:sp>
         <p:nvSpPr>
-          <p:cNvPr id="2" name="Заголовок 1">
-            <a:extLst>
-              <a:ext uri="{FF2B5EF4-FFF2-40B4-BE49-F238E27FC236}">
-                <a16:creationId xmlns:a16="http://schemas.microsoft.com/office/drawing/2014/main" id="{5D43C828-00E9-427C-606A-11CC0B05C016}"/>
-              </a:ext>
-            </a:extLst>
-          </p:cNvPr>
+          <p:cNvPr id="2" name="Заголовок 1"/>
           <p:cNvSpPr>
             <a:spLocks noGrp="1"/>
           </p:cNvSpPr>
@@ -2328,13 +2113,7 @@
       </p:sp>
       <p:sp>
         <p:nvSpPr>
-          <p:cNvPr id="3" name="Дата 2">
-            <a:extLst>
-              <a:ext uri="{FF2B5EF4-FFF2-40B4-BE49-F238E27FC236}">
-                <a16:creationId xmlns:a16="http://schemas.microsoft.com/office/drawing/2014/main" id="{D5169D4F-93AD-DB23-59E7-61C9830513C7}"/>
-              </a:ext>
-            </a:extLst>
-          </p:cNvPr>
+          <p:cNvPr id="3" name="Дата 2"/>
           <p:cNvSpPr>
             <a:spLocks noGrp="1"/>
           </p:cNvSpPr>
@@ -2349,7 +2128,6 @@
           <a:p>
             <a:fld id="{BCB0ECC4-00A1-4167-A353-C60DC9153C89}" type="datetime1">
               <a:rPr lang="en-US" smtClean="0"/>
-              <a:t>5/23/2026</a:t>
             </a:fld>
             <a:endParaRPr lang="en-US"/>
           </a:p>
@@ -2357,13 +2135,7 @@
       </p:sp>
       <p:sp>
         <p:nvSpPr>
-          <p:cNvPr id="4" name="Нижний колонтитул 3">
-            <a:extLst>
-              <a:ext uri="{FF2B5EF4-FFF2-40B4-BE49-F238E27FC236}">
-                <a16:creationId xmlns:a16="http://schemas.microsoft.com/office/drawing/2014/main" id="{525D989C-1F1B-9F72-B2B0-B0727C4D41C4}"/>
-              </a:ext>
-            </a:extLst>
-          </p:cNvPr>
+          <p:cNvPr id="4" name="Нижний колонтитул 3"/>
           <p:cNvSpPr>
             <a:spLocks noGrp="1"/>
           </p:cNvSpPr>
@@ -2382,13 +2154,7 @@
       </p:sp>
       <p:sp>
         <p:nvSpPr>
-          <p:cNvPr id="5" name="Номер слайда 4">
-            <a:extLst>
-              <a:ext uri="{FF2B5EF4-FFF2-40B4-BE49-F238E27FC236}">
-                <a16:creationId xmlns:a16="http://schemas.microsoft.com/office/drawing/2014/main" id="{E88FBAF7-177F-C59A-36B0-C1392D7DEC0E}"/>
-              </a:ext>
-            </a:extLst>
-          </p:cNvPr>
+          <p:cNvPr id="5" name="Номер слайда 4"/>
           <p:cNvSpPr>
             <a:spLocks noGrp="1"/>
           </p:cNvSpPr>
@@ -2403,18 +2169,12 @@
           <a:p>
             <a:fld id="{39D93D24-9446-4BD4-975C-09DCDF7E2057}" type="slidenum">
               <a:rPr lang="en-US" smtClean="0"/>
-              <a:t>‹#›</a:t>
             </a:fld>
             <a:endParaRPr lang="en-US"/>
           </a:p>
         </p:txBody>
       </p:sp>
     </p:spTree>
-    <p:extLst>
-      <p:ext uri="{BB962C8B-B14F-4D97-AF65-F5344CB8AC3E}">
-        <p14:creationId xmlns:p14="http://schemas.microsoft.com/office/powerpoint/2010/main" val="2056792078"/>
-      </p:ext>
-    </p:extLst>
   </p:cSld>
   <p:clrMapOvr>
     <a:masterClrMapping/>
@@ -2441,13 +2201,7 @@
       </p:grpSpPr>
       <p:sp>
         <p:nvSpPr>
-          <p:cNvPr id="2" name="Дата 1">
-            <a:extLst>
-              <a:ext uri="{FF2B5EF4-FFF2-40B4-BE49-F238E27FC236}">
-                <a16:creationId xmlns:a16="http://schemas.microsoft.com/office/drawing/2014/main" id="{B84DED8E-49A5-E07E-2FD0-0F1DE8EABA33}"/>
-              </a:ext>
-            </a:extLst>
-          </p:cNvPr>
+          <p:cNvPr id="2" name="Дата 1"/>
           <p:cNvSpPr>
             <a:spLocks noGrp="1"/>
           </p:cNvSpPr>
@@ -2462,7 +2216,6 @@
           <a:p>
             <a:fld id="{C918EC25-9B44-4513-B83C-731E1DF7EE1E}" type="datetime1">
               <a:rPr lang="en-US" smtClean="0"/>
-              <a:t>5/23/2026</a:t>
             </a:fld>
             <a:endParaRPr lang="en-US"/>
           </a:p>
@@ -2470,13 +2223,7 @@
       </p:sp>
       <p:sp>
         <p:nvSpPr>
-          <p:cNvPr id="3" name="Нижний колонтитул 2">
-            <a:extLst>
-              <a:ext uri="{FF2B5EF4-FFF2-40B4-BE49-F238E27FC236}">
-                <a16:creationId xmlns:a16="http://schemas.microsoft.com/office/drawing/2014/main" id="{B240218F-A324-A226-A46D-7A9487062CE6}"/>
-              </a:ext>
-            </a:extLst>
-          </p:cNvPr>
+          <p:cNvPr id="3" name="Нижний колонтитул 2"/>
           <p:cNvSpPr>
             <a:spLocks noGrp="1"/>
           </p:cNvSpPr>
@@ -2495,13 +2242,7 @@
       </p:sp>
       <p:sp>
         <p:nvSpPr>
-          <p:cNvPr id="4" name="Номер слайда 3">
-            <a:extLst>
-              <a:ext uri="{FF2B5EF4-FFF2-40B4-BE49-F238E27FC236}">
-                <a16:creationId xmlns:a16="http://schemas.microsoft.com/office/drawing/2014/main" id="{DE9F70EE-C86F-0202-EED7-E0F64BFB02EC}"/>
-              </a:ext>
-            </a:extLst>
-          </p:cNvPr>
+          <p:cNvPr id="4" name="Номер слайда 3"/>
           <p:cNvSpPr>
             <a:spLocks noGrp="1"/>
           </p:cNvSpPr>
@@ -2516,18 +2257,12 @@
           <a:p>
             <a:fld id="{39D93D24-9446-4BD4-975C-09DCDF7E2057}" type="slidenum">
               <a:rPr lang="en-US" smtClean="0"/>
-              <a:t>‹#›</a:t>
             </a:fld>
             <a:endParaRPr lang="en-US"/>
           </a:p>
         </p:txBody>
       </p:sp>
     </p:spTree>
-    <p:extLst>
-      <p:ext uri="{BB962C8B-B14F-4D97-AF65-F5344CB8AC3E}">
-        <p14:creationId xmlns:p14="http://schemas.microsoft.com/office/powerpoint/2010/main" val="1800796192"/>
-      </p:ext>
-    </p:extLst>
   </p:cSld>
   <p:clrMapOvr>
     <a:masterClrMapping/>
@@ -2554,13 +2289,7 @@
       </p:grpSpPr>
       <p:sp>
         <p:nvSpPr>
-          <p:cNvPr id="2" name="Заголовок 1">
-            <a:extLst>
-              <a:ext uri="{FF2B5EF4-FFF2-40B4-BE49-F238E27FC236}">
-                <a16:creationId xmlns:a16="http://schemas.microsoft.com/office/drawing/2014/main" id="{C7A77810-2760-A226-974C-4D9845D8617D}"/>
-              </a:ext>
-            </a:extLst>
-          </p:cNvPr>
+          <p:cNvPr id="2" name="Заголовок 1"/>
           <p:cNvSpPr>
             <a:spLocks noGrp="1"/>
           </p:cNvSpPr>
@@ -2592,13 +2321,7 @@
       </p:sp>
       <p:sp>
         <p:nvSpPr>
-          <p:cNvPr id="3" name="Объект 2">
-            <a:extLst>
-              <a:ext uri="{FF2B5EF4-FFF2-40B4-BE49-F238E27FC236}">
-                <a16:creationId xmlns:a16="http://schemas.microsoft.com/office/drawing/2014/main" id="{9D57565E-8F7B-E754-A57D-1CDD05882E4F}"/>
-              </a:ext>
-            </a:extLst>
-          </p:cNvPr>
+          <p:cNvPr id="3" name="Объект 2"/>
           <p:cNvSpPr>
             <a:spLocks noGrp="1"/>
           </p:cNvSpPr>
@@ -2649,6 +2372,7 @@
               <a:rPr lang="ru-RU"/>
               <a:t>Образец текста</a:t>
             </a:r>
+            <a:endParaRPr lang="ru-RU"/>
           </a:p>
           <a:p>
             <a:pPr lvl="1"/>
@@ -2656,6 +2380,7 @@
               <a:rPr lang="ru-RU"/>
               <a:t>Второй уровень</a:t>
             </a:r>
+            <a:endParaRPr lang="ru-RU"/>
           </a:p>
           <a:p>
             <a:pPr lvl="2"/>
@@ -2663,6 +2388,7 @@
               <a:rPr lang="ru-RU"/>
               <a:t>Третий уровень</a:t>
             </a:r>
+            <a:endParaRPr lang="ru-RU"/>
           </a:p>
           <a:p>
             <a:pPr lvl="3"/>
@@ -2670,6 +2396,7 @@
               <a:rPr lang="ru-RU"/>
               <a:t>Четвертый уровень</a:t>
             </a:r>
+            <a:endParaRPr lang="ru-RU"/>
           </a:p>
           <a:p>
             <a:pPr lvl="4"/>
@@ -2683,13 +2410,7 @@
       </p:sp>
       <p:sp>
         <p:nvSpPr>
-          <p:cNvPr id="4" name="Текст 3">
-            <a:extLst>
-              <a:ext uri="{FF2B5EF4-FFF2-40B4-BE49-F238E27FC236}">
-                <a16:creationId xmlns:a16="http://schemas.microsoft.com/office/drawing/2014/main" id="{7232A4FC-5534-FF67-1AE8-D9388561EE98}"/>
-              </a:ext>
-            </a:extLst>
-          </p:cNvPr>
+          <p:cNvPr id="4" name="Текст 3"/>
           <p:cNvSpPr>
             <a:spLocks noGrp="1"/>
           </p:cNvSpPr>
@@ -2749,18 +2470,13 @@
               <a:rPr lang="ru-RU"/>
               <a:t>Образец текста</a:t>
             </a:r>
-          </a:p>
-        </p:txBody>
-      </p:sp>
-      <p:sp>
-        <p:nvSpPr>
-          <p:cNvPr id="5" name="Дата 4">
-            <a:extLst>
-              <a:ext uri="{FF2B5EF4-FFF2-40B4-BE49-F238E27FC236}">
-                <a16:creationId xmlns:a16="http://schemas.microsoft.com/office/drawing/2014/main" id="{21F76382-C11B-D1B8-0A81-36D28E1E2326}"/>
-              </a:ext>
-            </a:extLst>
-          </p:cNvPr>
+            <a:endParaRPr lang="ru-RU"/>
+          </a:p>
+        </p:txBody>
+      </p:sp>
+      <p:sp>
+        <p:nvSpPr>
+          <p:cNvPr id="5" name="Дата 4"/>
           <p:cNvSpPr>
             <a:spLocks noGrp="1"/>
           </p:cNvSpPr>
@@ -2775,7 +2491,6 @@
           <a:p>
             <a:fld id="{A5CE191C-7F42-454F-981D-7608BB1425BD}" type="datetime1">
               <a:rPr lang="en-US" smtClean="0"/>
-              <a:t>5/23/2026</a:t>
             </a:fld>
             <a:endParaRPr lang="en-US"/>
           </a:p>
@@ -2783,13 +2498,7 @@
       </p:sp>
       <p:sp>
         <p:nvSpPr>
-          <p:cNvPr id="6" name="Нижний колонтитул 5">
-            <a:extLst>
-              <a:ext uri="{FF2B5EF4-FFF2-40B4-BE49-F238E27FC236}">
-                <a16:creationId xmlns:a16="http://schemas.microsoft.com/office/drawing/2014/main" id="{139B462F-70BC-813A-48EA-91C7F9A181C7}"/>
-              </a:ext>
-            </a:extLst>
-          </p:cNvPr>
+          <p:cNvPr id="6" name="Нижний колонтитул 5"/>
           <p:cNvSpPr>
             <a:spLocks noGrp="1"/>
           </p:cNvSpPr>
@@ -2808,13 +2517,7 @@
       </p:sp>
       <p:sp>
         <p:nvSpPr>
-          <p:cNvPr id="7" name="Номер слайда 6">
-            <a:extLst>
-              <a:ext uri="{FF2B5EF4-FFF2-40B4-BE49-F238E27FC236}">
-                <a16:creationId xmlns:a16="http://schemas.microsoft.com/office/drawing/2014/main" id="{85E1855A-9009-CC1A-CB70-6172876ABB8F}"/>
-              </a:ext>
-            </a:extLst>
-          </p:cNvPr>
+          <p:cNvPr id="7" name="Номер слайда 6"/>
           <p:cNvSpPr>
             <a:spLocks noGrp="1"/>
           </p:cNvSpPr>
@@ -2829,18 +2532,12 @@
           <a:p>
             <a:fld id="{39D93D24-9446-4BD4-975C-09DCDF7E2057}" type="slidenum">
               <a:rPr lang="en-US" smtClean="0"/>
-              <a:t>‹#›</a:t>
             </a:fld>
             <a:endParaRPr lang="en-US"/>
           </a:p>
         </p:txBody>
       </p:sp>
     </p:spTree>
-    <p:extLst>
-      <p:ext uri="{BB962C8B-B14F-4D97-AF65-F5344CB8AC3E}">
-        <p14:creationId xmlns:p14="http://schemas.microsoft.com/office/powerpoint/2010/main" val="1938907137"/>
-      </p:ext>
-    </p:extLst>
   </p:cSld>
   <p:clrMapOvr>
     <a:masterClrMapping/>
@@ -2867,13 +2564,7 @@
       </p:grpSpPr>
       <p:sp>
         <p:nvSpPr>
-          <p:cNvPr id="2" name="Заголовок 1">
-            <a:extLst>
-              <a:ext uri="{FF2B5EF4-FFF2-40B4-BE49-F238E27FC236}">
-                <a16:creationId xmlns:a16="http://schemas.microsoft.com/office/drawing/2014/main" id="{CEE9BA0E-2440-B0D3-AB97-8E920F279514}"/>
-              </a:ext>
-            </a:extLst>
-          </p:cNvPr>
+          <p:cNvPr id="2" name="Заголовок 1"/>
           <p:cNvSpPr>
             <a:spLocks noGrp="1"/>
           </p:cNvSpPr>
@@ -2905,13 +2596,7 @@
       </p:sp>
       <p:sp>
         <p:nvSpPr>
-          <p:cNvPr id="3" name="Рисунок 2">
-            <a:extLst>
-              <a:ext uri="{FF2B5EF4-FFF2-40B4-BE49-F238E27FC236}">
-                <a16:creationId xmlns:a16="http://schemas.microsoft.com/office/drawing/2014/main" id="{5F681D03-EF98-EDBD-8260-5DE0B3C90A2C}"/>
-              </a:ext>
-            </a:extLst>
-          </p:cNvPr>
+          <p:cNvPr id="3" name="Рисунок 2"/>
           <p:cNvSpPr>
             <a:spLocks noGrp="1"/>
           </p:cNvSpPr>
@@ -2972,13 +2657,7 @@
       </p:sp>
       <p:sp>
         <p:nvSpPr>
-          <p:cNvPr id="4" name="Текст 3">
-            <a:extLst>
-              <a:ext uri="{FF2B5EF4-FFF2-40B4-BE49-F238E27FC236}">
-                <a16:creationId xmlns:a16="http://schemas.microsoft.com/office/drawing/2014/main" id="{C9FB2B00-2F77-CE47-A7BA-A342670AA7F1}"/>
-              </a:ext>
-            </a:extLst>
-          </p:cNvPr>
+          <p:cNvPr id="4" name="Текст 3"/>
           <p:cNvSpPr>
             <a:spLocks noGrp="1"/>
           </p:cNvSpPr>
@@ -3038,18 +2717,13 @@
               <a:rPr lang="ru-RU"/>
               <a:t>Образец текста</a:t>
             </a:r>
-          </a:p>
-        </p:txBody>
-      </p:sp>
-      <p:sp>
-        <p:nvSpPr>
-          <p:cNvPr id="5" name="Дата 4">
-            <a:extLst>
-              <a:ext uri="{FF2B5EF4-FFF2-40B4-BE49-F238E27FC236}">
-                <a16:creationId xmlns:a16="http://schemas.microsoft.com/office/drawing/2014/main" id="{DD2D4647-2ADE-A2E9-C17B-E1B380BFEE6C}"/>
-              </a:ext>
-            </a:extLst>
-          </p:cNvPr>
+            <a:endParaRPr lang="ru-RU"/>
+          </a:p>
+        </p:txBody>
+      </p:sp>
+      <p:sp>
+        <p:nvSpPr>
+          <p:cNvPr id="5" name="Дата 4"/>
           <p:cNvSpPr>
             <a:spLocks noGrp="1"/>
           </p:cNvSpPr>
@@ -3064,7 +2738,6 @@
           <a:p>
             <a:fld id="{A33477AD-DDFE-411A-9C3A-6AEEBBEF769B}" type="datetime1">
               <a:rPr lang="en-US" smtClean="0"/>
-              <a:t>5/23/2026</a:t>
             </a:fld>
             <a:endParaRPr lang="en-US"/>
           </a:p>
@@ -3072,13 +2745,7 @@
       </p:sp>
       <p:sp>
         <p:nvSpPr>
-          <p:cNvPr id="6" name="Нижний колонтитул 5">
-            <a:extLst>
-              <a:ext uri="{FF2B5EF4-FFF2-40B4-BE49-F238E27FC236}">
-                <a16:creationId xmlns:a16="http://schemas.microsoft.com/office/drawing/2014/main" id="{743E0D0B-4232-B4CF-AFE7-91A7F82E6C73}"/>
-              </a:ext>
-            </a:extLst>
-          </p:cNvPr>
+          <p:cNvPr id="6" name="Нижний колонтитул 5"/>
           <p:cNvSpPr>
             <a:spLocks noGrp="1"/>
           </p:cNvSpPr>
@@ -3097,13 +2764,7 @@
       </p:sp>
       <p:sp>
         <p:nvSpPr>
-          <p:cNvPr id="7" name="Номер слайда 6">
-            <a:extLst>
-              <a:ext uri="{FF2B5EF4-FFF2-40B4-BE49-F238E27FC236}">
-                <a16:creationId xmlns:a16="http://schemas.microsoft.com/office/drawing/2014/main" id="{0C2BBDE0-1AFF-9A1C-88AA-933968A04543}"/>
-              </a:ext>
-            </a:extLst>
-          </p:cNvPr>
+          <p:cNvPr id="7" name="Номер слайда 6"/>
           <p:cNvSpPr>
             <a:spLocks noGrp="1"/>
           </p:cNvSpPr>
@@ -3118,18 +2779,12 @@
           <a:p>
             <a:fld id="{39D93D24-9446-4BD4-975C-09DCDF7E2057}" type="slidenum">
               <a:rPr lang="en-US" smtClean="0"/>
-              <a:t>‹#›</a:t>
             </a:fld>
             <a:endParaRPr lang="en-US"/>
           </a:p>
         </p:txBody>
       </p:sp>
     </p:spTree>
-    <p:extLst>
-      <p:ext uri="{BB962C8B-B14F-4D97-AF65-F5344CB8AC3E}">
-        <p14:creationId xmlns:p14="http://schemas.microsoft.com/office/powerpoint/2010/main" val="1740749682"/>
-      </p:ext>
-    </p:extLst>
   </p:cSld>
   <p:clrMapOvr>
     <a:masterClrMapping/>
@@ -3161,13 +2816,7 @@
       </p:grpSpPr>
       <p:sp>
         <p:nvSpPr>
-          <p:cNvPr id="2" name="Заголовок 1">
-            <a:extLst>
-              <a:ext uri="{FF2B5EF4-FFF2-40B4-BE49-F238E27FC236}">
-                <a16:creationId xmlns:a16="http://schemas.microsoft.com/office/drawing/2014/main" id="{AA46D53C-1185-83FF-5931-02D5BBDB701E}"/>
-              </a:ext>
-            </a:extLst>
-          </p:cNvPr>
+          <p:cNvPr id="2" name="Заголовок 1"/>
           <p:cNvSpPr>
             <a:spLocks noGrp="1"/>
           </p:cNvSpPr>
@@ -3200,13 +2849,7 @@
       </p:sp>
       <p:sp>
         <p:nvSpPr>
-          <p:cNvPr id="3" name="Текст 2">
-            <a:extLst>
-              <a:ext uri="{FF2B5EF4-FFF2-40B4-BE49-F238E27FC236}">
-                <a16:creationId xmlns:a16="http://schemas.microsoft.com/office/drawing/2014/main" id="{C0A629D4-31E5-F85B-DF7B-DF16D19A3DBD}"/>
-              </a:ext>
-            </a:extLst>
-          </p:cNvPr>
+          <p:cNvPr id="3" name="Текст 2"/>
           <p:cNvSpPr>
             <a:spLocks noGrp="1"/>
           </p:cNvSpPr>
@@ -3234,6 +2877,7 @@
               <a:rPr lang="ru-RU" dirty="0"/>
               <a:t>Образец текста</a:t>
             </a:r>
+            <a:endParaRPr lang="ru-RU" dirty="0"/>
           </a:p>
           <a:p>
             <a:pPr lvl="1"/>
@@ -3241,6 +2885,7 @@
               <a:rPr lang="ru-RU" dirty="0"/>
               <a:t>Второй уровень</a:t>
             </a:r>
+            <a:endParaRPr lang="ru-RU" dirty="0"/>
           </a:p>
           <a:p>
             <a:pPr lvl="2"/>
@@ -3248,6 +2893,7 @@
               <a:rPr lang="ru-RU" dirty="0"/>
               <a:t>Третий уровень</a:t>
             </a:r>
+            <a:endParaRPr lang="ru-RU" dirty="0"/>
           </a:p>
           <a:p>
             <a:pPr lvl="3"/>
@@ -3255,6 +2901,7 @@
               <a:rPr lang="ru-RU" dirty="0"/>
               <a:t>Четвертый уровень</a:t>
             </a:r>
+            <a:endParaRPr lang="ru-RU" dirty="0"/>
           </a:p>
           <a:p>
             <a:pPr lvl="4"/>
@@ -3268,13 +2915,7 @@
       </p:sp>
       <p:sp>
         <p:nvSpPr>
-          <p:cNvPr id="4" name="Дата 3">
-            <a:extLst>
-              <a:ext uri="{FF2B5EF4-FFF2-40B4-BE49-F238E27FC236}">
-                <a16:creationId xmlns:a16="http://schemas.microsoft.com/office/drawing/2014/main" id="{E1A9B866-430D-1574-4578-DDD993C45F7E}"/>
-              </a:ext>
-            </a:extLst>
-          </p:cNvPr>
+          <p:cNvPr id="4" name="Дата 3"/>
           <p:cNvSpPr>
             <a:spLocks noGrp="1"/>
           </p:cNvSpPr>
@@ -3309,7 +2950,6 @@
           <a:p>
             <a:fld id="{2713C367-EA95-4C52-817B-FE24C877FAE9}" type="datetime1">
               <a:rPr lang="en-US" smtClean="0"/>
-              <a:t>5/23/2026</a:t>
             </a:fld>
             <a:endParaRPr lang="en-US" dirty="0"/>
           </a:p>
@@ -3317,13 +2957,7 @@
       </p:sp>
       <p:sp>
         <p:nvSpPr>
-          <p:cNvPr id="5" name="Нижний колонтитул 4">
-            <a:extLst>
-              <a:ext uri="{FF2B5EF4-FFF2-40B4-BE49-F238E27FC236}">
-                <a16:creationId xmlns:a16="http://schemas.microsoft.com/office/drawing/2014/main" id="{F2960637-D3AE-08C3-98C2-41E2AD61F48A}"/>
-              </a:ext>
-            </a:extLst>
-          </p:cNvPr>
+          <p:cNvPr id="5" name="Нижний колонтитул 4"/>
           <p:cNvSpPr>
             <a:spLocks noGrp="1"/>
           </p:cNvSpPr>
@@ -3362,13 +2996,7 @@
       </p:sp>
       <p:sp>
         <p:nvSpPr>
-          <p:cNvPr id="6" name="Номер слайда 5">
-            <a:extLst>
-              <a:ext uri="{FF2B5EF4-FFF2-40B4-BE49-F238E27FC236}">
-                <a16:creationId xmlns:a16="http://schemas.microsoft.com/office/drawing/2014/main" id="{96343832-F5F7-9D4B-ECA0-7B323FD2BA4F}"/>
-              </a:ext>
-            </a:extLst>
-          </p:cNvPr>
+          <p:cNvPr id="6" name="Номер слайда 5"/>
           <p:cNvSpPr>
             <a:spLocks noGrp="1"/>
           </p:cNvSpPr>
@@ -3403,8 +3031,6 @@
           <a:p>
             <a:fld id="{39D93D24-9446-4BD4-975C-09DCDF7E2057}" type="slidenum">
               <a:rPr lang="en-US" smtClean="0"/>
-              <a:pPr/>
-              <a:t>‹#›</a:t>
             </a:fld>
             <a:endParaRPr lang="en-US" dirty="0"/>
           </a:p>
@@ -3412,20 +3038,14 @@
       </p:sp>
       <p:pic>
         <p:nvPicPr>
-          <p:cNvPr id="8" name="Рисунок 7">
-            <a:extLst>
-              <a:ext uri="{FF2B5EF4-FFF2-40B4-BE49-F238E27FC236}">
-                <a16:creationId xmlns:a16="http://schemas.microsoft.com/office/drawing/2014/main" id="{1396144B-F1C9-A27B-2C02-BEA8E6997933}"/>
-              </a:ext>
-            </a:extLst>
-          </p:cNvPr>
+          <p:cNvPr id="8" name="Рисунок 7"/>
           <p:cNvPicPr>
             <a:picLocks noChangeAspect="1"/>
           </p:cNvPicPr>
           <p:nvPr userDrawn="1"/>
         </p:nvPicPr>
         <p:blipFill>
-          <a:blip r:embed="rId13">
+          <a:blip r:embed="rId12">
             <a:extLst>
               <a:ext uri="{28A0092B-C50C-407E-A947-70E740481C1C}">
                 <a14:useLocalDpi xmlns:a14="http://schemas.microsoft.com/office/drawing/2010/main" val="0"/>
@@ -3447,11 +3067,6 @@
         </p:spPr>
       </p:pic>
     </p:spTree>
-    <p:extLst>
-      <p:ext uri="{BB962C8B-B14F-4D97-AF65-F5344CB8AC3E}">
-        <p14:creationId xmlns:p14="http://schemas.microsoft.com/office/powerpoint/2010/main" val="1987614043"/>
-      </p:ext>
-    </p:extLst>
   </p:cSld>
   <p:clrMap bg1="lt1" tx1="dk1" bg2="lt2" tx2="dk2" accent1="accent1" accent2="accent2" accent3="accent3" accent4="accent4" accent5="accent5" accent6="accent6" hlink="hlink" folHlink="folHlink"/>
   <p:sldLayoutIdLst>
@@ -3770,13 +3385,7 @@
       </p:grpSpPr>
       <p:sp>
         <p:nvSpPr>
-          <p:cNvPr id="2" name="Заголовок 1">
-            <a:extLst>
-              <a:ext uri="{FF2B5EF4-FFF2-40B4-BE49-F238E27FC236}">
-                <a16:creationId xmlns:a16="http://schemas.microsoft.com/office/drawing/2014/main" id="{F4D45CEF-9BC7-01A6-4B8E-748754FA69FD}"/>
-              </a:ext>
-            </a:extLst>
-          </p:cNvPr>
+          <p:cNvPr id="2" name="Заголовок 1"/>
           <p:cNvSpPr>
             <a:spLocks noGrp="1"/>
           </p:cNvSpPr>
@@ -3811,13 +3420,7 @@
       </p:sp>
       <p:sp>
         <p:nvSpPr>
-          <p:cNvPr id="3" name="Подзаголовок 2">
-            <a:extLst>
-              <a:ext uri="{FF2B5EF4-FFF2-40B4-BE49-F238E27FC236}">
-                <a16:creationId xmlns:a16="http://schemas.microsoft.com/office/drawing/2014/main" id="{028617BF-4550-0EE4-4A98-F462D3068D5D}"/>
-              </a:ext>
-            </a:extLst>
-          </p:cNvPr>
+          <p:cNvPr id="3" name="Подзаголовок 2"/>
           <p:cNvSpPr>
             <a:spLocks noGrp="1"/>
           </p:cNvSpPr>
@@ -3846,6 +3449,7 @@
               <a:rPr lang="ru-RU" sz="1800" dirty="0"/>
               <a:t>Направление подготовки: 03.03.01 Прикладные математика и физика</a:t>
             </a:r>
+            <a:endParaRPr lang="ru-RU" sz="1800" dirty="0"/>
           </a:p>
           <a:p>
             <a:pPr algn="r">
@@ -3857,6 +3461,7 @@
               <a:rPr lang="ru-RU" sz="1800" dirty="0"/>
               <a:t>Студент: Черных Владимир Владимирович</a:t>
             </a:r>
+            <a:endParaRPr lang="ru-RU" sz="1800" dirty="0"/>
           </a:p>
           <a:p>
             <a:pPr algn="r"/>
@@ -3870,13 +3475,7 @@
       </p:sp>
       <p:sp>
         <p:nvSpPr>
-          <p:cNvPr id="5" name="TextBox 4">
-            <a:extLst>
-              <a:ext uri="{FF2B5EF4-FFF2-40B4-BE49-F238E27FC236}">
-                <a16:creationId xmlns:a16="http://schemas.microsoft.com/office/drawing/2014/main" id="{24BEA752-7679-0362-C9EF-5E1DE4ACC984}"/>
-              </a:ext>
-            </a:extLst>
-          </p:cNvPr>
+          <p:cNvPr id="5" name="TextBox 4"/>
           <p:cNvSpPr txBox="1"/>
           <p:nvPr/>
         </p:nvSpPr>
@@ -3904,6 +3503,10 @@
               </a:rPr>
               <a:t>Кафедра аэрофизики и летательных аппаратов ПИШ ФАЛТ МФТИ</a:t>
             </a:r>
+            <a:endParaRPr lang="ru-RU" sz="1600" dirty="0">
+              <a:latin typeface="Segoe UI" panose="020B0502040204020203" pitchFamily="34" charset="0"/>
+              <a:cs typeface="Segoe UI" panose="020B0502040204020203" pitchFamily="34" charset="0"/>
+            </a:endParaRPr>
           </a:p>
           <a:p>
             <a:pPr algn="ctr"/>
@@ -3922,11 +3525,6 @@
         </p:txBody>
       </p:sp>
     </p:spTree>
-    <p:extLst>
-      <p:ext uri="{BB962C8B-B14F-4D97-AF65-F5344CB8AC3E}">
-        <p14:creationId xmlns:p14="http://schemas.microsoft.com/office/powerpoint/2010/main" val="1790961398"/>
-      </p:ext>
-    </p:extLst>
   </p:cSld>
   <p:clrMapOvr>
     <a:masterClrMapping/>
@@ -3953,13 +3551,7 @@
       </p:grpSpPr>
       <p:sp>
         <p:nvSpPr>
-          <p:cNvPr id="2" name="Заголовок 1">
-            <a:extLst>
-              <a:ext uri="{FF2B5EF4-FFF2-40B4-BE49-F238E27FC236}">
-                <a16:creationId xmlns:a16="http://schemas.microsoft.com/office/drawing/2014/main" id="{AD0348B4-DFCB-1850-D69F-2E8569B9BBDA}"/>
-              </a:ext>
-            </a:extLst>
-          </p:cNvPr>
+          <p:cNvPr id="2" name="Заголовок 1"/>
           <p:cNvSpPr>
             <a:spLocks noGrp="1"/>
           </p:cNvSpPr>
@@ -3974,7 +3566,7 @@
           <a:p>
             <a:r>
               <a:rPr lang="ru-RU" dirty="0"/>
-              <a:t>Заключение</a:t>
+              <a:t>Метод сопряженных градиентов</a:t>
             </a:r>
             <a:endParaRPr lang="en-US" dirty="0"/>
           </a:p>
@@ -3982,103 +3574,93 @@
       </p:sp>
       <p:sp>
         <p:nvSpPr>
-          <p:cNvPr id="3" name="Объект 2">
-            <a:extLst>
-              <a:ext uri="{FF2B5EF4-FFF2-40B4-BE49-F238E27FC236}">
-                <a16:creationId xmlns:a16="http://schemas.microsoft.com/office/drawing/2014/main" id="{9E7CFD9A-30CB-BA3F-609E-C02FFA32F9AC}"/>
-              </a:ext>
-            </a:extLst>
-          </p:cNvPr>
-          <p:cNvSpPr>
-            <a:spLocks noGrp="1"/>
-          </p:cNvSpPr>
-          <p:nvPr>
-            <p:ph idx="1"/>
-          </p:nvPr>
-        </p:nvSpPr>
-        <p:spPr/>
-        <p:txBody>
-          <a:bodyPr>
-            <a:normAutofit lnSpcReduction="10000"/>
-          </a:bodyPr>
-          <a:lstStyle/>
-          <a:p>
-            <a:r>
-              <a:rPr lang="ru-RU" dirty="0"/>
-              <a:t>Создан программный комплекс для оптимизации на основе </a:t>
-            </a:r>
+          <p:cNvPr id="3" name="Объект 2"/>
+          <p:cNvSpPr>
+            <a:spLocks noGrp="1"/>
+          </p:cNvSpPr>
+          <p:nvPr>
+            <p:ph sz="half" idx="1"/>
+          </p:nvPr>
+        </p:nvSpPr>
+        <p:spPr>
+          <a:xfrm>
+            <a:off x="838200" y="1825625"/>
+            <a:ext cx="5553075" cy="4351655"/>
+          </a:xfrm>
+        </p:spPr>
+        <p:txBody>
+          <a:bodyPr/>
+          <a:lstStyle/>
+          <a:p>
             <a:r>
               <a:rPr lang="en-US" dirty="0"/>
-              <a:t>CFD </a:t>
-            </a:r>
+              <a:t>CG</a:t>
+            </a:r>
+            <a:r>
+              <a:rPr lang="ru-RU" altLang="en-US" dirty="0"/>
+              <a:t>: быстрый локальный метод </a:t>
+            </a:r>
+            <a:endParaRPr lang="ru-RU" altLang="en-US" dirty="0"/>
+          </a:p>
+          <a:p>
+            <a:r>
+              <a:rPr lang="ru-RU" dirty="0"/>
+              <a:t>Для численного вычисления</a:t>
+            </a:r>
+            <a:r>
+              <a:rPr lang="ru-RU" altLang="en-US" dirty="0"/>
+              <a:t> градиента определен шаг по нормализованной переменной, равный 0.005</a:t>
+            </a:r>
+            <a:endParaRPr lang="ru-RU" altLang="en-US" dirty="0"/>
+          </a:p>
+          <a:p>
+            <a:r>
+              <a:rPr lang="ru-RU" altLang="en-US" dirty="0"/>
+              <a:t>При </a:t>
+            </a:r>
+            <a:r>
+              <a:rPr lang="en-US" altLang="en-US" dirty="0"/>
+              <a:t>N = 3 </a:t>
+            </a:r>
+            <a:r>
+              <a:rPr lang="ru-RU" altLang="en-US" dirty="0"/>
+              <a:t>получен </a:t>
+            </a:r>
+            <a:r>
+              <a:rPr lang="en-US" altLang="en-US" dirty="0"/>
+              <a:t>Cxa = 0.</a:t>
+            </a:r>
+            <a:r>
+              <a:rPr lang="ru-RU" altLang="en-US" dirty="0"/>
+              <a:t>00964</a:t>
+            </a:r>
+            <a:endParaRPr lang="ru-RU" altLang="en-US" dirty="0"/>
+          </a:p>
+          <a:p>
+            <a:r>
+              <a:rPr lang="ru-RU" altLang="en-US" dirty="0"/>
+              <a:t>Штрафная функция на толщину показывает результат хуже, чем вытягивание профиля до нужной толщины </a:t>
+            </a:r>
+            <a:endParaRPr lang="ru-RU" altLang="en-US" dirty="0"/>
+          </a:p>
+          <a:p>
+            <a:r>
+              <a:rPr lang="ru-RU" altLang="en-US" dirty="0"/>
+              <a:t>Вытягивание создает локальные минимумы </a:t>
+            </a:r>
+            <a:endParaRPr lang="ru-RU" altLang="en-US" dirty="0"/>
+          </a:p>
+          <a:p>
+            <a:pPr marL="0" indent="0">
+              <a:buNone/>
+            </a:pPr>
             <a:endParaRPr lang="ru-RU" dirty="0"/>
           </a:p>
-          <a:p>
-            <a:r>
-              <a:rPr lang="ru-RU" dirty="0"/>
-              <a:t>Проведена апробация на примере профильной задачи</a:t>
-            </a:r>
-          </a:p>
-          <a:p>
-            <a:r>
-              <a:rPr lang="ru-RU" dirty="0"/>
-              <a:t>В предложенной параметризации для достижения результата в пределах точности метода достаточно 6 параметров</a:t>
-            </a:r>
-          </a:p>
-          <a:p>
-            <a:endParaRPr lang="ru-RU" dirty="0"/>
-          </a:p>
-          <a:p>
-            <a:r>
-              <a:rPr lang="ru-RU" dirty="0"/>
-              <a:t>Предложено использовать гибридный метод, включающий в себя последовательное переключение между методами </a:t>
-            </a:r>
-            <a:endParaRPr lang="en-US" dirty="0"/>
-          </a:p>
-          <a:p>
-            <a:r>
-              <a:rPr lang="ru-RU" dirty="0"/>
-              <a:t>Возможные направления развития:</a:t>
-            </a:r>
-          </a:p>
-          <a:p>
-            <a:pPr marL="0" indent="0">
-              <a:buNone/>
-            </a:pPr>
-            <a:r>
-              <a:rPr lang="ru-RU" dirty="0"/>
-              <a:t>	1) Решение трехмерной задачи </a:t>
-            </a:r>
-          </a:p>
-          <a:p>
-            <a:pPr marL="0" indent="0">
-              <a:buNone/>
-            </a:pPr>
-            <a:r>
-              <a:rPr lang="ru-RU" dirty="0"/>
-              <a:t>	2) Многокритериальная оптимизация </a:t>
-            </a:r>
-          </a:p>
-          <a:p>
-            <a:pPr marL="0" indent="0">
-              <a:buNone/>
-            </a:pPr>
-            <a:r>
-              <a:rPr lang="ru-RU" dirty="0"/>
-              <a:t>	3) Введение альтернативных способов параметризации </a:t>
-            </a:r>
-          </a:p>
-        </p:txBody>
-      </p:sp>
-      <p:sp>
-        <p:nvSpPr>
-          <p:cNvPr id="4" name="Номер слайда 3">
-            <a:extLst>
-              <a:ext uri="{FF2B5EF4-FFF2-40B4-BE49-F238E27FC236}">
-                <a16:creationId xmlns:a16="http://schemas.microsoft.com/office/drawing/2014/main" id="{E5690685-0064-B409-B92B-A626C3689729}"/>
-              </a:ext>
-            </a:extLst>
-          </p:cNvPr>
+        </p:txBody>
+      </p:sp>
+      <p:sp>
+        <p:nvSpPr>
+          <p:cNvPr id="4" name="Номер слайда 3"/>
           <p:cNvSpPr>
             <a:spLocks noGrp="1"/>
           </p:cNvSpPr>
@@ -4093,18 +3675,12 @@
           <a:p>
             <a:fld id="{39D93D24-9446-4BD4-975C-09DCDF7E2057}" type="slidenum">
               <a:rPr lang="en-US" smtClean="0"/>
-              <a:t>10</a:t>
             </a:fld>
             <a:endParaRPr lang="en-US"/>
           </a:p>
         </p:txBody>
       </p:sp>
     </p:spTree>
-    <p:extLst>
-      <p:ext uri="{BB962C8B-B14F-4D97-AF65-F5344CB8AC3E}">
-        <p14:creationId xmlns:p14="http://schemas.microsoft.com/office/powerpoint/2010/main" val="2763437710"/>
-      </p:ext>
-    </p:extLst>
   </p:cSld>
   <p:clrMapOvr>
     <a:masterClrMapping/>
@@ -4131,13 +3707,7 @@
       </p:grpSpPr>
       <p:sp>
         <p:nvSpPr>
-          <p:cNvPr id="2" name="Заголовок 1">
-            <a:extLst>
-              <a:ext uri="{FF2B5EF4-FFF2-40B4-BE49-F238E27FC236}">
-                <a16:creationId xmlns:a16="http://schemas.microsoft.com/office/drawing/2014/main" id="{B0AD574E-EDB6-AABF-2FC5-B95C80D51417}"/>
-              </a:ext>
-            </a:extLst>
-          </p:cNvPr>
+          <p:cNvPr id="2" name="Заголовок 1"/>
           <p:cNvSpPr>
             <a:spLocks noGrp="1"/>
           </p:cNvSpPr>
@@ -4151,8 +3721,8 @@
           <a:lstStyle/>
           <a:p>
             <a:r>
-              <a:rPr lang="ru-RU" dirty="0"/>
-              <a:t>Постскриптум</a:t>
+              <a:rPr lang="en-US" dirty="0"/>
+              <a:t>Efficient global optimisation  </a:t>
             </a:r>
             <a:endParaRPr lang="en-US" dirty="0"/>
           </a:p>
@@ -4160,80 +3730,84 @@
       </p:sp>
       <p:sp>
         <p:nvSpPr>
-          <p:cNvPr id="3" name="Объект 2">
-            <a:extLst>
-              <a:ext uri="{FF2B5EF4-FFF2-40B4-BE49-F238E27FC236}">
-                <a16:creationId xmlns:a16="http://schemas.microsoft.com/office/drawing/2014/main" id="{209C9F03-886F-037B-49B9-0FCB0E4CE203}"/>
-              </a:ext>
-            </a:extLst>
-          </p:cNvPr>
-          <p:cNvSpPr>
-            <a:spLocks noGrp="1"/>
-          </p:cNvSpPr>
-          <p:nvPr>
-            <p:ph idx="1"/>
-          </p:nvPr>
-        </p:nvSpPr>
-        <p:spPr/>
+          <p:cNvPr id="3" name="Объект 2"/>
+          <p:cNvSpPr>
+            <a:spLocks noGrp="1"/>
+          </p:cNvSpPr>
+          <p:nvPr>
+            <p:ph sz="half" idx="1"/>
+          </p:nvPr>
+        </p:nvSpPr>
+        <p:spPr>
+          <a:xfrm>
+            <a:off x="838200" y="1825625"/>
+            <a:ext cx="5553075" cy="4351655"/>
+          </a:xfrm>
+        </p:spPr>
         <p:txBody>
           <a:bodyPr>
-            <a:normAutofit/>
+            <a:normAutofit lnSpcReduction="10000"/>
           </a:bodyPr>
           <a:lstStyle/>
           <a:p>
             <a:r>
-              <a:rPr lang="ru-RU" sz="2000" dirty="0"/>
-              <a:t>Данный шаблон презентации носит рекомендательный характер и не является строгим стандартом.</a:t>
-            </a:r>
-          </a:p>
-          <a:p>
-            <a:r>
-              <a:rPr lang="ru-RU" sz="2000" dirty="0"/>
-              <a:t>Структура может и должна быть адаптирована под специфику вашей работы, требования научного руководителя и личные предпочтения.</a:t>
-            </a:r>
-          </a:p>
-          <a:p>
-            <a:r>
-              <a:rPr lang="ru-RU" sz="2000" dirty="0"/>
-              <a:t>Вы вправе </a:t>
-            </a:r>
-            <a:r>
-              <a:rPr lang="ru-RU" dirty="0"/>
-              <a:t>добавлять или удалять слайды, </a:t>
-            </a:r>
-            <a:r>
-              <a:rPr lang="ru-RU" sz="2000" dirty="0"/>
-              <a:t>менять порядок </a:t>
-            </a:r>
-            <a:r>
-              <a:rPr lang="ru-RU" sz="2000"/>
-              <a:t>слайдов,</a:t>
-            </a:r>
-            <a:r>
-              <a:rPr lang="ru-RU"/>
-              <a:t> </a:t>
-            </a:r>
-            <a:r>
-              <a:rPr lang="ru-RU" sz="2000"/>
-              <a:t>изменять </a:t>
-            </a:r>
-            <a:r>
-              <a:rPr lang="ru-RU" sz="2000" dirty="0"/>
-              <a:t>визуальное оформление и уровень детализации.</a:t>
-            </a:r>
-            <a:endParaRPr lang="en-US" sz="2000" dirty="0"/>
-          </a:p>
-        </p:txBody>
-      </p:sp>
-      <p:sp>
-        <p:nvSpPr>
-          <p:cNvPr id="4" name="Номер слайда 3">
-            <a:extLst>
-              <a:ext uri="{FF2B5EF4-FFF2-40B4-BE49-F238E27FC236}">
-                <a16:creationId xmlns:a16="http://schemas.microsoft.com/office/drawing/2014/main" id="{4C2CD3A1-775E-599B-E576-927281864979}"/>
-              </a:ext>
-            </a:extLst>
-          </p:cNvPr>
+              <a:rPr lang="ru-RU" dirty="0"/>
+              <a:t>Метод, основанный на суррогатном моделировании </a:t>
+            </a:r>
+            <a:endParaRPr lang="ru-RU" dirty="0"/>
+          </a:p>
+          <a:p>
+            <a:r>
+              <a:rPr lang="ru-RU" altLang="en-US" dirty="0"/>
+              <a:t>Ставит проблему нефизичных геометрий </a:t>
+            </a:r>
+            <a:endParaRPr lang="ru-RU" altLang="en-US" dirty="0"/>
+          </a:p>
+          <a:p>
+            <a:r>
+              <a:rPr lang="ru-RU" altLang="en-US" dirty="0"/>
+              <a:t>Для борьбы предложено использовать штраф: </a:t>
+            </a:r>
+            <a:r>
+              <a:rPr lang="en-US" altLang="en-US" dirty="0"/>
+              <a:t>L2-</a:t>
+            </a:r>
+            <a:r>
+              <a:rPr lang="ru-RU" altLang="en-US" dirty="0"/>
+              <a:t>норму расстояния в пространстве параметров до физичного профиля</a:t>
+            </a:r>
+            <a:endParaRPr lang="ru-RU" altLang="en-US" dirty="0"/>
+          </a:p>
+          <a:p>
+            <a:r>
+              <a:rPr lang="ru-RU" altLang="en-US" dirty="0"/>
+              <a:t>При построении первичной модели необходимо достаточно </a:t>
+            </a:r>
+            <a:r>
+              <a:rPr lang="en-US" altLang="ru-RU" dirty="0"/>
+              <a:t>(N(N+1), 10*N) </a:t>
+            </a:r>
+            <a:r>
+              <a:rPr lang="ru-RU" altLang="ru-RU" dirty="0"/>
+              <a:t>физичных точек</a:t>
+            </a:r>
+            <a:endParaRPr lang="ru-RU" altLang="en-US" dirty="0"/>
+          </a:p>
+          <a:p>
+            <a:pPr marL="0" indent="0">
+              <a:buNone/>
+            </a:pPr>
+            <a:r>
+              <a:rPr lang="ru-RU" altLang="en-US" dirty="0"/>
+              <a:t>Основной проблемой было то, что алгоритм находил суперкритический профиль, но не делал его достаточно тонким</a:t>
+            </a:r>
+            <a:endParaRPr lang="ru-RU" dirty="0"/>
+          </a:p>
+        </p:txBody>
+      </p:sp>
+      <p:sp>
+        <p:nvSpPr>
+          <p:cNvPr id="4" name="Номер слайда 3"/>
           <p:cNvSpPr>
             <a:spLocks noGrp="1"/>
           </p:cNvSpPr>
@@ -4248,18 +3822,445 @@
           <a:p>
             <a:fld id="{39D93D24-9446-4BD4-975C-09DCDF7E2057}" type="slidenum">
               <a:rPr lang="en-US" smtClean="0"/>
-              <a:t>11</a:t>
             </a:fld>
             <a:endParaRPr lang="en-US"/>
           </a:p>
         </p:txBody>
       </p:sp>
     </p:spTree>
-    <p:extLst>
-      <p:ext uri="{BB962C8B-B14F-4D97-AF65-F5344CB8AC3E}">
-        <p14:creationId xmlns:p14="http://schemas.microsoft.com/office/powerpoint/2010/main" val="2671229842"/>
-      </p:ext>
-    </p:extLst>
+  </p:cSld>
+  <p:clrMapOvr>
+    <a:masterClrMapping/>
+  </p:clrMapOvr>
+</p:sld>
+</file>
+
+<file path=ppt/slides/slide12.xml><?xml version="1.0" encoding="utf-8"?>
+<p:sld xmlns:a="http://schemas.openxmlformats.org/drawingml/2006/main" xmlns:r="http://schemas.openxmlformats.org/officeDocument/2006/relationships" xmlns:p="http://schemas.openxmlformats.org/presentationml/2006/main">
+  <p:cSld>
+    <p:spTree>
+      <p:nvGrpSpPr>
+        <p:cNvPr id="1" name=""/>
+        <p:cNvGrpSpPr/>
+        <p:nvPr/>
+      </p:nvGrpSpPr>
+      <p:grpSpPr>
+        <a:xfrm>
+          <a:off x="0" y="0"/>
+          <a:ext cx="0" cy="0"/>
+          <a:chOff x="0" y="0"/>
+          <a:chExt cx="0" cy="0"/>
+        </a:xfrm>
+      </p:grpSpPr>
+      <p:sp>
+        <p:nvSpPr>
+          <p:cNvPr id="2" name="Заголовок 1"/>
+          <p:cNvSpPr>
+            <a:spLocks noGrp="1"/>
+          </p:cNvSpPr>
+          <p:nvPr>
+            <p:ph type="title"/>
+          </p:nvPr>
+        </p:nvSpPr>
+        <p:spPr/>
+        <p:txBody>
+          <a:bodyPr/>
+          <a:lstStyle/>
+          <a:p>
+            <a:r>
+              <a:rPr lang="ru-RU" altLang="en-US" dirty="0"/>
+              <a:t>Модификация параметризации</a:t>
+            </a:r>
+            <a:endParaRPr lang="ru-RU" altLang="en-US" dirty="0"/>
+          </a:p>
+        </p:txBody>
+      </p:sp>
+      <p:sp>
+        <p:nvSpPr>
+          <p:cNvPr id="3" name="Объект 2"/>
+          <p:cNvSpPr>
+            <a:spLocks noGrp="1"/>
+          </p:cNvSpPr>
+          <p:nvPr>
+            <p:ph sz="half" idx="1"/>
+          </p:nvPr>
+        </p:nvSpPr>
+        <p:spPr>
+          <a:xfrm>
+            <a:off x="838200" y="1825625"/>
+            <a:ext cx="5553075" cy="4351655"/>
+          </a:xfrm>
+        </p:spPr>
+        <p:txBody>
+          <a:bodyPr>
+            <a:normAutofit lnSpcReduction="20000"/>
+          </a:bodyPr>
+          <a:lstStyle/>
+          <a:p>
+            <a:r>
+              <a:rPr lang="ru-RU" dirty="0"/>
+              <a:t>Предлагается использовать </a:t>
+            </a:r>
+            <a:r>
+              <a:rPr lang="en-US" altLang="ru-RU" dirty="0"/>
+              <a:t>2N </a:t>
+            </a:r>
+            <a:r>
+              <a:rPr lang="ru-RU" altLang="ru-RU" dirty="0"/>
+              <a:t>параметров, вариацией точки на верхней или нижней поверхности добиваясь нужной толщины</a:t>
+            </a:r>
+            <a:endParaRPr lang="ru-RU" dirty="0"/>
+          </a:p>
+          <a:p>
+            <a:r>
+              <a:rPr lang="ru-RU" altLang="en-US" dirty="0"/>
+              <a:t>Для </a:t>
+            </a:r>
+            <a:r>
+              <a:rPr lang="en-US" altLang="en-US" dirty="0"/>
+              <a:t>EGO </a:t>
+            </a:r>
+            <a:r>
+              <a:rPr lang="ru-RU" altLang="en-US" dirty="0"/>
+              <a:t>данный способ на 6% улучшил результат при сравнительном времени работы </a:t>
+            </a:r>
+            <a:endParaRPr lang="ru-RU" altLang="en-US" dirty="0"/>
+          </a:p>
+          <a:p>
+            <a:r>
+              <a:rPr lang="ru-RU" dirty="0"/>
+              <a:t>Вопрос выбора конкретной точки и влияния на другие методы изучается сейчас</a:t>
+            </a:r>
+            <a:endParaRPr lang="ru-RU" dirty="0"/>
+          </a:p>
+        </p:txBody>
+      </p:sp>
+      <p:sp>
+        <p:nvSpPr>
+          <p:cNvPr id="4" name="Номер слайда 3"/>
+          <p:cNvSpPr>
+            <a:spLocks noGrp="1"/>
+          </p:cNvSpPr>
+          <p:nvPr>
+            <p:ph type="sldNum" sz="quarter" idx="12"/>
+          </p:nvPr>
+        </p:nvSpPr>
+        <p:spPr/>
+        <p:txBody>
+          <a:bodyPr/>
+          <a:lstStyle/>
+          <a:p>
+            <a:fld id="{39D93D24-9446-4BD4-975C-09DCDF7E2057}" type="slidenum">
+              <a:rPr lang="en-US" smtClean="0"/>
+            </a:fld>
+            <a:endParaRPr lang="en-US"/>
+          </a:p>
+        </p:txBody>
+      </p:sp>
+    </p:spTree>
+  </p:cSld>
+  <p:clrMapOvr>
+    <a:masterClrMapping/>
+  </p:clrMapOvr>
+</p:sld>
+</file>
+
+<file path=ppt/slides/slide13.xml><?xml version="1.0" encoding="utf-8"?>
+<p:sld xmlns:a="http://schemas.openxmlformats.org/drawingml/2006/main" xmlns:r="http://schemas.openxmlformats.org/officeDocument/2006/relationships" xmlns:p="http://schemas.openxmlformats.org/presentationml/2006/main">
+  <p:cSld>
+    <p:spTree>
+      <p:nvGrpSpPr>
+        <p:cNvPr id="1" name=""/>
+        <p:cNvGrpSpPr/>
+        <p:nvPr/>
+      </p:nvGrpSpPr>
+      <p:grpSpPr>
+        <a:xfrm>
+          <a:off x="0" y="0"/>
+          <a:ext cx="0" cy="0"/>
+          <a:chOff x="0" y="0"/>
+          <a:chExt cx="0" cy="0"/>
+        </a:xfrm>
+      </p:grpSpPr>
+      <p:sp>
+        <p:nvSpPr>
+          <p:cNvPr id="2" name="Заголовок 1"/>
+          <p:cNvSpPr>
+            <a:spLocks noGrp="1"/>
+          </p:cNvSpPr>
+          <p:nvPr>
+            <p:ph type="title"/>
+          </p:nvPr>
+        </p:nvSpPr>
+        <p:spPr/>
+        <p:txBody>
+          <a:bodyPr/>
+          <a:lstStyle/>
+          <a:p>
+            <a:r>
+              <a:rPr lang="ru-RU" altLang="en-US" dirty="0"/>
+              <a:t>Гибридный метод </a:t>
+            </a:r>
+            <a:endParaRPr lang="ru-RU" altLang="en-US" dirty="0"/>
+          </a:p>
+        </p:txBody>
+      </p:sp>
+      <p:sp>
+        <p:nvSpPr>
+          <p:cNvPr id="3" name="Объект 2"/>
+          <p:cNvSpPr>
+            <a:spLocks noGrp="1"/>
+          </p:cNvSpPr>
+          <p:nvPr>
+            <p:ph sz="half" idx="1"/>
+          </p:nvPr>
+        </p:nvSpPr>
+        <p:spPr>
+          <a:xfrm>
+            <a:off x="838200" y="1825625"/>
+            <a:ext cx="5553075" cy="4351655"/>
+          </a:xfrm>
+        </p:spPr>
+        <p:txBody>
+          <a:bodyPr>
+            <a:normAutofit lnSpcReduction="20000"/>
+          </a:bodyPr>
+          <a:lstStyle/>
+          <a:p>
+            <a:r>
+              <a:rPr lang="ru-RU" dirty="0"/>
+              <a:t>Наилучшего результата удалось достичь при последовательном использовании нескольких методов: </a:t>
+            </a:r>
+            <a:r>
+              <a:rPr lang="en-US" dirty="0"/>
+              <a:t>EGO, CG, MADS</a:t>
+            </a:r>
+            <a:endParaRPr lang="en-US" dirty="0"/>
+          </a:p>
+          <a:p>
+            <a:r>
+              <a:rPr lang="en-US" dirty="0"/>
+              <a:t>C</a:t>
+            </a:r>
+            <a:r>
+              <a:rPr lang="en-US" baseline="-25000" dirty="0"/>
+              <a:t>xa</a:t>
+            </a:r>
+            <a:r>
+              <a:rPr lang="en-US" dirty="0"/>
+              <a:t> = 0.0096</a:t>
+            </a:r>
+            <a:endParaRPr lang="ru-RU" altLang="en-US" dirty="0"/>
+          </a:p>
+          <a:p>
+            <a:r>
+              <a:rPr lang="en-US" altLang="ru-RU" dirty="0"/>
+              <a:t>MADS </a:t>
+            </a:r>
+            <a:r>
+              <a:rPr lang="ru-RU" altLang="en-US" dirty="0"/>
+              <a:t>применяется на конечном этапе в условиях сильного шума около оптимума</a:t>
+            </a:r>
+            <a:endParaRPr lang="ru-RU" altLang="en-US" dirty="0"/>
+          </a:p>
+          <a:p>
+            <a:pPr marL="0" indent="0">
+              <a:buNone/>
+            </a:pPr>
+            <a:endParaRPr lang="ru-RU" altLang="en-US" dirty="0"/>
+          </a:p>
+          <a:p>
+            <a:pPr marL="0" indent="0">
+              <a:buNone/>
+            </a:pPr>
+            <a:endParaRPr lang="ru-RU" altLang="en-US" dirty="0"/>
+          </a:p>
+        </p:txBody>
+      </p:sp>
+      <p:sp>
+        <p:nvSpPr>
+          <p:cNvPr id="4" name="Номер слайда 3"/>
+          <p:cNvSpPr>
+            <a:spLocks noGrp="1"/>
+          </p:cNvSpPr>
+          <p:nvPr>
+            <p:ph type="sldNum" sz="quarter" idx="12"/>
+          </p:nvPr>
+        </p:nvSpPr>
+        <p:spPr/>
+        <p:txBody>
+          <a:bodyPr/>
+          <a:lstStyle/>
+          <a:p>
+            <a:fld id="{39D93D24-9446-4BD4-975C-09DCDF7E2057}" type="slidenum">
+              <a:rPr lang="en-US" smtClean="0"/>
+            </a:fld>
+            <a:endParaRPr lang="en-US"/>
+          </a:p>
+        </p:txBody>
+      </p:sp>
+    </p:spTree>
+  </p:cSld>
+  <p:clrMapOvr>
+    <a:masterClrMapping/>
+  </p:clrMapOvr>
+</p:sld>
+</file>
+
+<file path=ppt/slides/slide14.xml><?xml version="1.0" encoding="utf-8"?>
+<p:sld xmlns:a="http://schemas.openxmlformats.org/drawingml/2006/main" xmlns:r="http://schemas.openxmlformats.org/officeDocument/2006/relationships" xmlns:p="http://schemas.openxmlformats.org/presentationml/2006/main">
+  <p:cSld>
+    <p:spTree>
+      <p:nvGrpSpPr>
+        <p:cNvPr id="1" name=""/>
+        <p:cNvGrpSpPr/>
+        <p:nvPr/>
+      </p:nvGrpSpPr>
+      <p:grpSpPr>
+        <a:xfrm>
+          <a:off x="0" y="0"/>
+          <a:ext cx="0" cy="0"/>
+          <a:chOff x="0" y="0"/>
+          <a:chExt cx="0" cy="0"/>
+        </a:xfrm>
+      </p:grpSpPr>
+      <p:sp>
+        <p:nvSpPr>
+          <p:cNvPr id="2" name="Заголовок 1"/>
+          <p:cNvSpPr>
+            <a:spLocks noGrp="1"/>
+          </p:cNvSpPr>
+          <p:nvPr>
+            <p:ph type="title"/>
+          </p:nvPr>
+        </p:nvSpPr>
+        <p:spPr/>
+        <p:txBody>
+          <a:bodyPr/>
+          <a:lstStyle/>
+          <a:p>
+            <a:r>
+              <a:rPr lang="ru-RU" dirty="0"/>
+              <a:t>Заключение</a:t>
+            </a:r>
+            <a:endParaRPr lang="en-US" dirty="0"/>
+          </a:p>
+        </p:txBody>
+      </p:sp>
+      <p:sp>
+        <p:nvSpPr>
+          <p:cNvPr id="3" name="Объект 2"/>
+          <p:cNvSpPr>
+            <a:spLocks noGrp="1"/>
+          </p:cNvSpPr>
+          <p:nvPr>
+            <p:ph idx="1"/>
+          </p:nvPr>
+        </p:nvSpPr>
+        <p:spPr/>
+        <p:txBody>
+          <a:bodyPr>
+            <a:normAutofit fontScale="90000"/>
+          </a:bodyPr>
+          <a:lstStyle/>
+          <a:p>
+            <a:r>
+              <a:rPr lang="ru-RU" dirty="0"/>
+              <a:t>Создан программный комплекс для оптимизации формы летательного аппарата на основе </a:t>
+            </a:r>
+            <a:r>
+              <a:rPr lang="en-US" dirty="0"/>
+              <a:t>CFD </a:t>
+            </a:r>
+            <a:r>
+              <a:rPr lang="ru-RU" altLang="en-US" dirty="0"/>
+              <a:t>расчетов</a:t>
+            </a:r>
+            <a:endParaRPr lang="ru-RU" dirty="0"/>
+          </a:p>
+          <a:p>
+            <a:r>
+              <a:rPr lang="ru-RU" dirty="0"/>
+              <a:t>Проведена апробация на примере профильной задачи</a:t>
+            </a:r>
+            <a:endParaRPr lang="ru-RU" dirty="0"/>
+          </a:p>
+          <a:p>
+            <a:r>
+              <a:rPr lang="ru-RU" dirty="0"/>
+              <a:t>В предложенной модифицированной параметризации для достижения результата в пределах точности метода достаточно 6 параметров</a:t>
+            </a:r>
+            <a:endParaRPr lang="ru-RU" dirty="0"/>
+          </a:p>
+          <a:p>
+            <a:r>
+              <a:rPr lang="ru-RU" dirty="0"/>
+              <a:t>Предложено использовать гибридный метод, включающий в себя последовательное переключение между методами </a:t>
+            </a:r>
+            <a:endParaRPr lang="en-US" dirty="0"/>
+          </a:p>
+          <a:p>
+            <a:r>
+              <a:rPr lang="ru-RU" dirty="0"/>
+              <a:t>Возможные направления развития:</a:t>
+            </a:r>
+            <a:endParaRPr lang="ru-RU" dirty="0"/>
+          </a:p>
+          <a:p>
+            <a:pPr marL="0" indent="0">
+              <a:buNone/>
+            </a:pPr>
+            <a:r>
+              <a:rPr lang="ru-RU" dirty="0"/>
+              <a:t>	1) Решение трехмерной задачи </a:t>
+            </a:r>
+            <a:endParaRPr lang="ru-RU" dirty="0"/>
+          </a:p>
+          <a:p>
+            <a:pPr marL="0" indent="0">
+              <a:buNone/>
+            </a:pPr>
+            <a:r>
+              <a:rPr lang="ru-RU" dirty="0"/>
+              <a:t>	2) Многокритериальная оптимизация </a:t>
+            </a:r>
+            <a:endParaRPr lang="ru-RU" dirty="0"/>
+          </a:p>
+          <a:p>
+            <a:pPr marL="0" indent="0">
+              <a:buNone/>
+            </a:pPr>
+            <a:r>
+              <a:rPr lang="ru-RU" dirty="0"/>
+              <a:t>	3) Введение альтернативных способов параметризации, учитывающих конструкционные ограничения</a:t>
+            </a:r>
+            <a:endParaRPr lang="ru-RU" dirty="0"/>
+          </a:p>
+        </p:txBody>
+      </p:sp>
+      <p:sp>
+        <p:nvSpPr>
+          <p:cNvPr id="4" name="Номер слайда 3"/>
+          <p:cNvSpPr>
+            <a:spLocks noGrp="1"/>
+          </p:cNvSpPr>
+          <p:nvPr>
+            <p:ph type="sldNum" sz="quarter" idx="12"/>
+          </p:nvPr>
+        </p:nvSpPr>
+        <p:spPr/>
+        <p:txBody>
+          <a:bodyPr/>
+          <a:lstStyle/>
+          <a:p>
+            <a:fld id="{39D93D24-9446-4BD4-975C-09DCDF7E2057}" type="slidenum">
+              <a:rPr lang="en-US" smtClean="0"/>
+            </a:fld>
+            <a:endParaRPr lang="en-US"/>
+          </a:p>
+        </p:txBody>
+      </p:sp>
+    </p:spTree>
   </p:cSld>
   <p:clrMapOvr>
     <a:masterClrMapping/>
@@ -4286,13 +4287,7 @@
       </p:grpSpPr>
       <p:sp>
         <p:nvSpPr>
-          <p:cNvPr id="2" name="Заголовок 1">
-            <a:extLst>
-              <a:ext uri="{FF2B5EF4-FFF2-40B4-BE49-F238E27FC236}">
-                <a16:creationId xmlns:a16="http://schemas.microsoft.com/office/drawing/2014/main" id="{9145FE48-1D13-254D-4B26-745437FF6B31}"/>
-              </a:ext>
-            </a:extLst>
-          </p:cNvPr>
+          <p:cNvPr id="2" name="Заголовок 1"/>
           <p:cNvSpPr>
             <a:spLocks noGrp="1"/>
           </p:cNvSpPr>
@@ -4315,13 +4310,7 @@
       </p:sp>
       <p:sp>
         <p:nvSpPr>
-          <p:cNvPr id="3" name="Объект 2">
-            <a:extLst>
-              <a:ext uri="{FF2B5EF4-FFF2-40B4-BE49-F238E27FC236}">
-                <a16:creationId xmlns:a16="http://schemas.microsoft.com/office/drawing/2014/main" id="{EE3004E2-9A1B-308C-AB2B-15E8F22B2CCA}"/>
-              </a:ext>
-            </a:extLst>
-          </p:cNvPr>
+          <p:cNvPr id="3" name="Объект 2"/>
           <p:cNvSpPr>
             <a:spLocks noGrp="1"/>
           </p:cNvSpPr>
@@ -4346,6 +4335,7 @@
               <a:rPr lang="ru-RU" dirty="0"/>
               <a:t>переживает бурный рост</a:t>
             </a:r>
+            <a:endParaRPr lang="ru-RU" dirty="0"/>
           </a:p>
           <a:p>
             <a:r>
@@ -4360,42 +4350,41 @@
               <a:rPr lang="ru-RU" dirty="0"/>
               <a:t>сопряжено с дороговизной вычислений</a:t>
             </a:r>
+            <a:endParaRPr lang="ru-RU" dirty="0"/>
           </a:p>
           <a:p>
             <a:r>
               <a:rPr lang="ru-RU" dirty="0"/>
               <a:t>Актуальна проблема поиска глобального минимума </a:t>
             </a:r>
+            <a:endParaRPr lang="ru-RU" dirty="0"/>
           </a:p>
           <a:p>
             <a:r>
               <a:rPr lang="ru-RU" dirty="0"/>
               <a:t>Шум целевой функции усложняет поиск</a:t>
             </a:r>
+            <a:endParaRPr lang="ru-RU" dirty="0"/>
           </a:p>
           <a:p>
             <a:r>
               <a:rPr lang="ru-RU" dirty="0"/>
               <a:t>Конструкционные ограничения усложняют топологию пространства решений</a:t>
             </a:r>
+            <a:endParaRPr lang="ru-RU" dirty="0"/>
           </a:p>
           <a:p>
             <a:r>
               <a:rPr lang="ru-RU" dirty="0"/>
               <a:t>Для современного проектирования летательных аппаратов необходимы автоматизированные комплексы, обладающие устойчивостью </a:t>
             </a:r>
-          </a:p>
-        </p:txBody>
-      </p:sp>
-      <p:sp>
-        <p:nvSpPr>
-          <p:cNvPr id="4" name="Номер слайда 3">
-            <a:extLst>
-              <a:ext uri="{FF2B5EF4-FFF2-40B4-BE49-F238E27FC236}">
-                <a16:creationId xmlns:a16="http://schemas.microsoft.com/office/drawing/2014/main" id="{78CC31A6-155F-F2BB-9260-153355A1AE3C}"/>
-              </a:ext>
-            </a:extLst>
-          </p:cNvPr>
+            <a:endParaRPr lang="ru-RU" dirty="0"/>
+          </a:p>
+        </p:txBody>
+      </p:sp>
+      <p:sp>
+        <p:nvSpPr>
+          <p:cNvPr id="4" name="Номер слайда 3"/>
           <p:cNvSpPr>
             <a:spLocks noGrp="1"/>
           </p:cNvSpPr>
@@ -4410,18 +4399,12 @@
           <a:p>
             <a:fld id="{39D93D24-9446-4BD4-975C-09DCDF7E2057}" type="slidenum">
               <a:rPr lang="en-US" smtClean="0"/>
-              <a:t>2</a:t>
             </a:fld>
             <a:endParaRPr lang="en-US"/>
           </a:p>
         </p:txBody>
       </p:sp>
     </p:spTree>
-    <p:extLst>
-      <p:ext uri="{BB962C8B-B14F-4D97-AF65-F5344CB8AC3E}">
-        <p14:creationId xmlns:p14="http://schemas.microsoft.com/office/powerpoint/2010/main" val="149329703"/>
-      </p:ext>
-    </p:extLst>
   </p:cSld>
   <p:clrMapOvr>
     <a:masterClrMapping/>
@@ -4448,13 +4431,7 @@
       </p:grpSpPr>
       <p:sp>
         <p:nvSpPr>
-          <p:cNvPr id="2" name="Заголовок 1">
-            <a:extLst>
-              <a:ext uri="{FF2B5EF4-FFF2-40B4-BE49-F238E27FC236}">
-                <a16:creationId xmlns:a16="http://schemas.microsoft.com/office/drawing/2014/main" id="{7E3F3364-97C2-C3E1-55C6-190C49C1E2DD}"/>
-              </a:ext>
-            </a:extLst>
-          </p:cNvPr>
+          <p:cNvPr id="2" name="Заголовок 1"/>
           <p:cNvSpPr>
             <a:spLocks noGrp="1"/>
           </p:cNvSpPr>
@@ -4477,13 +4454,7 @@
       </p:sp>
       <p:sp>
         <p:nvSpPr>
-          <p:cNvPr id="3" name="Объект 2">
-            <a:extLst>
-              <a:ext uri="{FF2B5EF4-FFF2-40B4-BE49-F238E27FC236}">
-                <a16:creationId xmlns:a16="http://schemas.microsoft.com/office/drawing/2014/main" id="{6AC70464-463C-D2D4-20FB-5CCF499EDBFF}"/>
-              </a:ext>
-            </a:extLst>
-          </p:cNvPr>
+          <p:cNvPr id="3" name="Объект 2"/>
           <p:cNvSpPr>
             <a:spLocks noGrp="1"/>
           </p:cNvSpPr>
@@ -4516,6 +4487,7 @@
               <a:rPr lang="ru-RU" sz="2000" dirty="0"/>
               <a:t>разработка и применение вычислительного комплекса оптимизации формы летательного аппарата на примере минимизации аэродинамического сопротивления профиля в трансзвуковом потоке</a:t>
             </a:r>
+            <a:endParaRPr lang="ru-RU" sz="2000" dirty="0"/>
           </a:p>
           <a:p>
             <a:pPr marL="0" indent="0">
@@ -4525,6 +4497,7 @@
               <a:rPr lang="ru-RU" b="1" dirty="0"/>
               <a:t>Задачи:</a:t>
             </a:r>
+            <a:endParaRPr lang="ru-RU" b="1" dirty="0"/>
           </a:p>
           <a:p>
             <a:pPr>
@@ -4536,6 +4509,7 @@
               <a:rPr lang="ru-RU" sz="2000" dirty="0"/>
               <a:t>Анализ существующих подходов к оптимизации аэродинамических профилей </a:t>
             </a:r>
+            <a:endParaRPr lang="ru-RU" sz="2000" dirty="0"/>
           </a:p>
           <a:p>
             <a:pPr>
@@ -4547,6 +4521,7 @@
               <a:rPr lang="ru-RU" sz="2000" dirty="0"/>
               <a:t>Создание программного кода автоматизированного расчетного комплекса</a:t>
             </a:r>
+            <a:endParaRPr lang="ru-RU" sz="2000" dirty="0"/>
           </a:p>
           <a:p>
             <a:pPr>
@@ -4558,6 +4533,7 @@
               <a:rPr lang="ru-RU" sz="2000" dirty="0"/>
               <a:t>Сравнительный анализ методов поиска и способов постановки задач с ограничениями</a:t>
             </a:r>
+            <a:endParaRPr lang="ru-RU" sz="2000" dirty="0"/>
           </a:p>
           <a:p>
             <a:endParaRPr lang="en-US" dirty="0"/>
@@ -4566,13 +4542,7 @@
       </p:sp>
       <p:sp>
         <p:nvSpPr>
-          <p:cNvPr id="4" name="Номер слайда 3">
-            <a:extLst>
-              <a:ext uri="{FF2B5EF4-FFF2-40B4-BE49-F238E27FC236}">
-                <a16:creationId xmlns:a16="http://schemas.microsoft.com/office/drawing/2014/main" id="{2D282735-8967-A74F-3781-10877F9AB71E}"/>
-              </a:ext>
-            </a:extLst>
-          </p:cNvPr>
+          <p:cNvPr id="4" name="Номер слайда 3"/>
           <p:cNvSpPr>
             <a:spLocks noGrp="1"/>
           </p:cNvSpPr>
@@ -4587,18 +4557,12 @@
           <a:p>
             <a:fld id="{39D93D24-9446-4BD4-975C-09DCDF7E2057}" type="slidenum">
               <a:rPr lang="en-US" smtClean="0"/>
-              <a:t>3</a:t>
             </a:fld>
             <a:endParaRPr lang="en-US"/>
           </a:p>
         </p:txBody>
       </p:sp>
     </p:spTree>
-    <p:extLst>
-      <p:ext uri="{BB962C8B-B14F-4D97-AF65-F5344CB8AC3E}">
-        <p14:creationId xmlns:p14="http://schemas.microsoft.com/office/powerpoint/2010/main" val="2783329385"/>
-      </p:ext>
-    </p:extLst>
   </p:cSld>
   <p:clrMapOvr>
     <a:masterClrMapping/>
@@ -4625,13 +4589,7 @@
       </p:grpSpPr>
       <p:sp>
         <p:nvSpPr>
-          <p:cNvPr id="2" name="Заголовок 1">
-            <a:extLst>
-              <a:ext uri="{FF2B5EF4-FFF2-40B4-BE49-F238E27FC236}">
-                <a16:creationId xmlns:a16="http://schemas.microsoft.com/office/drawing/2014/main" id="{924E6C86-BCD2-E497-96FB-5F303D9DEF0A}"/>
-              </a:ext>
-            </a:extLst>
-          </p:cNvPr>
+          <p:cNvPr id="2" name="Заголовок 1"/>
           <p:cNvSpPr>
             <a:spLocks noGrp="1"/>
           </p:cNvSpPr>
@@ -4654,13 +4612,7 @@
       </p:sp>
       <p:sp>
         <p:nvSpPr>
-          <p:cNvPr id="3" name="Объект 2">
-            <a:extLst>
-              <a:ext uri="{FF2B5EF4-FFF2-40B4-BE49-F238E27FC236}">
-                <a16:creationId xmlns:a16="http://schemas.microsoft.com/office/drawing/2014/main" id="{57898889-BDE8-C5B2-3D54-D3E43C58A504}"/>
-              </a:ext>
-            </a:extLst>
-          </p:cNvPr>
+          <p:cNvPr id="3" name="Объект 2"/>
           <p:cNvSpPr>
             <a:spLocks noGrp="1"/>
           </p:cNvSpPr>
@@ -4677,39 +4629,37 @@
               <a:rPr lang="ru-RU" dirty="0"/>
               <a:t>Создан программный код для параметризации, построения сетки, управления расчетом, оптимизации и обработки результатов  </a:t>
             </a:r>
+            <a:endParaRPr lang="ru-RU" dirty="0"/>
           </a:p>
           <a:p>
             <a:r>
               <a:rPr lang="ru-RU" dirty="0"/>
               <a:t>Проведена валидация и верификация расчетного метода</a:t>
             </a:r>
+            <a:endParaRPr lang="ru-RU" dirty="0"/>
           </a:p>
           <a:p>
             <a:r>
               <a:rPr lang="ru-RU" dirty="0"/>
               <a:t>Проверены различные способы постановки ограничений </a:t>
             </a:r>
+            <a:endParaRPr lang="ru-RU" dirty="0"/>
           </a:p>
           <a:p>
             <a:r>
               <a:rPr lang="ru-RU" dirty="0"/>
               <a:t>Различными методами получен набор решений оптимизационной задачи с установленной точностью </a:t>
             </a:r>
-          </a:p>
-          <a:p>
             <a:endParaRPr lang="ru-RU" dirty="0"/>
           </a:p>
-        </p:txBody>
-      </p:sp>
-      <p:sp>
-        <p:nvSpPr>
-          <p:cNvPr id="4" name="Номер слайда 3">
-            <a:extLst>
-              <a:ext uri="{FF2B5EF4-FFF2-40B4-BE49-F238E27FC236}">
-                <a16:creationId xmlns:a16="http://schemas.microsoft.com/office/drawing/2014/main" id="{60A6BAFC-7D06-0773-250F-2500C0840ABE}"/>
-              </a:ext>
-            </a:extLst>
-          </p:cNvPr>
+          <a:p>
+            <a:endParaRPr lang="ru-RU" dirty="0"/>
+          </a:p>
+        </p:txBody>
+      </p:sp>
+      <p:sp>
+        <p:nvSpPr>
+          <p:cNvPr id="4" name="Номер слайда 3"/>
           <p:cNvSpPr>
             <a:spLocks noGrp="1"/>
           </p:cNvSpPr>
@@ -4724,18 +4674,12 @@
           <a:p>
             <a:fld id="{39D93D24-9446-4BD4-975C-09DCDF7E2057}" type="slidenum">
               <a:rPr lang="en-US" smtClean="0"/>
-              <a:t>4</a:t>
             </a:fld>
             <a:endParaRPr lang="en-US"/>
           </a:p>
         </p:txBody>
       </p:sp>
     </p:spTree>
-    <p:extLst>
-      <p:ext uri="{BB962C8B-B14F-4D97-AF65-F5344CB8AC3E}">
-        <p14:creationId xmlns:p14="http://schemas.microsoft.com/office/powerpoint/2010/main" val="4095140578"/>
-      </p:ext>
-    </p:extLst>
   </p:cSld>
   <p:clrMapOvr>
     <a:masterClrMapping/>
@@ -4762,13 +4706,7 @@
       </p:grpSpPr>
       <p:sp>
         <p:nvSpPr>
-          <p:cNvPr id="2" name="Заголовок 1">
-            <a:extLst>
-              <a:ext uri="{FF2B5EF4-FFF2-40B4-BE49-F238E27FC236}">
-                <a16:creationId xmlns:a16="http://schemas.microsoft.com/office/drawing/2014/main" id="{016D72B8-E554-C690-6DBB-B2759C6AF7D3}"/>
-              </a:ext>
-            </a:extLst>
-          </p:cNvPr>
+          <p:cNvPr id="2" name="Заголовок 1"/>
           <p:cNvSpPr>
             <a:spLocks noGrp="1"/>
           </p:cNvSpPr>
@@ -4791,13 +4729,7 @@
       </p:sp>
       <p:sp>
         <p:nvSpPr>
-          <p:cNvPr id="3" name="Объект 2">
-            <a:extLst>
-              <a:ext uri="{FF2B5EF4-FFF2-40B4-BE49-F238E27FC236}">
-                <a16:creationId xmlns:a16="http://schemas.microsoft.com/office/drawing/2014/main" id="{12C20C40-7579-9209-09ED-F9003FC1FA90}"/>
-              </a:ext>
-            </a:extLst>
-          </p:cNvPr>
+          <p:cNvPr id="3" name="Объект 2"/>
           <p:cNvSpPr>
             <a:spLocks noGrp="1"/>
           </p:cNvSpPr>
@@ -4816,13 +4748,7 @@
       </p:sp>
       <p:sp>
         <p:nvSpPr>
-          <p:cNvPr id="4" name="Номер слайда 3">
-            <a:extLst>
-              <a:ext uri="{FF2B5EF4-FFF2-40B4-BE49-F238E27FC236}">
-                <a16:creationId xmlns:a16="http://schemas.microsoft.com/office/drawing/2014/main" id="{0DDCE0E9-204F-A9F4-4803-8B24CD14C99E}"/>
-              </a:ext>
-            </a:extLst>
-          </p:cNvPr>
+          <p:cNvPr id="4" name="Номер слайда 3"/>
           <p:cNvSpPr>
             <a:spLocks noGrp="1"/>
           </p:cNvSpPr>
@@ -4837,18 +4763,12 @@
           <a:p>
             <a:fld id="{39D93D24-9446-4BD4-975C-09DCDF7E2057}" type="slidenum">
               <a:rPr lang="en-US" smtClean="0"/>
-              <a:t>5</a:t>
             </a:fld>
             <a:endParaRPr lang="en-US"/>
           </a:p>
         </p:txBody>
       </p:sp>
     </p:spTree>
-    <p:extLst>
-      <p:ext uri="{BB962C8B-B14F-4D97-AF65-F5344CB8AC3E}">
-        <p14:creationId xmlns:p14="http://schemas.microsoft.com/office/powerpoint/2010/main" val="3781343290"/>
-      </p:ext>
-    </p:extLst>
   </p:cSld>
   <p:clrMapOvr>
     <a:masterClrMapping/>
@@ -4875,13 +4795,7 @@
       </p:grpSpPr>
       <p:sp>
         <p:nvSpPr>
-          <p:cNvPr id="2" name="Заголовок 1">
-            <a:extLst>
-              <a:ext uri="{FF2B5EF4-FFF2-40B4-BE49-F238E27FC236}">
-                <a16:creationId xmlns:a16="http://schemas.microsoft.com/office/drawing/2014/main" id="{7CFC4D88-A72D-9FA2-AFC0-48118A8BCDE0}"/>
-              </a:ext>
-            </a:extLst>
-          </p:cNvPr>
+          <p:cNvPr id="2" name="Заголовок 1"/>
           <p:cNvSpPr>
             <a:spLocks noGrp="1"/>
           </p:cNvSpPr>
@@ -4904,13 +4818,7 @@
       </p:sp>
       <p:sp>
         <p:nvSpPr>
-          <p:cNvPr id="3" name="Объект 2">
-            <a:extLst>
-              <a:ext uri="{FF2B5EF4-FFF2-40B4-BE49-F238E27FC236}">
-                <a16:creationId xmlns:a16="http://schemas.microsoft.com/office/drawing/2014/main" id="{F62BB0B6-23BD-A7A2-4705-FE16CF429706}"/>
-              </a:ext>
-            </a:extLst>
-          </p:cNvPr>
+          <p:cNvPr id="3" name="Объект 2"/>
           <p:cNvSpPr>
             <a:spLocks noGrp="1"/>
           </p:cNvSpPr>
@@ -4959,6 +4867,7 @@
               <a:rPr lang="ru-RU" dirty="0"/>
               <a:t>удовлетворяющий ограничениям</a:t>
             </a:r>
+            <a:endParaRPr lang="ru-RU" dirty="0"/>
           </a:p>
           <a:p>
             <a:r>
@@ -4976,12 +4885,14 @@
               <a:rPr lang="ru-RU" dirty="0"/>
               <a:t>Ограничения: толщина профиля, радиус передней кромки, толщина задней кромки</a:t>
             </a:r>
+            <a:endParaRPr lang="ru-RU" dirty="0"/>
           </a:p>
           <a:p>
             <a:r>
               <a:rPr lang="ru-RU" dirty="0"/>
               <a:t>Параметризация формы с помощью кривых Безье </a:t>
             </a:r>
+            <a:endParaRPr lang="ru-RU" dirty="0"/>
           </a:p>
           <a:p>
             <a:r>
@@ -5004,6 +4915,7 @@
               <a:rPr lang="ru-RU" dirty="0"/>
               <a:t>скорости выполнения алгоритма и его устойчивости</a:t>
             </a:r>
+            <a:endParaRPr lang="ru-RU" dirty="0"/>
           </a:p>
           <a:p>
             <a:endParaRPr lang="en-US" dirty="0"/>
@@ -5012,13 +4924,7 @@
       </p:sp>
       <p:sp>
         <p:nvSpPr>
-          <p:cNvPr id="4" name="Номер слайда 3">
-            <a:extLst>
-              <a:ext uri="{FF2B5EF4-FFF2-40B4-BE49-F238E27FC236}">
-                <a16:creationId xmlns:a16="http://schemas.microsoft.com/office/drawing/2014/main" id="{CF335DE7-A49B-6C06-1BD9-1752185972DB}"/>
-              </a:ext>
-            </a:extLst>
-          </p:cNvPr>
+          <p:cNvPr id="4" name="Номер слайда 3"/>
           <p:cNvSpPr>
             <a:spLocks noGrp="1"/>
           </p:cNvSpPr>
@@ -5033,18 +4939,12 @@
           <a:p>
             <a:fld id="{39D93D24-9446-4BD4-975C-09DCDF7E2057}" type="slidenum">
               <a:rPr lang="en-US" smtClean="0"/>
-              <a:t>6</a:t>
             </a:fld>
             <a:endParaRPr lang="en-US"/>
           </a:p>
         </p:txBody>
       </p:sp>
     </p:spTree>
-    <p:extLst>
-      <p:ext uri="{BB962C8B-B14F-4D97-AF65-F5344CB8AC3E}">
-        <p14:creationId xmlns:p14="http://schemas.microsoft.com/office/powerpoint/2010/main" val="518446154"/>
-      </p:ext>
-    </p:extLst>
   </p:cSld>
   <p:clrMapOvr>
     <a:masterClrMapping/>
@@ -5071,13 +4971,7 @@
       </p:grpSpPr>
       <p:sp>
         <p:nvSpPr>
-          <p:cNvPr id="2" name="Заголовок 1">
-            <a:extLst>
-              <a:ext uri="{FF2B5EF4-FFF2-40B4-BE49-F238E27FC236}">
-                <a16:creationId xmlns:a16="http://schemas.microsoft.com/office/drawing/2014/main" id="{7C1AC8B5-4CC0-5C10-CDD9-9F865BC201BB}"/>
-              </a:ext>
-            </a:extLst>
-          </p:cNvPr>
+          <p:cNvPr id="2" name="Заголовок 1"/>
           <p:cNvSpPr>
             <a:spLocks noGrp="1"/>
           </p:cNvSpPr>
@@ -5100,13 +4994,7 @@
       </p:sp>
       <p:sp>
         <p:nvSpPr>
-          <p:cNvPr id="3" name="Объект 2">
-            <a:extLst>
-              <a:ext uri="{FF2B5EF4-FFF2-40B4-BE49-F238E27FC236}">
-                <a16:creationId xmlns:a16="http://schemas.microsoft.com/office/drawing/2014/main" id="{C68065BA-0EEA-924E-D6CC-3EE4733A36CF}"/>
-              </a:ext>
-            </a:extLst>
-          </p:cNvPr>
+          <p:cNvPr id="3" name="Объект 2"/>
           <p:cNvSpPr>
             <a:spLocks noGrp="1"/>
           </p:cNvSpPr>
@@ -5132,6 +5020,7 @@
               <a:rPr lang="en-US" dirty="0"/>
               <a:t>EGO, CG, MADS</a:t>
             </a:r>
+            <a:endParaRPr lang="en-US" dirty="0"/>
           </a:p>
           <a:p>
             <a:r>
@@ -5142,6 +5031,7 @@
               <a:rPr lang="ru-RU" dirty="0"/>
               <a:t>глобальная оптимизация на основе суррогатного моделирования </a:t>
             </a:r>
+            <a:endParaRPr lang="ru-RU" dirty="0"/>
           </a:p>
           <a:p>
             <a:r>
@@ -5152,6 +5042,7 @@
               <a:rPr lang="ru-RU" dirty="0"/>
               <a:t> градиентный локальный метод </a:t>
             </a:r>
+            <a:endParaRPr lang="ru-RU" dirty="0"/>
           </a:p>
           <a:p>
             <a:r>
@@ -5170,11 +5061,20 @@
               <a:rPr lang="ru-RU" dirty="0"/>
               <a:t> метод, эффективный в условиях сильного влияния шума</a:t>
             </a:r>
-          </a:p>
-          <a:p>
-            <a:r>
-              <a:rPr lang="ru-RU" dirty="0"/>
-              <a:t>На начальном этапе использовалась реализация библиотеки </a:t>
+            <a:endParaRPr lang="ru-RU" dirty="0"/>
+          </a:p>
+          <a:p>
+            <a:r>
+              <a:rPr lang="ru-RU" dirty="0"/>
+              <a:t>На начальном этапе использовалась реализация </a:t>
+            </a:r>
+            <a:r>
+              <a:rPr lang="en-US" dirty="0"/>
+              <a:t>CG </a:t>
+            </a:r>
+            <a:r>
+              <a:rPr lang="ru-RU" dirty="0"/>
+              <a:t>из библиотеки </a:t>
             </a:r>
             <a:r>
               <a:rPr lang="en-US" dirty="0" err="1"/>
@@ -5198,13 +5098,7 @@
       </p:sp>
       <p:sp>
         <p:nvSpPr>
-          <p:cNvPr id="4" name="Номер слайда 3">
-            <a:extLst>
-              <a:ext uri="{FF2B5EF4-FFF2-40B4-BE49-F238E27FC236}">
-                <a16:creationId xmlns:a16="http://schemas.microsoft.com/office/drawing/2014/main" id="{51032550-E19F-9DED-FE28-94A5A5A565F2}"/>
-              </a:ext>
-            </a:extLst>
-          </p:cNvPr>
+          <p:cNvPr id="4" name="Номер слайда 3"/>
           <p:cNvSpPr>
             <a:spLocks noGrp="1"/>
           </p:cNvSpPr>
@@ -5219,18 +5113,12 @@
           <a:p>
             <a:fld id="{39D93D24-9446-4BD4-975C-09DCDF7E2057}" type="slidenum">
               <a:rPr lang="en-US" smtClean="0"/>
-              <a:t>7</a:t>
             </a:fld>
             <a:endParaRPr lang="en-US"/>
           </a:p>
         </p:txBody>
       </p:sp>
     </p:spTree>
-    <p:extLst>
-      <p:ext uri="{BB962C8B-B14F-4D97-AF65-F5344CB8AC3E}">
-        <p14:creationId xmlns:p14="http://schemas.microsoft.com/office/powerpoint/2010/main" val="2321384503"/>
-      </p:ext>
-    </p:extLst>
   </p:cSld>
   <p:clrMapOvr>
     <a:masterClrMapping/>
@@ -5257,13 +5145,7 @@
       </p:grpSpPr>
       <p:sp>
         <p:nvSpPr>
-          <p:cNvPr id="2" name="Title 1">
-            <a:extLst>
-              <a:ext uri="{FF2B5EF4-FFF2-40B4-BE49-F238E27FC236}">
-                <a16:creationId xmlns:a16="http://schemas.microsoft.com/office/drawing/2014/main" id="{54E03BF7-AC8A-3A90-FC8D-146A3C809BCA}"/>
-              </a:ext>
-            </a:extLst>
-          </p:cNvPr>
+          <p:cNvPr id="2" name="Title 1"/>
           <p:cNvSpPr>
             <a:spLocks noGrp="1"/>
           </p:cNvSpPr>
@@ -5294,13 +5176,7 @@
       </p:sp>
       <p:sp>
         <p:nvSpPr>
-          <p:cNvPr id="3" name="Content Placeholder 2">
-            <a:extLst>
-              <a:ext uri="{FF2B5EF4-FFF2-40B4-BE49-F238E27FC236}">
-                <a16:creationId xmlns:a16="http://schemas.microsoft.com/office/drawing/2014/main" id="{B762543B-334B-A98F-26FC-24C97865B67F}"/>
-              </a:ext>
-            </a:extLst>
-          </p:cNvPr>
+          <p:cNvPr id="3" name="Content Placeholder 2"/>
           <p:cNvSpPr>
             <a:spLocks noGrp="1"/>
           </p:cNvSpPr>
@@ -5330,18 +5206,36 @@
               <a:rPr lang="ru-RU" dirty="0"/>
               <a:t>решатель</a:t>
             </a:r>
+            <a:endParaRPr lang="ru-RU" dirty="0"/>
           </a:p>
           <a:p>
             <a:r>
               <a:rPr lang="ru-RU" dirty="0"/>
               <a:t>Для минимизации влияния сетки написан скрипт автоматического построения структурированной сетки около профиля </a:t>
             </a:r>
-          </a:p>
-          <a:p>
-            <a:r>
-              <a:rPr lang="ru-RU" dirty="0"/>
-              <a:t>Проведена валидация и анализ сеточной сходимости </a:t>
-            </a:r>
+            <a:endParaRPr lang="ru-RU" dirty="0"/>
+          </a:p>
+          <a:p>
+            <a:r>
+              <a:rPr lang="ru-RU" dirty="0"/>
+              <a:t>Проведена валидация и анализ сеточной сходимости</a:t>
+            </a:r>
+            <a:endParaRPr lang="ru-RU" dirty="0"/>
+          </a:p>
+          <a:p>
+            <a:r>
+              <a:rPr lang="ru-RU" dirty="0"/>
+              <a:t>Валидация на случае </a:t>
+            </a:r>
+            <a:r>
+              <a:rPr lang="en-US" dirty="0"/>
+              <a:t>RAE2822, </a:t>
+            </a:r>
+            <a:r>
+              <a:rPr lang="ru-RU" dirty="0"/>
+              <a:t>разница с ним в дальнейшем использовалась в качестве бенчмарка </a:t>
+            </a:r>
+            <a:endParaRPr lang="ru-RU" dirty="0"/>
           </a:p>
           <a:p>
             <a:r>
@@ -5357,20 +5251,15 @@
           <a:p>
             <a:r>
               <a:rPr lang="ru-RU" dirty="0"/>
-              <a:t>Для борьбы с </a:t>
-            </a:r>
-          </a:p>
-        </p:txBody>
-      </p:sp>
-      <p:sp>
-        <p:nvSpPr>
-          <p:cNvPr id="4" name="Slide Number Placeholder 3">
-            <a:extLst>
-              <a:ext uri="{FF2B5EF4-FFF2-40B4-BE49-F238E27FC236}">
-                <a16:creationId xmlns:a16="http://schemas.microsoft.com/office/drawing/2014/main" id="{AEE92E1E-9BA2-0963-050A-569A8F11A957}"/>
-              </a:ext>
-            </a:extLst>
-          </p:cNvPr>
+              <a:t>Для повышения устойчивости используется жесткое ограничение по числу итераций </a:t>
+            </a:r>
+            <a:endParaRPr lang="ru-RU" dirty="0"/>
+          </a:p>
+        </p:txBody>
+      </p:sp>
+      <p:sp>
+        <p:nvSpPr>
+          <p:cNvPr id="4" name="Slide Number Placeholder 3"/>
           <p:cNvSpPr>
             <a:spLocks noGrp="1"/>
           </p:cNvSpPr>
@@ -5385,18 +5274,12 @@
           <a:p>
             <a:fld id="{39D93D24-9446-4BD4-975C-09DCDF7E2057}" type="slidenum">
               <a:rPr lang="en-US" smtClean="0"/>
-              <a:t>8</a:t>
             </a:fld>
             <a:endParaRPr lang="en-US"/>
           </a:p>
         </p:txBody>
       </p:sp>
     </p:spTree>
-    <p:extLst>
-      <p:ext uri="{BB962C8B-B14F-4D97-AF65-F5344CB8AC3E}">
-        <p14:creationId xmlns:p14="http://schemas.microsoft.com/office/powerpoint/2010/main" val="3959219023"/>
-      </p:ext>
-    </p:extLst>
   </p:cSld>
   <p:clrMapOvr>
     <a:masterClrMapping/>
@@ -5423,13 +5306,7 @@
       </p:grpSpPr>
       <p:sp>
         <p:nvSpPr>
-          <p:cNvPr id="2" name="Заголовок 1">
-            <a:extLst>
-              <a:ext uri="{FF2B5EF4-FFF2-40B4-BE49-F238E27FC236}">
-                <a16:creationId xmlns:a16="http://schemas.microsoft.com/office/drawing/2014/main" id="{C9C8C651-81F9-A043-EEE4-EABD398D9488}"/>
-              </a:ext>
-            </a:extLst>
-          </p:cNvPr>
+          <p:cNvPr id="2" name="Заголовок 1"/>
           <p:cNvSpPr>
             <a:spLocks noGrp="1"/>
           </p:cNvSpPr>
@@ -5452,70 +5329,155 @@
       </p:sp>
       <p:sp>
         <p:nvSpPr>
-          <p:cNvPr id="3" name="Объект 2">
-            <a:extLst>
-              <a:ext uri="{FF2B5EF4-FFF2-40B4-BE49-F238E27FC236}">
-                <a16:creationId xmlns:a16="http://schemas.microsoft.com/office/drawing/2014/main" id="{505D5D5A-6273-2156-2EE8-895BE900824D}"/>
-              </a:ext>
-            </a:extLst>
-          </p:cNvPr>
-          <p:cNvSpPr>
-            <a:spLocks noGrp="1"/>
-          </p:cNvSpPr>
-          <p:nvPr>
-            <p:ph idx="1"/>
-          </p:nvPr>
-        </p:nvSpPr>
-        <p:spPr/>
-        <p:txBody>
-          <a:bodyPr/>
-          <a:lstStyle/>
-          <a:p>
-            <a:r>
-              <a:rPr lang="ru-RU" dirty="0"/>
-              <a:t>Постановки конкретных задач</a:t>
-            </a:r>
-          </a:p>
-          <a:p>
-            <a:r>
-              <a:rPr lang="ru-RU" dirty="0"/>
-              <a:t>Условия и результаты экспериментов</a:t>
-            </a:r>
-          </a:p>
-          <a:p>
-            <a:r>
-              <a:rPr lang="ru-RU" dirty="0"/>
-              <a:t>Формулы, графики, таблицы</a:t>
-            </a:r>
-          </a:p>
-          <a:p>
-            <a:pPr>
-              <a:lnSpc>
-                <a:spcPct val="100000"/>
-              </a:lnSpc>
+          <p:cNvPr id="3" name="Объект 2"/>
+          <p:cNvSpPr>
+            <a:spLocks noGrp="1"/>
+          </p:cNvSpPr>
+          <p:nvPr>
+            <p:ph sz="half" idx="1"/>
+          </p:nvPr>
+        </p:nvSpPr>
+        <p:spPr/>
+        <p:txBody>
+          <a:bodyPr/>
+          <a:lstStyle/>
+          <a:p>
+            <a:r>
+              <a:rPr lang="ru-RU" dirty="0"/>
+              <a:t>Профиль параметризовался двумя кривыми Безье</a:t>
+            </a:r>
+            <a:endParaRPr lang="ru-RU" dirty="0"/>
+          </a:p>
+          <a:p>
+            <a:r>
+              <a:rPr lang="ru-RU" dirty="0"/>
+              <a:t>Вектор параметров</a:t>
+            </a:r>
+            <a:r>
+              <a:rPr lang="en-US" altLang="ru-RU" dirty="0"/>
+              <a:t>:</a:t>
+            </a:r>
+            <a:endParaRPr lang="en-US" altLang="ru-RU" dirty="0"/>
+          </a:p>
+          <a:p>
+            <a:pPr marL="0" indent="0">
+              <a:buNone/>
             </a:pPr>
             <a:r>
-              <a:rPr lang="ru-RU" dirty="0"/>
-              <a:t>Сравнения различных методов с результатами других авторов и между собой</a:t>
-            </a:r>
-          </a:p>
-          <a:p>
-            <a:r>
-              <a:rPr lang="ru-RU" dirty="0"/>
-              <a:t>Анализ и интерпретация полученных результатов</a:t>
-            </a:r>
-          </a:p>
-        </p:txBody>
-      </p:sp>
-      <p:sp>
-        <p:nvSpPr>
-          <p:cNvPr id="4" name="Номер слайда 3">
-            <a:extLst>
-              <a:ext uri="{FF2B5EF4-FFF2-40B4-BE49-F238E27FC236}">
-                <a16:creationId xmlns:a16="http://schemas.microsoft.com/office/drawing/2014/main" id="{995AA046-F6C6-6287-D843-8CEDD3FA82CD}"/>
-              </a:ext>
-            </a:extLst>
-          </p:cNvPr>
+              <a:rPr lang="en-US" altLang="ru-RU" dirty="0"/>
+              <a:t>x =</a:t>
+            </a:r>
+            <a:r>
+              <a:rPr lang="ru-RU" dirty="0"/>
+              <a:t> </a:t>
+            </a:r>
+            <a:r>
+              <a:rPr lang="en-US" dirty="0"/>
+              <a:t>[R</a:t>
+            </a:r>
+            <a:r>
+              <a:rPr lang="en-US" baseline="-25000" dirty="0"/>
+              <a:t>forw</a:t>
+            </a:r>
+            <a:r>
+              <a:rPr lang="en-US" dirty="0"/>
+              <a:t>, P</a:t>
+            </a:r>
+            <a:r>
+              <a:rPr lang="en-US" baseline="-25000" dirty="0"/>
+              <a:t>u1</a:t>
+            </a:r>
+            <a:r>
+              <a:rPr lang="en-US" dirty="0"/>
+              <a:t>,..., P</a:t>
+            </a:r>
+            <a:r>
+              <a:rPr lang="en-US" baseline="-25000" dirty="0"/>
+              <a:t>uN</a:t>
+            </a:r>
+            <a:r>
+              <a:rPr lang="en-US" dirty="0"/>
+              <a:t>, P</a:t>
+            </a:r>
+            <a:r>
+              <a:rPr lang="en-US" baseline="-25000" dirty="0"/>
+              <a:t>d1</a:t>
+            </a:r>
+            <a:r>
+              <a:rPr lang="en-US" dirty="0"/>
+              <a:t>, ..., P</a:t>
+            </a:r>
+            <a:r>
+              <a:rPr lang="en-US" baseline="-25000" dirty="0"/>
+              <a:t>dN</a:t>
+            </a:r>
+            <a:r>
+              <a:rPr lang="en-US" dirty="0"/>
+              <a:t>]</a:t>
+            </a:r>
+            <a:endParaRPr lang="en-US" dirty="0"/>
+          </a:p>
+          <a:p>
+            <a:r>
+              <a:rPr lang="ru-RU" altLang="en-US" dirty="0"/>
+              <a:t>Проверка проводилась методом </a:t>
+            </a:r>
+            <a:r>
+              <a:rPr lang="en-US" altLang="en-US" dirty="0"/>
+              <a:t>CG </a:t>
+            </a:r>
+            <a:r>
+              <a:rPr lang="ru-RU" altLang="en-US" dirty="0"/>
+              <a:t>при старте от симметричного профиля </a:t>
+            </a:r>
+            <a:endParaRPr lang="ru-RU" altLang="en-US" dirty="0"/>
+          </a:p>
+          <a:p>
+            <a:r>
+              <a:rPr lang="ru-RU" dirty="0"/>
+              <a:t>Для режима </a:t>
+            </a:r>
+            <a:r>
+              <a:rPr lang="en-US" dirty="0"/>
+              <a:t>M = 0.75, C</a:t>
+            </a:r>
+            <a:r>
+              <a:rPr lang="en-US" baseline="-25000" dirty="0"/>
+              <a:t>ya</a:t>
+            </a:r>
+            <a:r>
+              <a:rPr lang="en-US" dirty="0"/>
+              <a:t>= 0.5 </a:t>
+            </a:r>
+            <a:r>
+              <a:rPr lang="ru-RU" dirty="0"/>
+              <a:t>оптимальная форма</a:t>
+            </a:r>
+            <a:r>
+              <a:rPr lang="ru-RU" altLang="en-US" dirty="0"/>
+              <a:t> достигается уже при </a:t>
+            </a:r>
+            <a:r>
+              <a:rPr lang="en-US" altLang="en-US" dirty="0"/>
+              <a:t>N = 3 </a:t>
+            </a:r>
+            <a:r>
+              <a:rPr lang="ru-RU" altLang="en-US" dirty="0"/>
+              <a:t> (7 параметров)</a:t>
+            </a:r>
+            <a:endParaRPr lang="ru-RU" dirty="0"/>
+          </a:p>
+          <a:p>
+            <a:pPr marL="0" indent="0">
+              <a:buNone/>
+            </a:pPr>
+            <a:endParaRPr lang="ru-RU" dirty="0"/>
+          </a:p>
+        </p:txBody>
+      </p:sp>
+      <p:sp>
+        <p:nvSpPr>
+          <p:cNvPr id="4" name="Номер слайда 3"/>
           <p:cNvSpPr>
             <a:spLocks noGrp="1"/>
           </p:cNvSpPr>
@@ -5530,18 +5492,12 @@
           <a:p>
             <a:fld id="{39D93D24-9446-4BD4-975C-09DCDF7E2057}" type="slidenum">
               <a:rPr lang="en-US" smtClean="0"/>
-              <a:t>9</a:t>
             </a:fld>
             <a:endParaRPr lang="en-US"/>
           </a:p>
         </p:txBody>
       </p:sp>
     </p:spTree>
-    <p:extLst>
-      <p:ext uri="{BB962C8B-B14F-4D97-AF65-F5344CB8AC3E}">
-        <p14:creationId xmlns:p14="http://schemas.microsoft.com/office/powerpoint/2010/main" val="3134393287"/>
-      </p:ext>
-    </p:extLst>
   </p:cSld>
   <p:clrMapOvr>
     <a:masterClrMapping/>
@@ -5592,7 +5548,7 @@
     </a:clrScheme>
     <a:fontScheme name="Стандартная">
       <a:majorFont>
-        <a:latin typeface="Calibri Light" panose="020F0302020204030204"/>
+        <a:latin typeface="Calibri Light"/>
         <a:ea typeface=""/>
         <a:cs typeface=""/>
         <a:font script="Jpan" typeface="游ゴシック Light"/>
@@ -5625,26 +5581,9 @@
         <a:font script="Viet" typeface="Times New Roman"/>
         <a:font script="Uigh" typeface="Microsoft Uighur"/>
         <a:font script="Geor" typeface="Sylfaen"/>
-        <a:font script="Armn" typeface="Arial"/>
-        <a:font script="Bugi" typeface="Leelawadee UI"/>
-        <a:font script="Bopo" typeface="Microsoft JhengHei"/>
-        <a:font script="Java" typeface="Javanese Text"/>
-        <a:font script="Lisu" typeface="Segoe UI"/>
-        <a:font script="Mymr" typeface="Myanmar Text"/>
-        <a:font script="Nkoo" typeface="Ebrima"/>
-        <a:font script="Olck" typeface="Nirmala UI"/>
-        <a:font script="Osma" typeface="Ebrima"/>
-        <a:font script="Phag" typeface="Phagspa"/>
-        <a:font script="Syrn" typeface="Estrangelo Edessa"/>
-        <a:font script="Syrj" typeface="Estrangelo Edessa"/>
-        <a:font script="Syre" typeface="Estrangelo Edessa"/>
-        <a:font script="Sora" typeface="Nirmala UI"/>
-        <a:font script="Tale" typeface="Microsoft Tai Le"/>
-        <a:font script="Talu" typeface="Microsoft New Tai Lue"/>
-        <a:font script="Tfng" typeface="Ebrima"/>
       </a:majorFont>
       <a:minorFont>
-        <a:latin typeface="Calibri" panose="020F0502020204030204"/>
+        <a:latin typeface="Calibri"/>
         <a:ea typeface=""/>
         <a:cs typeface=""/>
         <a:font script="Jpan" typeface="游ゴシック"/>
@@ -5677,23 +5616,6 @@
         <a:font script="Viet" typeface="Arial"/>
         <a:font script="Uigh" typeface="Microsoft Uighur"/>
         <a:font script="Geor" typeface="Sylfaen"/>
-        <a:font script="Armn" typeface="Arial"/>
-        <a:font script="Bugi" typeface="Leelawadee UI"/>
-        <a:font script="Bopo" typeface="Microsoft JhengHei"/>
-        <a:font script="Java" typeface="Javanese Text"/>
-        <a:font script="Lisu" typeface="Segoe UI"/>
-        <a:font script="Mymr" typeface="Myanmar Text"/>
-        <a:font script="Nkoo" typeface="Ebrima"/>
-        <a:font script="Olck" typeface="Nirmala UI"/>
-        <a:font script="Osma" typeface="Ebrima"/>
-        <a:font script="Phag" typeface="Phagspa"/>
-        <a:font script="Syrn" typeface="Estrangelo Edessa"/>
-        <a:font script="Syrj" typeface="Estrangelo Edessa"/>
-        <a:font script="Syre" typeface="Estrangelo Edessa"/>
-        <a:font script="Sora" typeface="Nirmala UI"/>
-        <a:font script="Tale" typeface="Microsoft Tai Le"/>
-        <a:font script="Talu" typeface="Microsoft New Tai Lue"/>
-        <a:font script="Tfng" typeface="Ebrima"/>
       </a:minorFont>
     </a:fontScheme>
     <a:fmtScheme name="Стандартная">
@@ -5834,8 +5756,6 @@
       </a:bgFillStyleLst>
     </a:fmtScheme>
   </a:themeElements>
-  <a:objectDefaults/>
-  <a:extraClrSchemeLst/>
   <a:extLst>
     <a:ext uri="{05A4C25C-085E-4340-85A3-A5531E510DB2}">
       <thm15:themeFamily xmlns:thm15="http://schemas.microsoft.com/office/thememl/2012/main" name="Office Theme" id="{62F939B6-93AF-4DB8-9C6B-D6C7DFDC589F}" vid="{4A3C46E8-61CC-4603-A589-7422A47A8E4A}"/>
@@ -5887,7 +5807,7 @@
     </a:clrScheme>
     <a:fontScheme name="Стандартная">
       <a:majorFont>
-        <a:latin typeface="Calibri Light" panose="020F0302020204030204"/>
+        <a:latin typeface="Calibri Light"/>
         <a:ea typeface=""/>
         <a:cs typeface=""/>
         <a:font script="Jpan" typeface="游ゴシック Light"/>
@@ -5920,26 +5840,9 @@
         <a:font script="Viet" typeface="Times New Roman"/>
         <a:font script="Uigh" typeface="Microsoft Uighur"/>
         <a:font script="Geor" typeface="Sylfaen"/>
-        <a:font script="Armn" typeface="Arial"/>
-        <a:font script="Bugi" typeface="Leelawadee UI"/>
-        <a:font script="Bopo" typeface="Microsoft JhengHei"/>
-        <a:font script="Java" typeface="Javanese Text"/>
-        <a:font script="Lisu" typeface="Segoe UI"/>
-        <a:font script="Mymr" typeface="Myanmar Text"/>
-        <a:font script="Nkoo" typeface="Ebrima"/>
-        <a:font script="Olck" typeface="Nirmala UI"/>
-        <a:font script="Osma" typeface="Ebrima"/>
-        <a:font script="Phag" typeface="Phagspa"/>
-        <a:font script="Syrn" typeface="Estrangelo Edessa"/>
-        <a:font script="Syrj" typeface="Estrangelo Edessa"/>
-        <a:font script="Syre" typeface="Estrangelo Edessa"/>
-        <a:font script="Sora" typeface="Nirmala UI"/>
-        <a:font script="Tale" typeface="Microsoft Tai Le"/>
-        <a:font script="Talu" typeface="Microsoft New Tai Lue"/>
-        <a:font script="Tfng" typeface="Ebrima"/>
       </a:majorFont>
       <a:minorFont>
-        <a:latin typeface="Calibri" panose="020F0502020204030204"/>
+        <a:latin typeface="Calibri"/>
         <a:ea typeface=""/>
         <a:cs typeface=""/>
         <a:font script="Jpan" typeface="游ゴシック"/>
@@ -5972,23 +5875,6 @@
         <a:font script="Viet" typeface="Arial"/>
         <a:font script="Uigh" typeface="Microsoft Uighur"/>
         <a:font script="Geor" typeface="Sylfaen"/>
-        <a:font script="Armn" typeface="Arial"/>
-        <a:font script="Bugi" typeface="Leelawadee UI"/>
-        <a:font script="Bopo" typeface="Microsoft JhengHei"/>
-        <a:font script="Java" typeface="Javanese Text"/>
-        <a:font script="Lisu" typeface="Segoe UI"/>
-        <a:font script="Mymr" typeface="Myanmar Text"/>
-        <a:font script="Nkoo" typeface="Ebrima"/>
-        <a:font script="Olck" typeface="Nirmala UI"/>
-        <a:font script="Osma" typeface="Ebrima"/>
-        <a:font script="Phag" typeface="Phagspa"/>
-        <a:font script="Syrn" typeface="Estrangelo Edessa"/>
-        <a:font script="Syrj" typeface="Estrangelo Edessa"/>
-        <a:font script="Syre" typeface="Estrangelo Edessa"/>
-        <a:font script="Sora" typeface="Nirmala UI"/>
-        <a:font script="Tale" typeface="Microsoft Tai Le"/>
-        <a:font script="Talu" typeface="Microsoft New Tai Lue"/>
-        <a:font script="Tfng" typeface="Ebrima"/>
       </a:minorFont>
     </a:fontScheme>
     <a:fmtScheme name="Стандартная">
@@ -6129,8 +6015,6 @@
       </a:bgFillStyleLst>
     </a:fmtScheme>
   </a:themeElements>
-  <a:objectDefaults/>
-  <a:extraClrSchemeLst/>
   <a:extLst>
     <a:ext uri="{05A4C25C-085E-4340-85A3-A5531E510DB2}">
       <thm15:themeFamily xmlns:thm15="http://schemas.microsoft.com/office/thememl/2012/main" name="Office Theme" id="{62F939B6-93AF-4DB8-9C6B-D6C7DFDC589F}" vid="{4A3C46E8-61CC-4603-A589-7422A47A8E4A}"/>

--- a/results/Тексты/Презентация_ВКР Черных.pptx
+++ b/results/Тексты/Презентация_ВКР Черных.pptx
@@ -5,23 +5,22 @@
     <p:sldMasterId id="2147483648" r:id="rId1"/>
   </p:sldMasterIdLst>
   <p:notesMasterIdLst>
-    <p:notesMasterId r:id="rId13"/>
+    <p:notesMasterId r:id="rId15"/>
   </p:notesMasterIdLst>
   <p:sldIdLst>
-    <p:sldId id="256" r:id="rId3"/>
-    <p:sldId id="259" r:id="rId4"/>
-    <p:sldId id="258" r:id="rId5"/>
-    <p:sldId id="270" r:id="rId6"/>
-    <p:sldId id="268" r:id="rId7"/>
-    <p:sldId id="271" r:id="rId8"/>
-    <p:sldId id="262" r:id="rId9"/>
-    <p:sldId id="272" r:id="rId10"/>
-    <p:sldId id="263" r:id="rId11"/>
-    <p:sldId id="273" r:id="rId12"/>
-    <p:sldId id="274" r:id="rId14"/>
-    <p:sldId id="275" r:id="rId15"/>
-    <p:sldId id="276" r:id="rId16"/>
-    <p:sldId id="264" r:id="rId17"/>
+    <p:sldId id="256" r:id="rId2"/>
+    <p:sldId id="259" r:id="rId3"/>
+    <p:sldId id="258" r:id="rId4"/>
+    <p:sldId id="270" r:id="rId5"/>
+    <p:sldId id="271" r:id="rId6"/>
+    <p:sldId id="262" r:id="rId7"/>
+    <p:sldId id="272" r:id="rId8"/>
+    <p:sldId id="263" r:id="rId9"/>
+    <p:sldId id="273" r:id="rId10"/>
+    <p:sldId id="274" r:id="rId11"/>
+    <p:sldId id="275" r:id="rId12"/>
+    <p:sldId id="276" r:id="rId13"/>
+    <p:sldId id="264" r:id="rId14"/>
   </p:sldIdLst>
   <p:sldSz cx="12192000" cy="6858000"/>
   <p:notesSz cx="6858000" cy="9144000"/>
@@ -120,6 +119,11 @@
       </a:defRPr>
     </a:lvl9pPr>
   </p:defaultTextStyle>
+  <p:extLst>
+    <p:ext uri="{EFAFB233-063F-42B5-8137-9DF3F51BA10A}">
+      <p15:sldGuideLst xmlns:p15="http://schemas.microsoft.com/office/powerpoint/2012/main"/>
+    </p:ext>
+  </p:extLst>
 </p:presentation>
 </file>
 
@@ -205,6 +209,7 @@
           <a:p>
             <a:fld id="{21FA7797-00FD-4366-A7DD-DDB70299F94B}" type="datetimeFigureOut">
               <a:rPr lang="en-US" smtClean="0"/>
+              <a:t>5/25/2026</a:t>
             </a:fld>
             <a:endParaRPr lang="en-US"/>
           </a:p>
@@ -271,7 +276,6 @@
               <a:rPr lang="ru-RU"/>
               <a:t>Образец текста</a:t>
             </a:r>
-            <a:endParaRPr lang="ru-RU"/>
           </a:p>
           <a:p>
             <a:pPr lvl="1"/>
@@ -279,7 +283,6 @@
               <a:rPr lang="ru-RU"/>
               <a:t>Второй уровень</a:t>
             </a:r>
-            <a:endParaRPr lang="ru-RU"/>
           </a:p>
           <a:p>
             <a:pPr lvl="2"/>
@@ -287,7 +290,6 @@
               <a:rPr lang="ru-RU"/>
               <a:t>Третий уровень</a:t>
             </a:r>
-            <a:endParaRPr lang="ru-RU"/>
           </a:p>
           <a:p>
             <a:pPr lvl="3"/>
@@ -295,7 +297,6 @@
               <a:rPr lang="ru-RU"/>
               <a:t>Четвертый уровень</a:t>
             </a:r>
-            <a:endParaRPr lang="ru-RU"/>
           </a:p>
           <a:p>
             <a:pPr lvl="4"/>
@@ -367,6 +368,7 @@
           <a:p>
             <a:fld id="{2BE35E0A-4247-4819-B9AA-855A9160BAD1}" type="slidenum">
               <a:rPr lang="en-US" smtClean="0"/>
+              <a:t>‹#›</a:t>
             </a:fld>
             <a:endParaRPr lang="en-US"/>
           </a:p>
@@ -479,12 +481,19 @@
         <p:cNvGrpSpPr/>
         <p:nvPr/>
       </p:nvGrpSpPr>
-      <p:grpSpPr/>
+      <p:grpSpPr>
+        <a:xfrm>
+          <a:off x="0" y="0"/>
+          <a:ext cx="0" cy="0"/>
+          <a:chOff x="0" y="0"/>
+          <a:chExt cx="0" cy="0"/>
+        </a:xfrm>
+      </p:grpSpPr>
       <p:sp>
         <p:nvSpPr>
           <p:cNvPr id="2" name="Slide Image Placeholder 1"/>
           <p:cNvSpPr>
-            <a:spLocks noGrp="1"/>
+            <a:spLocks noGrp="1" noRot="1" noChangeAspect="1"/>
           </p:cNvSpPr>
           <p:nvPr>
             <p:ph type="sldImg" idx="2"/>
@@ -505,6 +514,7 @@
         <p:spPr/>
         <p:txBody>
           <a:bodyPr/>
+          <a:lstStyle/>
           <a:p>
             <a:endParaRPr lang="en-US"/>
           </a:p>
@@ -659,6 +669,7 @@
           <a:p>
             <a:fld id="{7552D2F9-902E-45BE-B09B-749FE4E7C635}" type="datetime1">
               <a:rPr lang="en-US" smtClean="0"/>
+              <a:t>5/25/2026</a:t>
             </a:fld>
             <a:endParaRPr lang="en-US"/>
           </a:p>
@@ -700,6 +711,7 @@
           <a:p>
             <a:fld id="{39D93D24-9446-4BD4-975C-09DCDF7E2057}" type="slidenum">
               <a:rPr lang="en-US" smtClean="0"/>
+              <a:t>‹#›</a:t>
             </a:fld>
             <a:endParaRPr lang="en-US"/>
           </a:p>
@@ -773,7 +785,6 @@
               <a:rPr lang="ru-RU"/>
               <a:t>Образец текста</a:t>
             </a:r>
-            <a:endParaRPr lang="ru-RU"/>
           </a:p>
           <a:p>
             <a:pPr lvl="1"/>
@@ -781,7 +792,6 @@
               <a:rPr lang="ru-RU"/>
               <a:t>Второй уровень</a:t>
             </a:r>
-            <a:endParaRPr lang="ru-RU"/>
           </a:p>
           <a:p>
             <a:pPr lvl="2"/>
@@ -789,7 +799,6 @@
               <a:rPr lang="ru-RU"/>
               <a:t>Третий уровень</a:t>
             </a:r>
-            <a:endParaRPr lang="ru-RU"/>
           </a:p>
           <a:p>
             <a:pPr lvl="3"/>
@@ -797,7 +806,6 @@
               <a:rPr lang="ru-RU"/>
               <a:t>Четвертый уровень</a:t>
             </a:r>
-            <a:endParaRPr lang="ru-RU"/>
           </a:p>
           <a:p>
             <a:pPr lvl="4"/>
@@ -826,6 +834,7 @@
           <a:p>
             <a:fld id="{2BC4809F-93B5-4C67-BCEE-6C99C20201B7}" type="datetime1">
               <a:rPr lang="en-US" smtClean="0"/>
+              <a:t>5/25/2026</a:t>
             </a:fld>
             <a:endParaRPr lang="en-US"/>
           </a:p>
@@ -867,6 +876,7 @@
           <a:p>
             <a:fld id="{39D93D24-9446-4BD4-975C-09DCDF7E2057}" type="slidenum">
               <a:rPr lang="en-US" smtClean="0"/>
+              <a:t>‹#›</a:t>
             </a:fld>
             <a:endParaRPr lang="en-US"/>
           </a:p>
@@ -950,7 +960,6 @@
               <a:rPr lang="ru-RU"/>
               <a:t>Образец текста</a:t>
             </a:r>
-            <a:endParaRPr lang="ru-RU"/>
           </a:p>
           <a:p>
             <a:pPr lvl="1"/>
@@ -958,7 +967,6 @@
               <a:rPr lang="ru-RU"/>
               <a:t>Второй уровень</a:t>
             </a:r>
-            <a:endParaRPr lang="ru-RU"/>
           </a:p>
           <a:p>
             <a:pPr lvl="2"/>
@@ -966,7 +974,6 @@
               <a:rPr lang="ru-RU"/>
               <a:t>Третий уровень</a:t>
             </a:r>
-            <a:endParaRPr lang="ru-RU"/>
           </a:p>
           <a:p>
             <a:pPr lvl="3"/>
@@ -974,7 +981,6 @@
               <a:rPr lang="ru-RU"/>
               <a:t>Четвертый уровень</a:t>
             </a:r>
-            <a:endParaRPr lang="ru-RU"/>
           </a:p>
           <a:p>
             <a:pPr lvl="4"/>
@@ -1003,6 +1009,7 @@
           <a:p>
             <a:fld id="{2ED322FC-41C7-4131-A9A8-0AE44A257B23}" type="datetime1">
               <a:rPr lang="en-US" smtClean="0"/>
+              <a:t>5/25/2026</a:t>
             </a:fld>
             <a:endParaRPr lang="en-US"/>
           </a:p>
@@ -1044,6 +1051,7 @@
           <a:p>
             <a:fld id="{39D93D24-9446-4BD4-975C-09DCDF7E2057}" type="slidenum">
               <a:rPr lang="en-US" smtClean="0"/>
+              <a:t>‹#›</a:t>
             </a:fld>
             <a:endParaRPr lang="en-US"/>
           </a:p>
@@ -1117,7 +1125,6 @@
               <a:rPr lang="ru-RU"/>
               <a:t>Образец текста</a:t>
             </a:r>
-            <a:endParaRPr lang="ru-RU"/>
           </a:p>
           <a:p>
             <a:pPr lvl="1"/>
@@ -1125,7 +1132,6 @@
               <a:rPr lang="ru-RU"/>
               <a:t>Второй уровень</a:t>
             </a:r>
-            <a:endParaRPr lang="ru-RU"/>
           </a:p>
           <a:p>
             <a:pPr lvl="2"/>
@@ -1133,7 +1139,6 @@
               <a:rPr lang="ru-RU"/>
               <a:t>Третий уровень</a:t>
             </a:r>
-            <a:endParaRPr lang="ru-RU"/>
           </a:p>
           <a:p>
             <a:pPr lvl="3"/>
@@ -1141,7 +1146,6 @@
               <a:rPr lang="ru-RU"/>
               <a:t>Четвертый уровень</a:t>
             </a:r>
-            <a:endParaRPr lang="ru-RU"/>
           </a:p>
           <a:p>
             <a:pPr lvl="4"/>
@@ -1170,6 +1174,7 @@
           <a:p>
             <a:fld id="{09BB4562-EE48-46C3-92EF-5FADBBFDBB53}" type="datetime1">
               <a:rPr lang="en-US" smtClean="0"/>
+              <a:t>5/25/2026</a:t>
             </a:fld>
             <a:endParaRPr lang="en-US"/>
           </a:p>
@@ -1211,6 +1216,7 @@
           <a:p>
             <a:fld id="{39D93D24-9446-4BD4-975C-09DCDF7E2057}" type="slidenum">
               <a:rPr lang="en-US" smtClean="0"/>
+              <a:t>‹#›</a:t>
             </a:fld>
             <a:endParaRPr lang="en-US"/>
           </a:p>
@@ -1393,7 +1399,6 @@
               <a:rPr lang="ru-RU" dirty="0"/>
               <a:t>Образец текста</a:t>
             </a:r>
-            <a:endParaRPr lang="ru-RU" dirty="0"/>
           </a:p>
         </p:txBody>
       </p:sp>
@@ -1414,6 +1419,7 @@
           <a:p>
             <a:fld id="{F610E3C8-8A0E-4E15-B33E-2B4AD00BB11C}" type="datetime1">
               <a:rPr lang="en-US" smtClean="0"/>
+              <a:t>5/25/2026</a:t>
             </a:fld>
             <a:endParaRPr lang="en-US"/>
           </a:p>
@@ -1455,6 +1461,7 @@
           <a:p>
             <a:fld id="{39D93D24-9446-4BD4-975C-09DCDF7E2057}" type="slidenum">
               <a:rPr lang="en-US" smtClean="0"/>
+              <a:t>‹#›</a:t>
             </a:fld>
             <a:endParaRPr lang="en-US" dirty="0"/>
           </a:p>
@@ -1533,7 +1540,6 @@
               <a:rPr lang="ru-RU"/>
               <a:t>Образец текста</a:t>
             </a:r>
-            <a:endParaRPr lang="ru-RU"/>
           </a:p>
           <a:p>
             <a:pPr lvl="1"/>
@@ -1541,7 +1547,6 @@
               <a:rPr lang="ru-RU"/>
               <a:t>Второй уровень</a:t>
             </a:r>
-            <a:endParaRPr lang="ru-RU"/>
           </a:p>
           <a:p>
             <a:pPr lvl="2"/>
@@ -1549,7 +1554,6 @@
               <a:rPr lang="ru-RU"/>
               <a:t>Третий уровень</a:t>
             </a:r>
-            <a:endParaRPr lang="ru-RU"/>
           </a:p>
           <a:p>
             <a:pPr lvl="3"/>
@@ -1557,7 +1561,6 @@
               <a:rPr lang="ru-RU"/>
               <a:t>Четвертый уровень</a:t>
             </a:r>
-            <a:endParaRPr lang="ru-RU"/>
           </a:p>
           <a:p>
             <a:pPr lvl="4"/>
@@ -1594,7 +1597,6 @@
               <a:rPr lang="ru-RU"/>
               <a:t>Образец текста</a:t>
             </a:r>
-            <a:endParaRPr lang="ru-RU"/>
           </a:p>
           <a:p>
             <a:pPr lvl="1"/>
@@ -1602,7 +1604,6 @@
               <a:rPr lang="ru-RU"/>
               <a:t>Второй уровень</a:t>
             </a:r>
-            <a:endParaRPr lang="ru-RU"/>
           </a:p>
           <a:p>
             <a:pPr lvl="2"/>
@@ -1610,7 +1611,6 @@
               <a:rPr lang="ru-RU"/>
               <a:t>Третий уровень</a:t>
             </a:r>
-            <a:endParaRPr lang="ru-RU"/>
           </a:p>
           <a:p>
             <a:pPr lvl="3"/>
@@ -1618,7 +1618,6 @@
               <a:rPr lang="ru-RU"/>
               <a:t>Четвертый уровень</a:t>
             </a:r>
-            <a:endParaRPr lang="ru-RU"/>
           </a:p>
           <a:p>
             <a:pPr lvl="4"/>
@@ -1647,6 +1646,7 @@
           <a:p>
             <a:fld id="{42B60939-686C-479D-AFE8-70FB7B5470C6}" type="datetime1">
               <a:rPr lang="en-US" smtClean="0"/>
+              <a:t>5/25/2026</a:t>
             </a:fld>
             <a:endParaRPr lang="en-US"/>
           </a:p>
@@ -1688,6 +1688,7 @@
           <a:p>
             <a:fld id="{39D93D24-9446-4BD4-975C-09DCDF7E2057}" type="slidenum">
               <a:rPr lang="en-US" smtClean="0"/>
+              <a:t>‹#›</a:t>
             </a:fld>
             <a:endParaRPr lang="en-US"/>
           </a:p>
@@ -1808,7 +1809,6 @@
               <a:rPr lang="ru-RU"/>
               <a:t>Образец текста</a:t>
             </a:r>
-            <a:endParaRPr lang="ru-RU"/>
           </a:p>
         </p:txBody>
       </p:sp>
@@ -1837,7 +1837,6 @@
               <a:rPr lang="ru-RU"/>
               <a:t>Образец текста</a:t>
             </a:r>
-            <a:endParaRPr lang="ru-RU"/>
           </a:p>
           <a:p>
             <a:pPr lvl="1"/>
@@ -1845,7 +1844,6 @@
               <a:rPr lang="ru-RU"/>
               <a:t>Второй уровень</a:t>
             </a:r>
-            <a:endParaRPr lang="ru-RU"/>
           </a:p>
           <a:p>
             <a:pPr lvl="2"/>
@@ -1853,7 +1851,6 @@
               <a:rPr lang="ru-RU"/>
               <a:t>Третий уровень</a:t>
             </a:r>
-            <a:endParaRPr lang="ru-RU"/>
           </a:p>
           <a:p>
             <a:pPr lvl="3"/>
@@ -1861,7 +1858,6 @@
               <a:rPr lang="ru-RU"/>
               <a:t>Четвертый уровень</a:t>
             </a:r>
-            <a:endParaRPr lang="ru-RU"/>
           </a:p>
           <a:p>
             <a:pPr lvl="4"/>
@@ -1935,7 +1931,6 @@
               <a:rPr lang="ru-RU"/>
               <a:t>Образец текста</a:t>
             </a:r>
-            <a:endParaRPr lang="ru-RU"/>
           </a:p>
         </p:txBody>
       </p:sp>
@@ -1964,7 +1959,6 @@
               <a:rPr lang="ru-RU"/>
               <a:t>Образец текста</a:t>
             </a:r>
-            <a:endParaRPr lang="ru-RU"/>
           </a:p>
           <a:p>
             <a:pPr lvl="1"/>
@@ -1972,7 +1966,6 @@
               <a:rPr lang="ru-RU"/>
               <a:t>Второй уровень</a:t>
             </a:r>
-            <a:endParaRPr lang="ru-RU"/>
           </a:p>
           <a:p>
             <a:pPr lvl="2"/>
@@ -1980,7 +1973,6 @@
               <a:rPr lang="ru-RU"/>
               <a:t>Третий уровень</a:t>
             </a:r>
-            <a:endParaRPr lang="ru-RU"/>
           </a:p>
           <a:p>
             <a:pPr lvl="3"/>
@@ -1988,7 +1980,6 @@
               <a:rPr lang="ru-RU"/>
               <a:t>Четвертый уровень</a:t>
             </a:r>
-            <a:endParaRPr lang="ru-RU"/>
           </a:p>
           <a:p>
             <a:pPr lvl="4"/>
@@ -2017,6 +2008,7 @@
           <a:p>
             <a:fld id="{5D1B2C66-1229-40FD-AD20-409E946D1EFB}" type="datetime1">
               <a:rPr lang="en-US" smtClean="0"/>
+              <a:t>5/25/2026</a:t>
             </a:fld>
             <a:endParaRPr lang="en-US"/>
           </a:p>
@@ -2058,6 +2050,7 @@
           <a:p>
             <a:fld id="{39D93D24-9446-4BD4-975C-09DCDF7E2057}" type="slidenum">
               <a:rPr lang="en-US" smtClean="0"/>
+              <a:t>‹#›</a:t>
             </a:fld>
             <a:endParaRPr lang="en-US"/>
           </a:p>
@@ -2128,6 +2121,7 @@
           <a:p>
             <a:fld id="{BCB0ECC4-00A1-4167-A353-C60DC9153C89}" type="datetime1">
               <a:rPr lang="en-US" smtClean="0"/>
+              <a:t>5/25/2026</a:t>
             </a:fld>
             <a:endParaRPr lang="en-US"/>
           </a:p>
@@ -2169,6 +2163,7 @@
           <a:p>
             <a:fld id="{39D93D24-9446-4BD4-975C-09DCDF7E2057}" type="slidenum">
               <a:rPr lang="en-US" smtClean="0"/>
+              <a:t>‹#›</a:t>
             </a:fld>
             <a:endParaRPr lang="en-US"/>
           </a:p>
@@ -2216,6 +2211,7 @@
           <a:p>
             <a:fld id="{C918EC25-9B44-4513-B83C-731E1DF7EE1E}" type="datetime1">
               <a:rPr lang="en-US" smtClean="0"/>
+              <a:t>5/25/2026</a:t>
             </a:fld>
             <a:endParaRPr lang="en-US"/>
           </a:p>
@@ -2257,6 +2253,7 @@
           <a:p>
             <a:fld id="{39D93D24-9446-4BD4-975C-09DCDF7E2057}" type="slidenum">
               <a:rPr lang="en-US" smtClean="0"/>
+              <a:t>‹#›</a:t>
             </a:fld>
             <a:endParaRPr lang="en-US"/>
           </a:p>
@@ -2372,7 +2369,6 @@
               <a:rPr lang="ru-RU"/>
               <a:t>Образец текста</a:t>
             </a:r>
-            <a:endParaRPr lang="ru-RU"/>
           </a:p>
           <a:p>
             <a:pPr lvl="1"/>
@@ -2380,7 +2376,6 @@
               <a:rPr lang="ru-RU"/>
               <a:t>Второй уровень</a:t>
             </a:r>
-            <a:endParaRPr lang="ru-RU"/>
           </a:p>
           <a:p>
             <a:pPr lvl="2"/>
@@ -2388,7 +2383,6 @@
               <a:rPr lang="ru-RU"/>
               <a:t>Третий уровень</a:t>
             </a:r>
-            <a:endParaRPr lang="ru-RU"/>
           </a:p>
           <a:p>
             <a:pPr lvl="3"/>
@@ -2396,7 +2390,6 @@
               <a:rPr lang="ru-RU"/>
               <a:t>Четвертый уровень</a:t>
             </a:r>
-            <a:endParaRPr lang="ru-RU"/>
           </a:p>
           <a:p>
             <a:pPr lvl="4"/>
@@ -2470,7 +2463,6 @@
               <a:rPr lang="ru-RU"/>
               <a:t>Образец текста</a:t>
             </a:r>
-            <a:endParaRPr lang="ru-RU"/>
           </a:p>
         </p:txBody>
       </p:sp>
@@ -2491,6 +2483,7 @@
           <a:p>
             <a:fld id="{A5CE191C-7F42-454F-981D-7608BB1425BD}" type="datetime1">
               <a:rPr lang="en-US" smtClean="0"/>
+              <a:t>5/25/2026</a:t>
             </a:fld>
             <a:endParaRPr lang="en-US"/>
           </a:p>
@@ -2532,6 +2525,7 @@
           <a:p>
             <a:fld id="{39D93D24-9446-4BD4-975C-09DCDF7E2057}" type="slidenum">
               <a:rPr lang="en-US" smtClean="0"/>
+              <a:t>‹#›</a:t>
             </a:fld>
             <a:endParaRPr lang="en-US"/>
           </a:p>
@@ -2717,7 +2711,6 @@
               <a:rPr lang="ru-RU"/>
               <a:t>Образец текста</a:t>
             </a:r>
-            <a:endParaRPr lang="ru-RU"/>
           </a:p>
         </p:txBody>
       </p:sp>
@@ -2738,6 +2731,7 @@
           <a:p>
             <a:fld id="{A33477AD-DDFE-411A-9C3A-6AEEBBEF769B}" type="datetime1">
               <a:rPr lang="en-US" smtClean="0"/>
+              <a:t>5/25/2026</a:t>
             </a:fld>
             <a:endParaRPr lang="en-US"/>
           </a:p>
@@ -2779,6 +2773,7 @@
           <a:p>
             <a:fld id="{39D93D24-9446-4BD4-975C-09DCDF7E2057}" type="slidenum">
               <a:rPr lang="en-US" smtClean="0"/>
+              <a:t>‹#›</a:t>
             </a:fld>
             <a:endParaRPr lang="en-US"/>
           </a:p>
@@ -2877,7 +2872,6 @@
               <a:rPr lang="ru-RU" dirty="0"/>
               <a:t>Образец текста</a:t>
             </a:r>
-            <a:endParaRPr lang="ru-RU" dirty="0"/>
           </a:p>
           <a:p>
             <a:pPr lvl="1"/>
@@ -2885,7 +2879,6 @@
               <a:rPr lang="ru-RU" dirty="0"/>
               <a:t>Второй уровень</a:t>
             </a:r>
-            <a:endParaRPr lang="ru-RU" dirty="0"/>
           </a:p>
           <a:p>
             <a:pPr lvl="2"/>
@@ -2893,7 +2886,6 @@
               <a:rPr lang="ru-RU" dirty="0"/>
               <a:t>Третий уровень</a:t>
             </a:r>
-            <a:endParaRPr lang="ru-RU" dirty="0"/>
           </a:p>
           <a:p>
             <a:pPr lvl="3"/>
@@ -2901,7 +2893,6 @@
               <a:rPr lang="ru-RU" dirty="0"/>
               <a:t>Четвертый уровень</a:t>
             </a:r>
-            <a:endParaRPr lang="ru-RU" dirty="0"/>
           </a:p>
           <a:p>
             <a:pPr lvl="4"/>
@@ -2950,6 +2941,7 @@
           <a:p>
             <a:fld id="{2713C367-EA95-4C52-817B-FE24C877FAE9}" type="datetime1">
               <a:rPr lang="en-US" smtClean="0"/>
+              <a:t>5/25/2026</a:t>
             </a:fld>
             <a:endParaRPr lang="en-US" dirty="0"/>
           </a:p>
@@ -3031,6 +3023,7 @@
           <a:p>
             <a:fld id="{39D93D24-9446-4BD4-975C-09DCDF7E2057}" type="slidenum">
               <a:rPr lang="en-US" smtClean="0"/>
+              <a:t>‹#›</a:t>
             </a:fld>
             <a:endParaRPr lang="en-US" dirty="0"/>
           </a:p>
@@ -3045,7 +3038,7 @@
           <p:nvPr userDrawn="1"/>
         </p:nvPicPr>
         <p:blipFill>
-          <a:blip r:embed="rId12">
+          <a:blip r:embed="rId13" cstate="print">
             <a:extLst>
               <a:ext uri="{28A0092B-C50C-407E-A947-70E740481C1C}">
                 <a14:useLocalDpi xmlns:a14="http://schemas.microsoft.com/office/drawing/2010/main" val="0"/>
@@ -3449,7 +3442,6 @@
               <a:rPr lang="ru-RU" sz="1800" dirty="0"/>
               <a:t>Направление подготовки: 03.03.01 Прикладные математика и физика</a:t>
             </a:r>
-            <a:endParaRPr lang="ru-RU" sz="1800" dirty="0"/>
           </a:p>
           <a:p>
             <a:pPr algn="r">
@@ -3461,7 +3453,6 @@
               <a:rPr lang="ru-RU" sz="1800" dirty="0"/>
               <a:t>Студент: Черных Владимир Владимирович</a:t>
             </a:r>
-            <a:endParaRPr lang="ru-RU" sz="1800" dirty="0"/>
           </a:p>
           <a:p>
             <a:pPr algn="r"/>
@@ -3503,10 +3494,6 @@
               </a:rPr>
               <a:t>Кафедра аэрофизики и летательных аппаратов ПИШ ФАЛТ МФТИ</a:t>
             </a:r>
-            <a:endParaRPr lang="ru-RU" sz="1600" dirty="0">
-              <a:latin typeface="Segoe UI" panose="020B0502040204020203" pitchFamily="34" charset="0"/>
-              <a:cs typeface="Segoe UI" panose="020B0502040204020203" pitchFamily="34" charset="0"/>
-            </a:endParaRPr>
           </a:p>
           <a:p>
             <a:pPr algn="ctr"/>
@@ -3565,10 +3552,9 @@
           <a:lstStyle/>
           <a:p>
             <a:r>
-              <a:rPr lang="ru-RU" dirty="0"/>
-              <a:t>Метод сопряженных градиентов</a:t>
-            </a:r>
-            <a:endParaRPr lang="en-US" dirty="0"/>
+              <a:rPr lang="en-US" dirty="0"/>
+              <a:t>Efficient global optimisation  </a:t>
+            </a:r>
           </a:p>
         </p:txBody>
       </p:sp>
@@ -3589,71 +3575,59 @@
           </a:xfrm>
         </p:spPr>
         <p:txBody>
-          <a:bodyPr/>
-          <a:lstStyle/>
-          <a:p>
-            <a:r>
-              <a:rPr lang="en-US" dirty="0"/>
-              <a:t>CG</a:t>
-            </a:r>
+          <a:bodyPr>
+            <a:normAutofit lnSpcReduction="10000"/>
+          </a:bodyPr>
+          <a:lstStyle/>
+          <a:p>
+            <a:r>
+              <a:rPr lang="ru-RU" dirty="0"/>
+              <a:t>Метод, основанный на суррогатном моделировании </a:t>
+            </a:r>
+          </a:p>
+          <a:p>
             <a:r>
               <a:rPr lang="ru-RU" altLang="en-US" dirty="0"/>
-              <a:t>: быстрый локальный метод </a:t>
+              <a:t>Ставит проблему нефизичных геометрий </a:t>
+            </a:r>
+          </a:p>
+          <a:p>
+            <a:r>
+              <a:rPr lang="ru-RU" altLang="en-US" dirty="0"/>
+              <a:t>Для борьбы предложено использовать штраф: </a:t>
+            </a:r>
+            <a:r>
+              <a:rPr lang="en-US" altLang="en-US" dirty="0"/>
+              <a:t>L2-</a:t>
+            </a:r>
+            <a:r>
+              <a:rPr lang="ru-RU" altLang="en-US" dirty="0"/>
+              <a:t>норму расстояния в пространстве параметров до физичного профиля</a:t>
+            </a:r>
+          </a:p>
+          <a:p>
+            <a:r>
+              <a:rPr lang="ru-RU" altLang="en-US" dirty="0"/>
+              <a:t>При построении первичной модели необходимо достаточно </a:t>
+            </a:r>
+            <a:r>
+              <a:rPr lang="en-US" altLang="ru-RU" dirty="0"/>
+              <a:t>(N(N+1), 10*N) </a:t>
+            </a:r>
+            <a:r>
+              <a:rPr lang="ru-RU" altLang="ru-RU" dirty="0"/>
+              <a:t>физичных точек</a:t>
             </a:r>
             <a:endParaRPr lang="ru-RU" altLang="en-US" dirty="0"/>
           </a:p>
           <a:p>
-            <a:r>
-              <a:rPr lang="ru-RU" dirty="0"/>
-              <a:t>Для численного вычисления</a:t>
-            </a:r>
+            <a:pPr marL="0" indent="0">
+              <a:buNone/>
+            </a:pPr>
             <a:r>
               <a:rPr lang="ru-RU" altLang="en-US" dirty="0"/>
-              <a:t> градиента определен шаг по нормализованной переменной, равный 0.005</a:t>
-            </a:r>
-            <a:endParaRPr lang="ru-RU" altLang="en-US" dirty="0"/>
-          </a:p>
-          <a:p>
-            <a:r>
-              <a:rPr lang="ru-RU" altLang="en-US" dirty="0"/>
-              <a:t>При </a:t>
-            </a:r>
-            <a:r>
-              <a:rPr lang="en-US" altLang="en-US" dirty="0"/>
-              <a:t>N = 3 </a:t>
-            </a:r>
-            <a:r>
-              <a:rPr lang="ru-RU" altLang="en-US" dirty="0"/>
-              <a:t>получен </a:t>
-            </a:r>
-            <a:r>
-              <a:rPr lang="en-US" altLang="en-US" dirty="0"/>
-              <a:t>Cxa = 0.</a:t>
-            </a:r>
-            <a:r>
-              <a:rPr lang="ru-RU" altLang="en-US" dirty="0"/>
-              <a:t>00964</a:t>
-            </a:r>
-            <a:endParaRPr lang="ru-RU" altLang="en-US" dirty="0"/>
-          </a:p>
-          <a:p>
-            <a:r>
-              <a:rPr lang="ru-RU" altLang="en-US" dirty="0"/>
-              <a:t>Штрафная функция на толщину показывает результат хуже, чем вытягивание профиля до нужной толщины </a:t>
-            </a:r>
-            <a:endParaRPr lang="ru-RU" altLang="en-US" dirty="0"/>
-          </a:p>
-          <a:p>
-            <a:r>
-              <a:rPr lang="ru-RU" altLang="en-US" dirty="0"/>
-              <a:t>Вытягивание создает локальные минимумы </a:t>
-            </a:r>
-            <a:endParaRPr lang="ru-RU" altLang="en-US" dirty="0"/>
-          </a:p>
-          <a:p>
-            <a:pPr marL="0" indent="0">
-              <a:buNone/>
-            </a:pPr>
+              <a:t>Основной проблемой было то, что алгоритм находил суперкритический профиль, но не делал его достаточно тонким</a:t>
+            </a:r>
             <a:endParaRPr lang="ru-RU" dirty="0"/>
           </a:p>
         </p:txBody>
@@ -3675,11 +3649,84 @@
           <a:p>
             <a:fld id="{39D93D24-9446-4BD4-975C-09DCDF7E2057}" type="slidenum">
               <a:rPr lang="en-US" smtClean="0"/>
+              <a:t>10</a:t>
             </a:fld>
             <a:endParaRPr lang="en-US"/>
           </a:p>
         </p:txBody>
       </p:sp>
+      <p:pic>
+        <p:nvPicPr>
+          <p:cNvPr id="6" name="Picture 5">
+            <a:extLst>
+              <a:ext uri="{FF2B5EF4-FFF2-40B4-BE49-F238E27FC236}">
+                <a16:creationId xmlns:a16="http://schemas.microsoft.com/office/drawing/2014/main" id="{B2C8D730-CE60-8B76-1B8B-B58445932932}"/>
+              </a:ext>
+            </a:extLst>
+          </p:cNvPr>
+          <p:cNvPicPr>
+            <a:picLocks noChangeAspect="1"/>
+          </p:cNvPicPr>
+          <p:nvPr/>
+        </p:nvPicPr>
+        <p:blipFill>
+          <a:blip r:embed="rId2">
+            <a:extLst>
+              <a:ext uri="{28A0092B-C50C-407E-A947-70E740481C1C}">
+                <a14:useLocalDpi xmlns:a14="http://schemas.microsoft.com/office/drawing/2010/main" val="0"/>
+              </a:ext>
+            </a:extLst>
+          </a:blip>
+          <a:stretch>
+            <a:fillRect/>
+          </a:stretch>
+        </p:blipFill>
+        <p:spPr>
+          <a:xfrm>
+            <a:off x="7080251" y="1087436"/>
+            <a:ext cx="4362450" cy="2617471"/>
+          </a:xfrm>
+          <a:prstGeom prst="rect">
+            <a:avLst/>
+          </a:prstGeom>
+        </p:spPr>
+      </p:pic>
+      <p:pic>
+        <p:nvPicPr>
+          <p:cNvPr id="8" name="Picture 7">
+            <a:extLst>
+              <a:ext uri="{FF2B5EF4-FFF2-40B4-BE49-F238E27FC236}">
+                <a16:creationId xmlns:a16="http://schemas.microsoft.com/office/drawing/2014/main" id="{917FB563-30E3-48F3-1D93-4F70F4C582F0}"/>
+              </a:ext>
+            </a:extLst>
+          </p:cNvPr>
+          <p:cNvPicPr>
+            <a:picLocks noChangeAspect="1"/>
+          </p:cNvPicPr>
+          <p:nvPr/>
+        </p:nvPicPr>
+        <p:blipFill>
+          <a:blip r:embed="rId3">
+            <a:extLst>
+              <a:ext uri="{28A0092B-C50C-407E-A947-70E740481C1C}">
+                <a14:useLocalDpi xmlns:a14="http://schemas.microsoft.com/office/drawing/2010/main" val="0"/>
+              </a:ext>
+            </a:extLst>
+          </a:blip>
+          <a:stretch>
+            <a:fillRect/>
+          </a:stretch>
+        </p:blipFill>
+        <p:spPr>
+          <a:xfrm>
+            <a:off x="7080251" y="3704907"/>
+            <a:ext cx="4362452" cy="2617472"/>
+          </a:xfrm>
+          <a:prstGeom prst="rect">
+            <a:avLst/>
+          </a:prstGeom>
+        </p:spPr>
+      </p:pic>
     </p:spTree>
   </p:cSld>
   <p:clrMapOvr>
@@ -3721,10 +3768,9 @@
           <a:lstStyle/>
           <a:p>
             <a:r>
-              <a:rPr lang="en-US" dirty="0"/>
-              <a:t>Efficient global optimisation  </a:t>
-            </a:r>
-            <a:endParaRPr lang="en-US" dirty="0"/>
+              <a:rPr lang="ru-RU" altLang="en-US" dirty="0"/>
+              <a:t>Модификация параметризации</a:t>
+            </a:r>
           </a:p>
         </p:txBody>
       </p:sp>
@@ -3746,62 +3792,43 @@
         </p:spPr>
         <p:txBody>
           <a:bodyPr>
-            <a:normAutofit lnSpcReduction="10000"/>
+            <a:normAutofit/>
           </a:bodyPr>
           <a:lstStyle/>
           <a:p>
             <a:r>
               <a:rPr lang="ru-RU" dirty="0"/>
-              <a:t>Метод, основанный на суррогатном моделировании </a:t>
+              <a:t>Предлагается использовать </a:t>
+            </a:r>
+            <a:r>
+              <a:rPr lang="en-US" altLang="ru-RU" dirty="0"/>
+              <a:t>2N </a:t>
+            </a:r>
+            <a:r>
+              <a:rPr lang="ru-RU" altLang="ru-RU" dirty="0"/>
+              <a:t>параметров, вариацией точки на верхней или нижней поверхности добиваясь нужной толщины</a:t>
             </a:r>
             <a:endParaRPr lang="ru-RU" dirty="0"/>
           </a:p>
           <a:p>
             <a:r>
               <a:rPr lang="ru-RU" altLang="en-US" dirty="0"/>
-              <a:t>Ставит проблему нефизичных геометрий </a:t>
-            </a:r>
-            <a:endParaRPr lang="ru-RU" altLang="en-US" dirty="0"/>
-          </a:p>
-          <a:p>
+              <a:t>Для </a:t>
+            </a:r>
+            <a:r>
+              <a:rPr lang="en-US" altLang="en-US" dirty="0"/>
+              <a:t>EGO </a:t>
+            </a:r>
             <a:r>
               <a:rPr lang="ru-RU" altLang="en-US" dirty="0"/>
-              <a:t>Для борьбы предложено использовать штраф: </a:t>
-            </a:r>
-            <a:r>
-              <a:rPr lang="en-US" altLang="en-US" dirty="0"/>
-              <a:t>L2-</a:t>
-            </a:r>
-            <a:r>
-              <a:rPr lang="ru-RU" altLang="en-US" dirty="0"/>
-              <a:t>норму расстояния в пространстве параметров до физичного профиля</a:t>
-            </a:r>
-            <a:endParaRPr lang="ru-RU" altLang="en-US" dirty="0"/>
-          </a:p>
-          <a:p>
-            <a:r>
-              <a:rPr lang="ru-RU" altLang="en-US" dirty="0"/>
-              <a:t>При построении первичной модели необходимо достаточно </a:t>
-            </a:r>
-            <a:r>
-              <a:rPr lang="en-US" altLang="ru-RU" dirty="0"/>
-              <a:t>(N(N+1), 10*N) </a:t>
-            </a:r>
-            <a:r>
-              <a:rPr lang="ru-RU" altLang="ru-RU" dirty="0"/>
-              <a:t>физичных точек</a:t>
-            </a:r>
-            <a:endParaRPr lang="ru-RU" altLang="en-US" dirty="0"/>
-          </a:p>
-          <a:p>
-            <a:pPr marL="0" indent="0">
-              <a:buNone/>
-            </a:pPr>
-            <a:r>
-              <a:rPr lang="ru-RU" altLang="en-US" dirty="0"/>
-              <a:t>Основной проблемой было то, что алгоритм находил суперкритический профиль, но не делал его достаточно тонким</a:t>
-            </a:r>
-            <a:endParaRPr lang="ru-RU" dirty="0"/>
+              <a:t>данный способ на 6% улучшил результат при сравнительном времени работы </a:t>
+            </a:r>
+          </a:p>
+          <a:p>
+            <a:r>
+              <a:rPr lang="ru-RU" dirty="0"/>
+              <a:t>Вопрос выбора конкретной точки и влияния на другие методы изучается сейчас</a:t>
+            </a:r>
           </a:p>
         </p:txBody>
       </p:sp>
@@ -3822,11 +3849,84 @@
           <a:p>
             <a:fld id="{39D93D24-9446-4BD4-975C-09DCDF7E2057}" type="slidenum">
               <a:rPr lang="en-US" smtClean="0"/>
+              <a:t>11</a:t>
             </a:fld>
             <a:endParaRPr lang="en-US"/>
           </a:p>
         </p:txBody>
       </p:sp>
+      <p:pic>
+        <p:nvPicPr>
+          <p:cNvPr id="6" name="Picture 5">
+            <a:extLst>
+              <a:ext uri="{FF2B5EF4-FFF2-40B4-BE49-F238E27FC236}">
+                <a16:creationId xmlns:a16="http://schemas.microsoft.com/office/drawing/2014/main" id="{CED0B779-6417-B75C-65D9-B54B103D5EA6}"/>
+              </a:ext>
+            </a:extLst>
+          </p:cNvPr>
+          <p:cNvPicPr>
+            <a:picLocks noChangeAspect="1"/>
+          </p:cNvPicPr>
+          <p:nvPr/>
+        </p:nvPicPr>
+        <p:blipFill>
+          <a:blip r:embed="rId2">
+            <a:extLst>
+              <a:ext uri="{28A0092B-C50C-407E-A947-70E740481C1C}">
+                <a14:useLocalDpi xmlns:a14="http://schemas.microsoft.com/office/drawing/2010/main" val="0"/>
+              </a:ext>
+            </a:extLst>
+          </a:blip>
+          <a:stretch>
+            <a:fillRect/>
+          </a:stretch>
+        </p:blipFill>
+        <p:spPr>
+          <a:xfrm>
+            <a:off x="7048501" y="1266190"/>
+            <a:ext cx="4305299" cy="2583180"/>
+          </a:xfrm>
+          <a:prstGeom prst="rect">
+            <a:avLst/>
+          </a:prstGeom>
+        </p:spPr>
+      </p:pic>
+      <p:pic>
+        <p:nvPicPr>
+          <p:cNvPr id="8" name="Picture 7">
+            <a:extLst>
+              <a:ext uri="{FF2B5EF4-FFF2-40B4-BE49-F238E27FC236}">
+                <a16:creationId xmlns:a16="http://schemas.microsoft.com/office/drawing/2014/main" id="{22F935C2-A3FB-0D09-B3D8-AEEBD939E4D9}"/>
+              </a:ext>
+            </a:extLst>
+          </p:cNvPr>
+          <p:cNvPicPr>
+            <a:picLocks noChangeAspect="1"/>
+          </p:cNvPicPr>
+          <p:nvPr/>
+        </p:nvPicPr>
+        <p:blipFill>
+          <a:blip r:embed="rId3">
+            <a:extLst>
+              <a:ext uri="{28A0092B-C50C-407E-A947-70E740481C1C}">
+                <a14:useLocalDpi xmlns:a14="http://schemas.microsoft.com/office/drawing/2010/main" val="0"/>
+              </a:ext>
+            </a:extLst>
+          </a:blip>
+          <a:stretch>
+            <a:fillRect/>
+          </a:stretch>
+        </p:blipFill>
+        <p:spPr>
+          <a:xfrm>
+            <a:off x="6810495" y="3968835"/>
+            <a:ext cx="4543305" cy="2752640"/>
+          </a:xfrm>
+          <a:prstGeom prst="rect">
+            <a:avLst/>
+          </a:prstGeom>
+        </p:spPr>
+      </p:pic>
     </p:spTree>
   </p:cSld>
   <p:clrMapOvr>
@@ -3869,9 +3969,8 @@
           <a:p>
             <a:r>
               <a:rPr lang="ru-RU" altLang="en-US" dirty="0"/>
-              <a:t>Модификация параметризации</a:t>
-            </a:r>
-            <a:endParaRPr lang="ru-RU" altLang="en-US" dirty="0"/>
+              <a:t>Гибридный метод </a:t>
+            </a:r>
           </a:p>
         </p:txBody>
       </p:sp>
@@ -3893,45 +3992,59 @@
         </p:spPr>
         <p:txBody>
           <a:bodyPr>
-            <a:normAutofit lnSpcReduction="20000"/>
+            <a:normAutofit/>
           </a:bodyPr>
           <a:lstStyle/>
           <a:p>
             <a:r>
               <a:rPr lang="ru-RU" dirty="0"/>
-              <a:t>Предлагается использовать </a:t>
-            </a:r>
+              <a:t>Наилучшего результата удалось достичь при последовательном использовании нескольких методов: </a:t>
+            </a:r>
+            <a:r>
+              <a:rPr lang="en-US" dirty="0"/>
+              <a:t>EGO, CG, MADS</a:t>
+            </a:r>
+          </a:p>
+          <a:p>
+            <a:r>
+              <a:rPr lang="en-US" dirty="0"/>
+              <a:t>C</a:t>
+            </a:r>
+            <a:r>
+              <a:rPr lang="en-US" baseline="-25000" dirty="0"/>
+              <a:t>xa</a:t>
+            </a:r>
+            <a:r>
+              <a:rPr lang="en-US" dirty="0"/>
+              <a:t> = 0.0096</a:t>
+            </a:r>
+            <a:r>
+              <a:rPr lang="ru-RU" dirty="0"/>
+              <a:t>2</a:t>
+            </a:r>
+            <a:endParaRPr lang="ru-RU" altLang="en-US" dirty="0"/>
+          </a:p>
+          <a:p>
             <a:r>
               <a:rPr lang="en-US" altLang="ru-RU" dirty="0"/>
-              <a:t>2N </a:t>
-            </a:r>
-            <a:r>
-              <a:rPr lang="ru-RU" altLang="ru-RU" dirty="0"/>
-              <a:t>параметров, вариацией точки на верхней или нижней поверхности добиваясь нужной толщины</a:t>
-            </a:r>
-            <a:endParaRPr lang="ru-RU" dirty="0"/>
-          </a:p>
-          <a:p>
+              <a:t>MADS </a:t>
+            </a:r>
             <a:r>
               <a:rPr lang="ru-RU" altLang="en-US" dirty="0"/>
-              <a:t>Для </a:t>
-            </a:r>
-            <a:r>
-              <a:rPr lang="en-US" altLang="en-US" dirty="0"/>
-              <a:t>EGO </a:t>
-            </a:r>
-            <a:r>
-              <a:rPr lang="ru-RU" altLang="en-US" dirty="0"/>
-              <a:t>данный способ на 6% улучшил результат при сравнительном времени работы </a:t>
-            </a:r>
+              <a:t>применяется на конечном этапе в условиях сильного шума около оптимума</a:t>
+            </a:r>
+          </a:p>
+          <a:p>
+            <a:pPr marL="0" indent="0">
+              <a:buNone/>
+            </a:pPr>
             <a:endParaRPr lang="ru-RU" altLang="en-US" dirty="0"/>
           </a:p>
           <a:p>
-            <a:r>
-              <a:rPr lang="ru-RU" dirty="0"/>
-              <a:t>Вопрос выбора конкретной точки и влияния на другие методы изучается сейчас</a:t>
-            </a:r>
-            <a:endParaRPr lang="ru-RU" dirty="0"/>
+            <a:pPr marL="0" indent="0">
+              <a:buNone/>
+            </a:pPr>
+            <a:endParaRPr lang="ru-RU" altLang="en-US" dirty="0"/>
           </a:p>
         </p:txBody>
       </p:sp>
@@ -3952,11 +4065,42 @@
           <a:p>
             <a:fld id="{39D93D24-9446-4BD4-975C-09DCDF7E2057}" type="slidenum">
               <a:rPr lang="en-US" smtClean="0"/>
+              <a:t>12</a:t>
             </a:fld>
             <a:endParaRPr lang="en-US"/>
           </a:p>
         </p:txBody>
       </p:sp>
+      <p:pic>
+        <p:nvPicPr>
+          <p:cNvPr id="10" name="Picture 9">
+            <a:extLst>
+              <a:ext uri="{FF2B5EF4-FFF2-40B4-BE49-F238E27FC236}">
+                <a16:creationId xmlns:a16="http://schemas.microsoft.com/office/drawing/2014/main" id="{4C8C1A8F-63A4-6745-2DE1-9FE8EAAFA3F1}"/>
+              </a:ext>
+            </a:extLst>
+          </p:cNvPr>
+          <p:cNvPicPr>
+            <a:picLocks noChangeAspect="1"/>
+          </p:cNvPicPr>
+          <p:nvPr/>
+        </p:nvPicPr>
+        <p:blipFill>
+          <a:blip r:embed="rId2"/>
+          <a:stretch>
+            <a:fillRect/>
+          </a:stretch>
+        </p:blipFill>
+        <p:spPr>
+          <a:xfrm>
+            <a:off x="6391275" y="1690688"/>
+            <a:ext cx="5251585" cy="3381973"/>
+          </a:xfrm>
+          <a:prstGeom prst="rect">
+            <a:avLst/>
+          </a:prstGeom>
+        </p:spPr>
+      </p:pic>
     </p:spTree>
   </p:cSld>
   <p:clrMapOvr>
@@ -3998,82 +4142,95 @@
           <a:lstStyle/>
           <a:p>
             <a:r>
+              <a:rPr lang="ru-RU" dirty="0"/>
+              <a:t>Заключение</a:t>
+            </a:r>
+            <a:endParaRPr lang="en-US" dirty="0"/>
+          </a:p>
+        </p:txBody>
+      </p:sp>
+      <p:sp>
+        <p:nvSpPr>
+          <p:cNvPr id="3" name="Объект 2"/>
+          <p:cNvSpPr>
+            <a:spLocks noGrp="1"/>
+          </p:cNvSpPr>
+          <p:nvPr>
+            <p:ph idx="1"/>
+          </p:nvPr>
+        </p:nvSpPr>
+        <p:spPr/>
+        <p:txBody>
+          <a:bodyPr>
+            <a:normAutofit fontScale="97500" lnSpcReduction="10000"/>
+          </a:bodyPr>
+          <a:lstStyle/>
+          <a:p>
+            <a:r>
+              <a:rPr lang="ru-RU" dirty="0"/>
+              <a:t>Создан программный комплекс для оптимизации формы летательного аппарата на основе </a:t>
+            </a:r>
+            <a:r>
+              <a:rPr lang="en-US" dirty="0"/>
+              <a:t>CFD </a:t>
+            </a:r>
+            <a:r>
               <a:rPr lang="ru-RU" altLang="en-US" dirty="0"/>
-              <a:t>Гибридный метод </a:t>
-            </a:r>
-            <a:endParaRPr lang="ru-RU" altLang="en-US" dirty="0"/>
-          </a:p>
-        </p:txBody>
-      </p:sp>
-      <p:sp>
-        <p:nvSpPr>
-          <p:cNvPr id="3" name="Объект 2"/>
-          <p:cNvSpPr>
-            <a:spLocks noGrp="1"/>
-          </p:cNvSpPr>
-          <p:nvPr>
-            <p:ph sz="half" idx="1"/>
-          </p:nvPr>
-        </p:nvSpPr>
-        <p:spPr>
-          <a:xfrm>
-            <a:off x="838200" y="1825625"/>
-            <a:ext cx="5553075" cy="4351655"/>
-          </a:xfrm>
-        </p:spPr>
-        <p:txBody>
-          <a:bodyPr>
-            <a:normAutofit lnSpcReduction="20000"/>
-          </a:bodyPr>
-          <a:lstStyle/>
-          <a:p>
-            <a:r>
-              <a:rPr lang="ru-RU" dirty="0"/>
-              <a:t>Наилучшего результата удалось достичь при последовательном использовании нескольких методов: </a:t>
-            </a:r>
-            <a:r>
-              <a:rPr lang="en-US" dirty="0"/>
-              <a:t>EGO, CG, MADS</a:t>
+              <a:t>расчетов</a:t>
+            </a:r>
+            <a:endParaRPr lang="ru-RU" dirty="0"/>
+          </a:p>
+          <a:p>
+            <a:r>
+              <a:rPr lang="ru-RU" dirty="0"/>
+              <a:t>Проведена апробация на примере профильной задачи</a:t>
+            </a:r>
+          </a:p>
+          <a:p>
+            <a:r>
+              <a:rPr lang="ru-RU" dirty="0"/>
+              <a:t>В предложенной модифицированной параметризации для достижения результата в пределах точности метода достаточно 6 параметров</a:t>
+            </a:r>
+          </a:p>
+          <a:p>
+            <a:r>
+              <a:rPr lang="ru-RU" dirty="0"/>
+              <a:t>Предложено использовать гибридный метод, включающий в себя последовательное переключение между методами </a:t>
             </a:r>
             <a:endParaRPr lang="en-US" dirty="0"/>
           </a:p>
           <a:p>
             <a:r>
-              <a:rPr lang="en-US" dirty="0"/>
-              <a:t>C</a:t>
-            </a:r>
-            <a:r>
-              <a:rPr lang="en-US" baseline="-25000" dirty="0"/>
-              <a:t>xa</a:t>
-            </a:r>
-            <a:r>
-              <a:rPr lang="en-US" dirty="0"/>
-              <a:t> = 0.0096</a:t>
-            </a:r>
-            <a:endParaRPr lang="ru-RU" altLang="en-US" dirty="0"/>
-          </a:p>
-          <a:p>
-            <a:r>
-              <a:rPr lang="en-US" altLang="ru-RU" dirty="0"/>
-              <a:t>MADS </a:t>
-            </a:r>
-            <a:r>
-              <a:rPr lang="ru-RU" altLang="en-US" dirty="0"/>
-              <a:t>применяется на конечном этапе в условиях сильного шума около оптимума</a:t>
-            </a:r>
-            <a:endParaRPr lang="ru-RU" altLang="en-US" dirty="0"/>
+              <a:rPr lang="ru-RU" dirty="0"/>
+              <a:t>Возможные направления развития:</a:t>
+            </a:r>
           </a:p>
           <a:p>
             <a:pPr marL="0" indent="0">
               <a:buNone/>
             </a:pPr>
-            <a:endParaRPr lang="ru-RU" altLang="en-US" dirty="0"/>
+            <a:r>
+              <a:rPr lang="ru-RU" dirty="0"/>
+              <a:t>	1) Решение трехмерной задачи </a:t>
+            </a:r>
           </a:p>
           <a:p>
             <a:pPr marL="0" indent="0">
               <a:buNone/>
             </a:pPr>
-            <a:endParaRPr lang="ru-RU" altLang="en-US" dirty="0"/>
+            <a:r>
+              <a:rPr lang="ru-RU" dirty="0"/>
+              <a:t>	2) Многокритериальная оптимизация </a:t>
+            </a:r>
+          </a:p>
+          <a:p>
+            <a:pPr marL="0" indent="0">
+              <a:buNone/>
+            </a:pPr>
+            <a:r>
+              <a:rPr lang="ru-RU" dirty="0"/>
+              <a:t>	3) Введение альтернативных способов параметризации, учитывающих конструкционные ограничения</a:t>
+            </a:r>
           </a:p>
         </p:txBody>
       </p:sp>
@@ -4094,167 +4251,7 @@
           <a:p>
             <a:fld id="{39D93D24-9446-4BD4-975C-09DCDF7E2057}" type="slidenum">
               <a:rPr lang="en-US" smtClean="0"/>
-            </a:fld>
-            <a:endParaRPr lang="en-US"/>
-          </a:p>
-        </p:txBody>
-      </p:sp>
-    </p:spTree>
-  </p:cSld>
-  <p:clrMapOvr>
-    <a:masterClrMapping/>
-  </p:clrMapOvr>
-</p:sld>
-</file>
-
-<file path=ppt/slides/slide14.xml><?xml version="1.0" encoding="utf-8"?>
-<p:sld xmlns:a="http://schemas.openxmlformats.org/drawingml/2006/main" xmlns:r="http://schemas.openxmlformats.org/officeDocument/2006/relationships" xmlns:p="http://schemas.openxmlformats.org/presentationml/2006/main">
-  <p:cSld>
-    <p:spTree>
-      <p:nvGrpSpPr>
-        <p:cNvPr id="1" name=""/>
-        <p:cNvGrpSpPr/>
-        <p:nvPr/>
-      </p:nvGrpSpPr>
-      <p:grpSpPr>
-        <a:xfrm>
-          <a:off x="0" y="0"/>
-          <a:ext cx="0" cy="0"/>
-          <a:chOff x="0" y="0"/>
-          <a:chExt cx="0" cy="0"/>
-        </a:xfrm>
-      </p:grpSpPr>
-      <p:sp>
-        <p:nvSpPr>
-          <p:cNvPr id="2" name="Заголовок 1"/>
-          <p:cNvSpPr>
-            <a:spLocks noGrp="1"/>
-          </p:cNvSpPr>
-          <p:nvPr>
-            <p:ph type="title"/>
-          </p:nvPr>
-        </p:nvSpPr>
-        <p:spPr/>
-        <p:txBody>
-          <a:bodyPr/>
-          <a:lstStyle/>
-          <a:p>
-            <a:r>
-              <a:rPr lang="ru-RU" dirty="0"/>
-              <a:t>Заключение</a:t>
-            </a:r>
-            <a:endParaRPr lang="en-US" dirty="0"/>
-          </a:p>
-        </p:txBody>
-      </p:sp>
-      <p:sp>
-        <p:nvSpPr>
-          <p:cNvPr id="3" name="Объект 2"/>
-          <p:cNvSpPr>
-            <a:spLocks noGrp="1"/>
-          </p:cNvSpPr>
-          <p:nvPr>
-            <p:ph idx="1"/>
-          </p:nvPr>
-        </p:nvSpPr>
-        <p:spPr/>
-        <p:txBody>
-          <a:bodyPr>
-            <a:normAutofit fontScale="90000"/>
-          </a:bodyPr>
-          <a:lstStyle/>
-          <a:p>
-            <a:r>
-              <a:rPr lang="ru-RU" dirty="0"/>
-              <a:t>Создан программный комплекс для оптимизации формы летательного аппарата на основе </a:t>
-            </a:r>
-            <a:r>
-              <a:rPr lang="en-US" dirty="0"/>
-              <a:t>CFD </a:t>
-            </a:r>
-            <a:r>
-              <a:rPr lang="ru-RU" altLang="en-US" dirty="0"/>
-              <a:t>расчетов</a:t>
-            </a:r>
-            <a:endParaRPr lang="ru-RU" dirty="0"/>
-          </a:p>
-          <a:p>
-            <a:r>
-              <a:rPr lang="ru-RU" dirty="0"/>
-              <a:t>Проведена апробация на примере профильной задачи</a:t>
-            </a:r>
-            <a:endParaRPr lang="ru-RU" dirty="0"/>
-          </a:p>
-          <a:p>
-            <a:r>
-              <a:rPr lang="ru-RU" dirty="0"/>
-              <a:t>В предложенной модифицированной параметризации для достижения результата в пределах точности метода достаточно 6 параметров</a:t>
-            </a:r>
-            <a:endParaRPr lang="ru-RU" dirty="0"/>
-          </a:p>
-          <a:p>
-            <a:r>
-              <a:rPr lang="ru-RU" dirty="0"/>
-              <a:t>Предложено использовать гибридный метод, включающий в себя последовательное переключение между методами </a:t>
-            </a:r>
-            <a:endParaRPr lang="en-US" dirty="0"/>
-          </a:p>
-          <a:p>
-            <a:r>
-              <a:rPr lang="ru-RU" dirty="0"/>
-              <a:t>Возможные направления развития:</a:t>
-            </a:r>
-            <a:endParaRPr lang="ru-RU" dirty="0"/>
-          </a:p>
-          <a:p>
-            <a:pPr marL="0" indent="0">
-              <a:buNone/>
-            </a:pPr>
-            <a:r>
-              <a:rPr lang="ru-RU" dirty="0"/>
-              <a:t>	1) Решение трехмерной задачи </a:t>
-            </a:r>
-            <a:endParaRPr lang="ru-RU" dirty="0"/>
-          </a:p>
-          <a:p>
-            <a:pPr marL="0" indent="0">
-              <a:buNone/>
-            </a:pPr>
-            <a:r>
-              <a:rPr lang="ru-RU" dirty="0"/>
-              <a:t>	2) Многокритериальная оптимизация </a:t>
-            </a:r>
-            <a:endParaRPr lang="ru-RU" dirty="0"/>
-          </a:p>
-          <a:p>
-            <a:pPr marL="0" indent="0">
-              <a:buNone/>
-            </a:pPr>
-            <a:r>
-              <a:rPr lang="ru-RU" dirty="0"/>
-              <a:t>	3) Введение альтернативных способов параметризации, учитывающих конструкционные ограничения</a:t>
-            </a:r>
-            <a:endParaRPr lang="ru-RU" dirty="0"/>
-          </a:p>
-        </p:txBody>
-      </p:sp>
-      <p:sp>
-        <p:nvSpPr>
-          <p:cNvPr id="4" name="Номер слайда 3"/>
-          <p:cNvSpPr>
-            <a:spLocks noGrp="1"/>
-          </p:cNvSpPr>
-          <p:nvPr>
-            <p:ph type="sldNum" sz="quarter" idx="12"/>
-          </p:nvPr>
-        </p:nvSpPr>
-        <p:spPr/>
-        <p:txBody>
-          <a:bodyPr/>
-          <a:lstStyle/>
-          <a:p>
-            <a:fld id="{39D93D24-9446-4BD4-975C-09DCDF7E2057}" type="slidenum">
-              <a:rPr lang="en-US" smtClean="0"/>
+              <a:t>13</a:t>
             </a:fld>
             <a:endParaRPr lang="en-US"/>
           </a:p>
@@ -4335,7 +4332,6 @@
               <a:rPr lang="ru-RU" dirty="0"/>
               <a:t>переживает бурный рост</a:t>
             </a:r>
-            <a:endParaRPr lang="ru-RU" dirty="0"/>
           </a:p>
           <a:p>
             <a:r>
@@ -4350,35 +4346,30 @@
               <a:rPr lang="ru-RU" dirty="0"/>
               <a:t>сопряжено с дороговизной вычислений</a:t>
             </a:r>
-            <a:endParaRPr lang="ru-RU" dirty="0"/>
           </a:p>
           <a:p>
             <a:r>
               <a:rPr lang="ru-RU" dirty="0"/>
               <a:t>Актуальна проблема поиска глобального минимума </a:t>
             </a:r>
-            <a:endParaRPr lang="ru-RU" dirty="0"/>
           </a:p>
           <a:p>
             <a:r>
               <a:rPr lang="ru-RU" dirty="0"/>
               <a:t>Шум целевой функции усложняет поиск</a:t>
             </a:r>
-            <a:endParaRPr lang="ru-RU" dirty="0"/>
           </a:p>
           <a:p>
             <a:r>
               <a:rPr lang="ru-RU" dirty="0"/>
               <a:t>Конструкционные ограничения усложняют топологию пространства решений</a:t>
             </a:r>
-            <a:endParaRPr lang="ru-RU" dirty="0"/>
           </a:p>
           <a:p>
             <a:r>
               <a:rPr lang="ru-RU" dirty="0"/>
               <a:t>Для современного проектирования летательных аппаратов необходимы автоматизированные комплексы, обладающие устойчивостью </a:t>
             </a:r>
-            <a:endParaRPr lang="ru-RU" dirty="0"/>
           </a:p>
         </p:txBody>
       </p:sp>
@@ -4399,6 +4390,7 @@
           <a:p>
             <a:fld id="{39D93D24-9446-4BD4-975C-09DCDF7E2057}" type="slidenum">
               <a:rPr lang="en-US" smtClean="0"/>
+              <a:t>2</a:t>
             </a:fld>
             <a:endParaRPr lang="en-US"/>
           </a:p>
@@ -4487,7 +4479,6 @@
               <a:rPr lang="ru-RU" sz="2000" dirty="0"/>
               <a:t>разработка и применение вычислительного комплекса оптимизации формы летательного аппарата на примере минимизации аэродинамического сопротивления профиля в трансзвуковом потоке</a:t>
             </a:r>
-            <a:endParaRPr lang="ru-RU" sz="2000" dirty="0"/>
           </a:p>
           <a:p>
             <a:pPr marL="0" indent="0">
@@ -4497,7 +4488,6 @@
               <a:rPr lang="ru-RU" b="1" dirty="0"/>
               <a:t>Задачи:</a:t>
             </a:r>
-            <a:endParaRPr lang="ru-RU" b="1" dirty="0"/>
           </a:p>
           <a:p>
             <a:pPr>
@@ -4509,7 +4499,6 @@
               <a:rPr lang="ru-RU" sz="2000" dirty="0"/>
               <a:t>Анализ существующих подходов к оптимизации аэродинамических профилей </a:t>
             </a:r>
-            <a:endParaRPr lang="ru-RU" sz="2000" dirty="0"/>
           </a:p>
           <a:p>
             <a:pPr>
@@ -4521,7 +4510,6 @@
               <a:rPr lang="ru-RU" sz="2000" dirty="0"/>
               <a:t>Создание программного кода автоматизированного расчетного комплекса</a:t>
             </a:r>
-            <a:endParaRPr lang="ru-RU" sz="2000" dirty="0"/>
           </a:p>
           <a:p>
             <a:pPr>
@@ -4533,7 +4521,6 @@
               <a:rPr lang="ru-RU" sz="2000" dirty="0"/>
               <a:t>Сравнительный анализ методов поиска и способов постановки задач с ограничениями</a:t>
             </a:r>
-            <a:endParaRPr lang="ru-RU" sz="2000" dirty="0"/>
           </a:p>
           <a:p>
             <a:endParaRPr lang="en-US" dirty="0"/>
@@ -4557,6 +4544,7 @@
           <a:p>
             <a:fld id="{39D93D24-9446-4BD4-975C-09DCDF7E2057}" type="slidenum">
               <a:rPr lang="en-US" smtClean="0"/>
+              <a:t>3</a:t>
             </a:fld>
             <a:endParaRPr lang="en-US"/>
           </a:p>
@@ -4629,28 +4617,24 @@
               <a:rPr lang="ru-RU" dirty="0"/>
               <a:t>Создан программный код для параметризации, построения сетки, управления расчетом, оптимизации и обработки результатов  </a:t>
             </a:r>
-            <a:endParaRPr lang="ru-RU" dirty="0"/>
           </a:p>
           <a:p>
             <a:r>
               <a:rPr lang="ru-RU" dirty="0"/>
               <a:t>Проведена валидация и верификация расчетного метода</a:t>
             </a:r>
-            <a:endParaRPr lang="ru-RU" dirty="0"/>
           </a:p>
           <a:p>
             <a:r>
               <a:rPr lang="ru-RU" dirty="0"/>
               <a:t>Проверены различные способы постановки ограничений </a:t>
             </a:r>
-            <a:endParaRPr lang="ru-RU" dirty="0"/>
           </a:p>
           <a:p>
             <a:r>
               <a:rPr lang="ru-RU" dirty="0"/>
               <a:t>Различными методами получен набор решений оптимизационной задачи с установленной точностью </a:t>
             </a:r>
-            <a:endParaRPr lang="ru-RU" dirty="0"/>
           </a:p>
           <a:p>
             <a:endParaRPr lang="ru-RU" dirty="0"/>
@@ -4674,6 +4658,7 @@
           <a:p>
             <a:fld id="{39D93D24-9446-4BD4-975C-09DCDF7E2057}" type="slidenum">
               <a:rPr lang="en-US" smtClean="0"/>
+              <a:t>4</a:t>
             </a:fld>
             <a:endParaRPr lang="en-US"/>
           </a:p>
@@ -4721,7 +4706,7 @@
           <a:p>
             <a:r>
               <a:rPr lang="ru-RU" dirty="0"/>
-              <a:t>Обзор проблемы</a:t>
+              <a:t>Постановка задачи</a:t>
             </a:r>
             <a:endParaRPr lang="en-US" dirty="0"/>
           </a:p>
@@ -4737,10 +4722,110 @@
             <p:ph idx="1"/>
           </p:nvPr>
         </p:nvSpPr>
-        <p:spPr/>
-        <p:txBody>
-          <a:bodyPr/>
-          <a:lstStyle/>
+        <p:spPr>
+          <a:xfrm>
+            <a:off x="838200" y="1825625"/>
+            <a:ext cx="10515600" cy="4351338"/>
+          </a:xfrm>
+        </p:spPr>
+        <p:txBody>
+          <a:bodyPr/>
+          <a:lstStyle/>
+          <a:p>
+            <a:r>
+              <a:rPr lang="ru-RU" dirty="0"/>
+              <a:t>Задача — при заданном режиме обтекания и </a:t>
+            </a:r>
+            <a:r>
+              <a:rPr lang="en-US" dirty="0"/>
+              <a:t>C</a:t>
+            </a:r>
+            <a:r>
+              <a:rPr lang="en-US" baseline="-25000" dirty="0"/>
+              <a:t>ya</a:t>
+            </a:r>
+            <a:r>
+              <a:rPr lang="en-US" dirty="0"/>
+              <a:t> </a:t>
+            </a:r>
+            <a:r>
+              <a:rPr lang="ru-RU" dirty="0"/>
+              <a:t>найти профиль с минимальным </a:t>
+            </a:r>
+            <a:r>
+              <a:rPr lang="en-US" dirty="0" err="1"/>
+              <a:t>C</a:t>
+            </a:r>
+            <a:r>
+              <a:rPr lang="en-US" baseline="-25000" dirty="0" err="1"/>
+              <a:t>xa</a:t>
+            </a:r>
+            <a:r>
+              <a:rPr lang="en-US" dirty="0"/>
+              <a:t>, </a:t>
+            </a:r>
+            <a:r>
+              <a:rPr lang="ru-RU" dirty="0"/>
+              <a:t>удовлетворяющий ограничениям</a:t>
+            </a:r>
+          </a:p>
+          <a:p>
+            <a:endParaRPr lang="ru-RU" dirty="0"/>
+          </a:p>
+          <a:p>
+            <a:endParaRPr lang="ru-RU" dirty="0"/>
+          </a:p>
+          <a:p>
+            <a:endParaRPr lang="ru-RU" dirty="0"/>
+          </a:p>
+          <a:p>
+            <a:endParaRPr lang="ru-RU" dirty="0"/>
+          </a:p>
+          <a:p>
+            <a:pPr marL="0" indent="0">
+              <a:buNone/>
+            </a:pPr>
+            <a:endParaRPr lang="ru-RU" dirty="0"/>
+          </a:p>
+          <a:p>
+            <a:r>
+              <a:rPr lang="ru-RU" dirty="0"/>
+              <a:t>Режим обтекания: </a:t>
+            </a:r>
+            <a:r>
+              <a:rPr lang="en-US" dirty="0"/>
+              <a:t>M, Re, T, </a:t>
+            </a:r>
+            <a:endParaRPr lang="ru-RU" dirty="0"/>
+          </a:p>
+          <a:p>
+            <a:r>
+              <a:rPr lang="ru-RU" dirty="0"/>
+              <a:t>Параметризация формы с помощью кривых Безье </a:t>
+            </a:r>
+          </a:p>
+          <a:p>
+            <a:r>
+              <a:rPr lang="ru-RU" dirty="0"/>
+              <a:t>Результат оценивался по </a:t>
+            </a:r>
+            <a:r>
+              <a:rPr lang="en-US" dirty="0" err="1"/>
+              <a:t>C</a:t>
+            </a:r>
+            <a:r>
+              <a:rPr lang="en-US" baseline="-25000" dirty="0" err="1"/>
+              <a:t>xa</a:t>
+            </a:r>
+            <a:r>
+              <a:rPr lang="en-US" dirty="0"/>
+              <a:t>, </a:t>
+            </a:r>
+            <a:r>
+              <a:rPr lang="ru-RU" dirty="0"/>
+              <a:t>скорости выполнения алгоритма и его устойчивости</a:t>
+            </a:r>
+          </a:p>
           <a:p>
             <a:endParaRPr lang="en-US" dirty="0"/>
           </a:p>
@@ -4763,11 +4848,42 @@
           <a:p>
             <a:fld id="{39D93D24-9446-4BD4-975C-09DCDF7E2057}" type="slidenum">
               <a:rPr lang="en-US" smtClean="0"/>
+              <a:t>5</a:t>
             </a:fld>
             <a:endParaRPr lang="en-US"/>
           </a:p>
         </p:txBody>
       </p:sp>
+      <p:pic>
+        <p:nvPicPr>
+          <p:cNvPr id="8" name="Picture 7">
+            <a:extLst>
+              <a:ext uri="{FF2B5EF4-FFF2-40B4-BE49-F238E27FC236}">
+                <a16:creationId xmlns:a16="http://schemas.microsoft.com/office/drawing/2014/main" id="{AB6AF2F9-5F65-5C51-40C6-52232F4B6F7E}"/>
+              </a:ext>
+            </a:extLst>
+          </p:cNvPr>
+          <p:cNvPicPr>
+            <a:picLocks noChangeAspect="1"/>
+          </p:cNvPicPr>
+          <p:nvPr/>
+        </p:nvPicPr>
+        <p:blipFill>
+          <a:blip r:embed="rId2"/>
+          <a:stretch>
+            <a:fillRect/>
+          </a:stretch>
+        </p:blipFill>
+        <p:spPr>
+          <a:xfrm>
+            <a:off x="3784600" y="2520927"/>
+            <a:ext cx="4495800" cy="1816146"/>
+          </a:xfrm>
+          <a:prstGeom prst="rect">
+            <a:avLst/>
+          </a:prstGeom>
+        </p:spPr>
+      </p:pic>
     </p:spTree>
   </p:cSld>
   <p:clrMapOvr>
@@ -4810,7 +4926,7 @@
           <a:p>
             <a:r>
               <a:rPr lang="ru-RU" dirty="0"/>
-              <a:t>Постановка задачи</a:t>
+              <a:t>Методы решения задачи оптимизации</a:t>
             </a:r>
             <a:endParaRPr lang="en-US" dirty="0"/>
           </a:p>
@@ -4826,38 +4942,79 @@
             <p:ph idx="1"/>
           </p:nvPr>
         </p:nvSpPr>
-        <p:spPr/>
-        <p:txBody>
-          <a:bodyPr/>
-          <a:lstStyle/>
-          <a:p>
-            <a:r>
-              <a:rPr lang="ru-RU" dirty="0"/>
-              <a:t>Задача — при заданном режиме обтекания и </a:t>
+        <p:spPr>
+          <a:xfrm>
+            <a:off x="838200" y="1825625"/>
+            <a:ext cx="10515600" cy="4351338"/>
+          </a:xfrm>
+        </p:spPr>
+        <p:txBody>
+          <a:bodyPr/>
+          <a:lstStyle/>
+          <a:p>
+            <a:r>
+              <a:rPr lang="ru-RU" dirty="0"/>
+              <a:t>Надежной работы удалось достигнуть с использованием алгоритмов </a:t>
             </a:r>
             <a:r>
               <a:rPr lang="en-US" dirty="0"/>
-              <a:t>C</a:t>
-            </a:r>
-            <a:r>
-              <a:rPr lang="en-US" baseline="-25000" dirty="0"/>
-              <a:t>ya</a:t>
-            </a:r>
+              <a:t>EGO, CG, MADS</a:t>
+            </a:r>
+          </a:p>
+          <a:p>
             <a:r>
               <a:rPr lang="en-US" dirty="0"/>
+              <a:t>EGO — </a:t>
+            </a:r>
+            <a:r>
+              <a:rPr lang="ru-RU" dirty="0"/>
+              <a:t>глобальная оптимизация на основе суррогатного моделирования </a:t>
+            </a:r>
+          </a:p>
+          <a:p>
+            <a:r>
+              <a:rPr lang="en-US" dirty="0"/>
+              <a:t>CG —</a:t>
+            </a:r>
+            <a:r>
+              <a:rPr lang="ru-RU" dirty="0"/>
+              <a:t> градиентный локальный метод </a:t>
+            </a:r>
+          </a:p>
+          <a:p>
+            <a:r>
+              <a:rPr lang="en-US" dirty="0"/>
+              <a:t>MADS —</a:t>
+            </a:r>
+            <a:r>
+              <a:rPr lang="ru-RU" dirty="0"/>
               <a:t> </a:t>
             </a:r>
             <a:r>
-              <a:rPr lang="ru-RU" dirty="0"/>
-              <a:t>найти профиль с минимальным </a:t>
+              <a:rPr lang="ru-RU" dirty="0" err="1"/>
+              <a:t>безградиентный</a:t>
+            </a:r>
+            <a:r>
+              <a:rPr lang="ru-RU" dirty="0"/>
+              <a:t> метод, эффективный в условиях сильного влияния шума</a:t>
+            </a:r>
+          </a:p>
+          <a:p>
+            <a:r>
+              <a:rPr lang="ru-RU" dirty="0"/>
+              <a:t>На начальном этапе использовалась реализация </a:t>
+            </a:r>
+            <a:r>
+              <a:rPr lang="en-US" dirty="0"/>
+              <a:t>CG </a:t>
+            </a:r>
+            <a:r>
+              <a:rPr lang="ru-RU" dirty="0"/>
+              <a:t>из библиотеки </a:t>
             </a:r>
             <a:r>
               <a:rPr lang="en-US" dirty="0" err="1"/>
-              <a:t>C</a:t>
-            </a:r>
-            <a:r>
-              <a:rPr lang="en-US" baseline="-25000" dirty="0" err="1"/>
-              <a:t>xa</a:t>
+              <a:t>scipy.optimize</a:t>
             </a:r>
             <a:r>
               <a:rPr lang="en-US" dirty="0"/>
@@ -4865,60 +5022,13 @@
             </a:r>
             <a:r>
               <a:rPr lang="ru-RU" dirty="0"/>
-              <a:t>удовлетворяющий ограничениям</a:t>
+              <a:t>в дальнейшем использовалась </a:t>
+            </a:r>
+            <a:r>
+              <a:rPr lang="en-US" dirty="0"/>
+              <a:t>DAKOTA</a:t>
             </a:r>
             <a:endParaRPr lang="ru-RU" dirty="0"/>
-          </a:p>
-          <a:p>
-            <a:r>
-              <a:rPr lang="ru-RU" dirty="0"/>
-              <a:t>Режим обтекания: </a:t>
-            </a:r>
-            <a:r>
-              <a:rPr lang="en-US" dirty="0"/>
-              <a:t>M, Re, T, </a:t>
-            </a:r>
-            <a:endParaRPr lang="ru-RU" dirty="0"/>
-          </a:p>
-          <a:p>
-            <a:r>
-              <a:rPr lang="ru-RU" dirty="0"/>
-              <a:t>Ограничения: толщина профиля, радиус передней кромки, толщина задней кромки</a:t>
-            </a:r>
-            <a:endParaRPr lang="ru-RU" dirty="0"/>
-          </a:p>
-          <a:p>
-            <a:r>
-              <a:rPr lang="ru-RU" dirty="0"/>
-              <a:t>Параметризация формы с помощью кривых Безье </a:t>
-            </a:r>
-            <a:endParaRPr lang="ru-RU" dirty="0"/>
-          </a:p>
-          <a:p>
-            <a:r>
-              <a:rPr lang="ru-RU" dirty="0"/>
-              <a:t>Результат оценивался по </a:t>
-            </a:r>
-            <a:r>
-              <a:rPr lang="en-US" dirty="0" err="1"/>
-              <a:t>C</a:t>
-            </a:r>
-            <a:r>
-              <a:rPr lang="en-US" baseline="-25000" dirty="0" err="1"/>
-              <a:t>xa</a:t>
-            </a:r>
-            <a:r>
-              <a:rPr lang="en-US" dirty="0"/>
-              <a:t>, </a:t>
-            </a:r>
-            <a:r>
-              <a:rPr lang="ru-RU" dirty="0"/>
-              <a:t>скорости выполнения алгоритма и его устойчивости</a:t>
-            </a:r>
-            <a:endParaRPr lang="ru-RU" dirty="0"/>
-          </a:p>
-          <a:p>
-            <a:endParaRPr lang="en-US" dirty="0"/>
           </a:p>
         </p:txBody>
       </p:sp>
@@ -4939,6 +5049,7 @@
           <a:p>
             <a:fld id="{39D93D24-9446-4BD4-975C-09DCDF7E2057}" type="slidenum">
               <a:rPr lang="en-US" smtClean="0"/>
+              <a:t>6</a:t>
             </a:fld>
             <a:endParaRPr lang="en-US"/>
           </a:p>
@@ -4971,7 +5082,7 @@
       </p:grpSpPr>
       <p:sp>
         <p:nvSpPr>
-          <p:cNvPr id="2" name="Заголовок 1"/>
+          <p:cNvPr id="2" name="Title 1"/>
           <p:cNvSpPr>
             <a:spLocks noGrp="1"/>
           </p:cNvSpPr>
@@ -4986,7 +5097,15 @@
           <a:p>
             <a:r>
               <a:rPr lang="ru-RU" dirty="0"/>
-              <a:t>Методы решения задачи оптимизации</a:t>
+              <a:t>Работа </a:t>
+            </a:r>
+            <a:r>
+              <a:rPr lang="en-US" dirty="0"/>
+              <a:t>CFD</a:t>
+            </a:r>
+            <a:r>
+              <a:rPr lang="ru-RU" dirty="0"/>
+              <a:t> для получения целевой функции</a:t>
             </a:r>
             <a:endParaRPr lang="en-US" dirty="0"/>
           </a:p>
@@ -4994,7 +5113,7 @@
       </p:sp>
       <p:sp>
         <p:nvSpPr>
-          <p:cNvPr id="3" name="Объект 2"/>
+          <p:cNvPr id="3" name="Content Placeholder 2"/>
           <p:cNvSpPr>
             <a:spLocks noGrp="1"/>
           </p:cNvSpPr>
@@ -5005,100 +5124,76 @@
         <p:spPr>
           <a:xfrm>
             <a:off x="838200" y="1825625"/>
-            <a:ext cx="10515600" cy="4351338"/>
+            <a:ext cx="6356350" cy="4351338"/>
           </a:xfrm>
         </p:spPr>
         <p:txBody>
-          <a:bodyPr/>
-          <a:lstStyle/>
-          <a:p>
-            <a:r>
-              <a:rPr lang="ru-RU" dirty="0"/>
-              <a:t>Надежной работы удалось достигнуть с использованием алгоритмов </a:t>
+          <a:bodyPr>
+            <a:normAutofit lnSpcReduction="10000"/>
+          </a:bodyPr>
+          <a:lstStyle/>
+          <a:p>
+            <a:r>
+              <a:rPr lang="ru-RU" dirty="0"/>
+              <a:t>Использовался промышленный </a:t>
             </a:r>
             <a:r>
               <a:rPr lang="en-US" dirty="0"/>
-              <a:t>EGO, CG, MADS</a:t>
-            </a:r>
-            <a:endParaRPr lang="en-US" dirty="0"/>
-          </a:p>
-          <a:p>
+              <a:t>RANS </a:t>
+            </a:r>
+            <a:r>
+              <a:rPr lang="ru-RU" dirty="0"/>
+              <a:t>решатель</a:t>
+            </a:r>
+          </a:p>
+          <a:p>
+            <a:r>
+              <a:rPr lang="ru-RU" dirty="0"/>
+              <a:t>Для минимизации влияния сетки написан скрипт автоматического построения структурированной сетки около профиля </a:t>
+            </a:r>
+          </a:p>
+          <a:p>
+            <a:r>
+              <a:rPr lang="ru-RU" dirty="0"/>
+              <a:t>Проведена валидация и анализ сеточной сходимости</a:t>
+            </a:r>
+          </a:p>
+          <a:p>
+            <a:r>
+              <a:rPr lang="ru-RU" dirty="0"/>
+              <a:t>Валидация на случае </a:t>
+            </a:r>
             <a:r>
               <a:rPr lang="en-US" dirty="0"/>
-              <a:t>EGO — </a:t>
-            </a:r>
-            <a:r>
-              <a:rPr lang="ru-RU" dirty="0"/>
-              <a:t>глобальная оптимизация на основе суррогатного моделирования </a:t>
+              <a:t>RAE2822, </a:t>
+            </a:r>
+            <a:r>
+              <a:rPr lang="ru-RU" dirty="0"/>
+              <a:t>разница с ним в дальнейшем использовалась в качестве бенчмарка </a:t>
+            </a:r>
+          </a:p>
+          <a:p>
+            <a:r>
+              <a:rPr lang="ru-RU" dirty="0"/>
+              <a:t>Модель турбулентности — </a:t>
+            </a:r>
+            <a:r>
+              <a:rPr lang="en-US" dirty="0"/>
+              <a:t>SA</a:t>
             </a:r>
             <a:endParaRPr lang="ru-RU" dirty="0"/>
           </a:p>
           <a:p>
             <a:r>
-              <a:rPr lang="en-US" dirty="0"/>
-              <a:t>CG —</a:t>
-            </a:r>
-            <a:r>
-              <a:rPr lang="ru-RU" dirty="0"/>
-              <a:t> градиентный локальный метод </a:t>
-            </a:r>
-            <a:endParaRPr lang="ru-RU" dirty="0"/>
-          </a:p>
-          <a:p>
-            <a:r>
-              <a:rPr lang="en-US" dirty="0"/>
-              <a:t>MADS —</a:t>
-            </a:r>
-            <a:r>
-              <a:rPr lang="ru-RU" dirty="0"/>
-              <a:t> </a:t>
-            </a:r>
-            <a:r>
-              <a:rPr lang="ru-RU" dirty="0" err="1"/>
-              <a:t>безградиентный</a:t>
-            </a:r>
-            <a:r>
-              <a:rPr lang="ru-RU" dirty="0"/>
-              <a:t> метод, эффективный в условиях сильного влияния шума</a:t>
-            </a:r>
-            <a:endParaRPr lang="ru-RU" dirty="0"/>
-          </a:p>
-          <a:p>
-            <a:r>
-              <a:rPr lang="ru-RU" dirty="0"/>
-              <a:t>На начальном этапе использовалась реализация </a:t>
-            </a:r>
-            <a:r>
-              <a:rPr lang="en-US" dirty="0"/>
-              <a:t>CG </a:t>
-            </a:r>
-            <a:r>
-              <a:rPr lang="ru-RU" dirty="0"/>
-              <a:t>из библиотеки </a:t>
-            </a:r>
-            <a:r>
-              <a:rPr lang="en-US" dirty="0" err="1"/>
-              <a:t>scipy.optimize</a:t>
-            </a:r>
-            <a:r>
-              <a:rPr lang="en-US" dirty="0"/>
-              <a:t>, </a:t>
-            </a:r>
-            <a:r>
-              <a:rPr lang="ru-RU" dirty="0"/>
-              <a:t>в дальнейшем использовалась </a:t>
-            </a:r>
-            <a:r>
-              <a:rPr lang="en-US" dirty="0"/>
-              <a:t>DAKOTA</a:t>
-            </a:r>
-            <a:endParaRPr lang="ru-RU" dirty="0"/>
-          </a:p>
-        </p:txBody>
-      </p:sp>
-      <p:sp>
-        <p:nvSpPr>
-          <p:cNvPr id="4" name="Номер слайда 3"/>
+              <a:rPr lang="ru-RU" dirty="0"/>
+              <a:t>Для повышения устойчивости используется жесткое ограничение по числу итераций </a:t>
+            </a:r>
+          </a:p>
+        </p:txBody>
+      </p:sp>
+      <p:sp>
+        <p:nvSpPr>
+          <p:cNvPr id="4" name="Slide Number Placeholder 3"/>
           <p:cNvSpPr>
             <a:spLocks noGrp="1"/>
           </p:cNvSpPr>
@@ -5113,11 +5208,72 @@
           <a:p>
             <a:fld id="{39D93D24-9446-4BD4-975C-09DCDF7E2057}" type="slidenum">
               <a:rPr lang="en-US" smtClean="0"/>
+              <a:t>7</a:t>
             </a:fld>
-            <a:endParaRPr lang="en-US"/>
-          </a:p>
-        </p:txBody>
-      </p:sp>
+            <a:endParaRPr lang="en-US" dirty="0"/>
+          </a:p>
+        </p:txBody>
+      </p:sp>
+      <p:pic>
+        <p:nvPicPr>
+          <p:cNvPr id="5" name="Picture 4">
+            <a:extLst>
+              <a:ext uri="{FF2B5EF4-FFF2-40B4-BE49-F238E27FC236}">
+                <a16:creationId xmlns:a16="http://schemas.microsoft.com/office/drawing/2014/main" id="{CD6D5553-F95A-8F5C-2DC6-A11E64765323}"/>
+              </a:ext>
+            </a:extLst>
+          </p:cNvPr>
+          <p:cNvPicPr>
+            <a:picLocks noChangeAspect="1"/>
+          </p:cNvPicPr>
+          <p:nvPr/>
+        </p:nvPicPr>
+        <p:blipFill>
+          <a:blip r:embed="rId2"/>
+          <a:stretch>
+            <a:fillRect/>
+          </a:stretch>
+        </p:blipFill>
+        <p:spPr>
+          <a:xfrm>
+            <a:off x="7277100" y="1614488"/>
+            <a:ext cx="4479290" cy="2390794"/>
+          </a:xfrm>
+          <a:prstGeom prst="rect">
+            <a:avLst/>
+          </a:prstGeom>
+        </p:spPr>
+      </p:pic>
+      <p:pic>
+        <p:nvPicPr>
+          <p:cNvPr id="6" name="Picture 5">
+            <a:extLst>
+              <a:ext uri="{FF2B5EF4-FFF2-40B4-BE49-F238E27FC236}">
+                <a16:creationId xmlns:a16="http://schemas.microsoft.com/office/drawing/2014/main" id="{4FE2EFA7-D248-0D29-95BC-0C17B361060A}"/>
+              </a:ext>
+            </a:extLst>
+          </p:cNvPr>
+          <p:cNvPicPr>
+            <a:picLocks noChangeAspect="1"/>
+          </p:cNvPicPr>
+          <p:nvPr/>
+        </p:nvPicPr>
+        <p:blipFill>
+          <a:blip r:embed="rId3"/>
+          <a:stretch>
+            <a:fillRect/>
+          </a:stretch>
+        </p:blipFill>
+        <p:spPr>
+          <a:xfrm>
+            <a:off x="7605395" y="4075731"/>
+            <a:ext cx="3822700" cy="2280619"/>
+          </a:xfrm>
+          <a:prstGeom prst="rect">
+            <a:avLst/>
+          </a:prstGeom>
+        </p:spPr>
+      </p:pic>
     </p:spTree>
   </p:cSld>
   <p:clrMapOvr>
@@ -5145,7 +5301,7 @@
       </p:grpSpPr>
       <p:sp>
         <p:nvSpPr>
-          <p:cNvPr id="2" name="Title 1"/>
+          <p:cNvPr id="2" name="Заголовок 1"/>
           <p:cNvSpPr>
             <a:spLocks noGrp="1"/>
           </p:cNvSpPr>
@@ -5160,125 +5316,223 @@
           <a:p>
             <a:r>
               <a:rPr lang="ru-RU" dirty="0"/>
-              <a:t>Работа </a:t>
+              <a:t>Зависимость результата от числа параметров </a:t>
+            </a:r>
+            <a:endParaRPr lang="en-US" dirty="0"/>
+          </a:p>
+        </p:txBody>
+      </p:sp>
+      <p:sp>
+        <p:nvSpPr>
+          <p:cNvPr id="3" name="Объект 2"/>
+          <p:cNvSpPr>
+            <a:spLocks noGrp="1"/>
+          </p:cNvSpPr>
+          <p:nvPr>
+            <p:ph sz="half" idx="1"/>
+          </p:nvPr>
+        </p:nvSpPr>
+        <p:spPr/>
+        <p:txBody>
+          <a:bodyPr/>
+          <a:lstStyle/>
+          <a:p>
+            <a:r>
+              <a:rPr lang="ru-RU" dirty="0"/>
+              <a:t>Профиль параметризовался двумя кривыми Безье</a:t>
+            </a:r>
+          </a:p>
+          <a:p>
+            <a:r>
+              <a:rPr lang="ru-RU" dirty="0"/>
+              <a:t>Вектор параметров</a:t>
+            </a:r>
+            <a:r>
+              <a:rPr lang="en-US" altLang="ru-RU" dirty="0"/>
+              <a:t>:</a:t>
+            </a:r>
+          </a:p>
+          <a:p>
+            <a:pPr marL="0" indent="0">
+              <a:buNone/>
+            </a:pPr>
+            <a:r>
+              <a:rPr lang="en-US" altLang="ru-RU" b="1" dirty="0"/>
+              <a:t>x</a:t>
+            </a:r>
+            <a:r>
+              <a:rPr lang="en-US" altLang="ru-RU" dirty="0"/>
+              <a:t> =</a:t>
+            </a:r>
+            <a:r>
+              <a:rPr lang="ru-RU" dirty="0"/>
+              <a:t> </a:t>
             </a:r>
             <a:r>
               <a:rPr lang="en-US" dirty="0"/>
-              <a:t>CFD</a:t>
-            </a:r>
-            <a:r>
-              <a:rPr lang="ru-RU" dirty="0"/>
-              <a:t> для получения целевой функции</a:t>
-            </a:r>
-            <a:endParaRPr lang="en-US" dirty="0"/>
-          </a:p>
-        </p:txBody>
-      </p:sp>
-      <p:sp>
-        <p:nvSpPr>
-          <p:cNvPr id="3" name="Content Placeholder 2"/>
-          <p:cNvSpPr>
-            <a:spLocks noGrp="1"/>
-          </p:cNvSpPr>
-          <p:nvPr>
-            <p:ph idx="1"/>
-          </p:nvPr>
-        </p:nvSpPr>
+              <a:t>[R</a:t>
+            </a:r>
+            <a:r>
+              <a:rPr lang="en-US" baseline="-25000" dirty="0"/>
+              <a:t>forw</a:t>
+            </a:r>
+            <a:r>
+              <a:rPr lang="en-US" dirty="0"/>
+              <a:t>, P</a:t>
+            </a:r>
+            <a:r>
+              <a:rPr lang="en-US" baseline="-25000" dirty="0"/>
+              <a:t>u1</a:t>
+            </a:r>
+            <a:r>
+              <a:rPr lang="en-US" dirty="0"/>
+              <a:t>,..., P</a:t>
+            </a:r>
+            <a:r>
+              <a:rPr lang="en-US" baseline="-25000" dirty="0"/>
+              <a:t>uN</a:t>
+            </a:r>
+            <a:r>
+              <a:rPr lang="en-US" dirty="0"/>
+              <a:t>, P</a:t>
+            </a:r>
+            <a:r>
+              <a:rPr lang="en-US" baseline="-25000" dirty="0"/>
+              <a:t>d1</a:t>
+            </a:r>
+            <a:r>
+              <a:rPr lang="en-US" dirty="0"/>
+              <a:t>, ..., </a:t>
+            </a:r>
+            <a:r>
+              <a:rPr lang="el-GR" dirty="0"/>
+              <a:t>θ</a:t>
+            </a:r>
+            <a:r>
+              <a:rPr lang="ru-RU" baseline="-25000" dirty="0" err="1"/>
+              <a:t>схожд</a:t>
+            </a:r>
+            <a:r>
+              <a:rPr lang="en-US" dirty="0"/>
+              <a:t>]</a:t>
+            </a:r>
+          </a:p>
+          <a:p>
+            <a:r>
+              <a:rPr lang="ru-RU" altLang="en-US" dirty="0"/>
+              <a:t>Проверка проводилась методом </a:t>
+            </a:r>
+            <a:r>
+              <a:rPr lang="en-US" altLang="en-US" dirty="0"/>
+              <a:t>CG </a:t>
+            </a:r>
+            <a:r>
+              <a:rPr lang="ru-RU" altLang="en-US" dirty="0"/>
+              <a:t>при старте от симметричного профиля </a:t>
+            </a:r>
+          </a:p>
+          <a:p>
+            <a:r>
+              <a:rPr lang="ru-RU" dirty="0"/>
+              <a:t>Для режима </a:t>
+            </a:r>
+            <a:r>
+              <a:rPr lang="en-US" dirty="0"/>
+              <a:t>M = 0.75, C</a:t>
+            </a:r>
+            <a:r>
+              <a:rPr lang="en-US" baseline="-25000" dirty="0"/>
+              <a:t>ya</a:t>
+            </a:r>
+            <a:r>
+              <a:rPr lang="en-US" dirty="0"/>
+              <a:t>= 0.5 </a:t>
+            </a:r>
+            <a:r>
+              <a:rPr lang="ru-RU" dirty="0"/>
+              <a:t>оптимальная форма</a:t>
+            </a:r>
+            <a:r>
+              <a:rPr lang="ru-RU" altLang="en-US" dirty="0"/>
+              <a:t> достигается уже при </a:t>
+            </a:r>
+            <a:r>
+              <a:rPr lang="en-US" altLang="en-US" dirty="0"/>
+              <a:t>N = 3 </a:t>
+            </a:r>
+            <a:r>
+              <a:rPr lang="ru-RU" altLang="en-US" dirty="0"/>
+              <a:t> (7 параметров)</a:t>
+            </a:r>
+            <a:endParaRPr lang="ru-RU" dirty="0"/>
+          </a:p>
+          <a:p>
+            <a:pPr marL="0" indent="0">
+              <a:buNone/>
+            </a:pPr>
+            <a:endParaRPr lang="ru-RU" dirty="0"/>
+          </a:p>
+        </p:txBody>
+      </p:sp>
+      <p:sp>
+        <p:nvSpPr>
+          <p:cNvPr id="4" name="Номер слайда 3"/>
+          <p:cNvSpPr>
+            <a:spLocks noGrp="1"/>
+          </p:cNvSpPr>
+          <p:nvPr>
+            <p:ph type="sldNum" sz="quarter" idx="12"/>
+          </p:nvPr>
+        </p:nvSpPr>
+        <p:spPr/>
+        <p:txBody>
+          <a:bodyPr/>
+          <a:lstStyle/>
+          <a:p>
+            <a:fld id="{39D93D24-9446-4BD4-975C-09DCDF7E2057}" type="slidenum">
+              <a:rPr lang="en-US" smtClean="0"/>
+              <a:t>8</a:t>
+            </a:fld>
+            <a:endParaRPr lang="en-US"/>
+          </a:p>
+        </p:txBody>
+      </p:sp>
+      <p:pic>
+        <p:nvPicPr>
+          <p:cNvPr id="6" name="Picture 5">
+            <a:extLst>
+              <a:ext uri="{FF2B5EF4-FFF2-40B4-BE49-F238E27FC236}">
+                <a16:creationId xmlns:a16="http://schemas.microsoft.com/office/drawing/2014/main" id="{5E6A42CE-7D64-5158-84EB-30B057CC3065}"/>
+              </a:ext>
+            </a:extLst>
+          </p:cNvPr>
+          <p:cNvPicPr>
+            <a:picLocks noChangeAspect="1"/>
+          </p:cNvPicPr>
+          <p:nvPr/>
+        </p:nvPicPr>
+        <p:blipFill>
+          <a:blip r:embed="rId2">
+            <a:extLst>
+              <a:ext uri="{28A0092B-C50C-407E-A947-70E740481C1C}">
+                <a14:useLocalDpi xmlns:a14="http://schemas.microsoft.com/office/drawing/2010/main" val="0"/>
+              </a:ext>
+            </a:extLst>
+          </a:blip>
+          <a:stretch>
+            <a:fillRect/>
+          </a:stretch>
+        </p:blipFill>
         <p:spPr>
           <a:xfrm>
-            <a:off x="838200" y="1825625"/>
-            <a:ext cx="6800850" cy="4351338"/>
+            <a:off x="6316462" y="2315745"/>
+            <a:ext cx="5024638" cy="2523749"/>
           </a:xfrm>
+          <a:prstGeom prst="rect">
+            <a:avLst/>
+          </a:prstGeom>
         </p:spPr>
-        <p:txBody>
-          <a:bodyPr/>
-          <a:lstStyle/>
-          <a:p>
-            <a:r>
-              <a:rPr lang="ru-RU" dirty="0"/>
-              <a:t>Использовался промышленный </a:t>
-            </a:r>
-            <a:r>
-              <a:rPr lang="en-US" dirty="0"/>
-              <a:t>RANS </a:t>
-            </a:r>
-            <a:r>
-              <a:rPr lang="ru-RU" dirty="0"/>
-              <a:t>решатель</a:t>
-            </a:r>
-            <a:endParaRPr lang="ru-RU" dirty="0"/>
-          </a:p>
-          <a:p>
-            <a:r>
-              <a:rPr lang="ru-RU" dirty="0"/>
-              <a:t>Для минимизации влияния сетки написан скрипт автоматического построения структурированной сетки около профиля </a:t>
-            </a:r>
-            <a:endParaRPr lang="ru-RU" dirty="0"/>
-          </a:p>
-          <a:p>
-            <a:r>
-              <a:rPr lang="ru-RU" dirty="0"/>
-              <a:t>Проведена валидация и анализ сеточной сходимости</a:t>
-            </a:r>
-            <a:endParaRPr lang="ru-RU" dirty="0"/>
-          </a:p>
-          <a:p>
-            <a:r>
-              <a:rPr lang="ru-RU" dirty="0"/>
-              <a:t>Валидация на случае </a:t>
-            </a:r>
-            <a:r>
-              <a:rPr lang="en-US" dirty="0"/>
-              <a:t>RAE2822, </a:t>
-            </a:r>
-            <a:r>
-              <a:rPr lang="ru-RU" dirty="0"/>
-              <a:t>разница с ним в дальнейшем использовалась в качестве бенчмарка </a:t>
-            </a:r>
-            <a:endParaRPr lang="ru-RU" dirty="0"/>
-          </a:p>
-          <a:p>
-            <a:r>
-              <a:rPr lang="ru-RU" dirty="0"/>
-              <a:t>Модель турбулентности — </a:t>
-            </a:r>
-            <a:r>
-              <a:rPr lang="en-US" dirty="0"/>
-              <a:t>SA</a:t>
-            </a:r>
-            <a:endParaRPr lang="ru-RU" dirty="0"/>
-          </a:p>
-          <a:p>
-            <a:r>
-              <a:rPr lang="ru-RU" dirty="0"/>
-              <a:t>Для повышения устойчивости используется жесткое ограничение по числу итераций </a:t>
-            </a:r>
-            <a:endParaRPr lang="ru-RU" dirty="0"/>
-          </a:p>
-        </p:txBody>
-      </p:sp>
-      <p:sp>
-        <p:nvSpPr>
-          <p:cNvPr id="4" name="Slide Number Placeholder 3"/>
-          <p:cNvSpPr>
-            <a:spLocks noGrp="1"/>
-          </p:cNvSpPr>
-          <p:nvPr>
-            <p:ph type="sldNum" sz="quarter" idx="12"/>
-          </p:nvPr>
-        </p:nvSpPr>
-        <p:spPr/>
-        <p:txBody>
-          <a:bodyPr/>
-          <a:lstStyle/>
-          <a:p>
-            <a:fld id="{39D93D24-9446-4BD4-975C-09DCDF7E2057}" type="slidenum">
-              <a:rPr lang="en-US" smtClean="0"/>
-            </a:fld>
-            <a:endParaRPr lang="en-US"/>
-          </a:p>
-        </p:txBody>
-      </p:sp>
+      </p:pic>
     </p:spTree>
   </p:cSld>
   <p:clrMapOvr>
@@ -5321,7 +5575,7 @@
           <a:p>
             <a:r>
               <a:rPr lang="ru-RU" dirty="0"/>
-              <a:t>Зависимость результата от числа параметров </a:t>
+              <a:t>Метод сопряженных градиентов</a:t>
             </a:r>
             <a:endParaRPr lang="en-US" dirty="0"/>
           </a:p>
@@ -5337,125 +5591,39 @@
             <p:ph sz="half" idx="1"/>
           </p:nvPr>
         </p:nvSpPr>
-        <p:spPr/>
-        <p:txBody>
-          <a:bodyPr/>
-          <a:lstStyle/>
-          <a:p>
-            <a:r>
-              <a:rPr lang="ru-RU" dirty="0"/>
-              <a:t>Профиль параметризовался двумя кривыми Безье</a:t>
-            </a:r>
-            <a:endParaRPr lang="ru-RU" dirty="0"/>
-          </a:p>
-          <a:p>
-            <a:r>
-              <a:rPr lang="ru-RU" dirty="0"/>
-              <a:t>Вектор параметров</a:t>
-            </a:r>
-            <a:r>
-              <a:rPr lang="en-US" altLang="ru-RU" dirty="0"/>
-              <a:t>:</a:t>
-            </a:r>
-            <a:endParaRPr lang="en-US" altLang="ru-RU" dirty="0"/>
-          </a:p>
-          <a:p>
-            <a:pPr marL="0" indent="0">
-              <a:buNone/>
-            </a:pPr>
-            <a:r>
-              <a:rPr lang="en-US" altLang="ru-RU" dirty="0"/>
-              <a:t>x =</a:t>
-            </a:r>
-            <a:r>
-              <a:rPr lang="ru-RU" dirty="0"/>
-              <a:t> </a:t>
-            </a:r>
+        <p:spPr>
+          <a:xfrm>
+            <a:off x="838200" y="1825625"/>
+            <a:ext cx="5553075" cy="4351655"/>
+          </a:xfrm>
+        </p:spPr>
+        <p:txBody>
+          <a:bodyPr/>
+          <a:lstStyle/>
+          <a:p>
             <a:r>
               <a:rPr lang="en-US" dirty="0"/>
-              <a:t>[R</a:t>
-            </a:r>
-            <a:r>
-              <a:rPr lang="en-US" baseline="-25000" dirty="0"/>
-              <a:t>forw</a:t>
-            </a:r>
-            <a:r>
-              <a:rPr lang="en-US" dirty="0"/>
-              <a:t>, P</a:t>
-            </a:r>
-            <a:r>
-              <a:rPr lang="en-US" baseline="-25000" dirty="0"/>
-              <a:t>u1</a:t>
-            </a:r>
-            <a:r>
-              <a:rPr lang="en-US" dirty="0"/>
-              <a:t>,..., P</a:t>
-            </a:r>
-            <a:r>
-              <a:rPr lang="en-US" baseline="-25000" dirty="0"/>
-              <a:t>uN</a:t>
-            </a:r>
-            <a:r>
-              <a:rPr lang="en-US" dirty="0"/>
-              <a:t>, P</a:t>
-            </a:r>
-            <a:r>
-              <a:rPr lang="en-US" baseline="-25000" dirty="0"/>
-              <a:t>d1</a:t>
-            </a:r>
-            <a:r>
-              <a:rPr lang="en-US" dirty="0"/>
-              <a:t>, ..., P</a:t>
-            </a:r>
-            <a:r>
-              <a:rPr lang="en-US" baseline="-25000" dirty="0"/>
-              <a:t>dN</a:t>
-            </a:r>
-            <a:r>
-              <a:rPr lang="en-US" dirty="0"/>
-              <a:t>]</a:t>
-            </a:r>
-            <a:endParaRPr lang="en-US" dirty="0"/>
-          </a:p>
-          <a:p>
+              <a:t>CG</a:t>
+            </a:r>
             <a:r>
               <a:rPr lang="ru-RU" altLang="en-US" dirty="0"/>
-              <a:t>Проверка проводилась методом </a:t>
-            </a:r>
-            <a:r>
-              <a:rPr lang="en-US" altLang="en-US" dirty="0"/>
-              <a:t>CG </a:t>
+              <a:t>: быстрый локальный метод </a:t>
+            </a:r>
+          </a:p>
+          <a:p>
+            <a:r>
+              <a:rPr lang="ru-RU" dirty="0"/>
+              <a:t>Для численного вычисления</a:t>
             </a:r>
             <a:r>
               <a:rPr lang="ru-RU" altLang="en-US" dirty="0"/>
-              <a:t>при старте от симметричного профиля </a:t>
-            </a:r>
-            <a:endParaRPr lang="ru-RU" altLang="en-US" dirty="0"/>
-          </a:p>
-          <a:p>
-            <a:r>
-              <a:rPr lang="ru-RU" dirty="0"/>
-              <a:t>Для режима </a:t>
-            </a:r>
-            <a:r>
-              <a:rPr lang="en-US" dirty="0"/>
-              <a:t>M = 0.75, C</a:t>
-            </a:r>
-            <a:r>
-              <a:rPr lang="en-US" baseline="-25000" dirty="0"/>
-              <a:t>ya</a:t>
-            </a:r>
-            <a:r>
-              <a:rPr lang="en-US" dirty="0"/>
-              <a:t>= 0.5 </a:t>
-            </a:r>
-            <a:r>
-              <a:rPr lang="ru-RU" dirty="0"/>
-              <a:t>оптимальная форма</a:t>
-            </a:r>
+              <a:t> градиента определен шаг по нормализованной переменной, равный 0.005</a:t>
+            </a:r>
+          </a:p>
+          <a:p>
             <a:r>
               <a:rPr lang="ru-RU" altLang="en-US" dirty="0"/>
-              <a:t> достигается уже при </a:t>
+              <a:t>При </a:t>
             </a:r>
             <a:r>
               <a:rPr lang="en-US" altLang="en-US" dirty="0"/>
@@ -5463,9 +5631,62 @@
             </a:r>
             <a:r>
               <a:rPr lang="ru-RU" altLang="en-US" dirty="0"/>
-              <a:t> (7 параметров)</a:t>
-            </a:r>
-            <a:endParaRPr lang="ru-RU" dirty="0"/>
+              <a:t>получен </a:t>
+            </a:r>
+            <a:r>
+              <a:rPr lang="en-US" altLang="en-US" dirty="0"/>
+              <a:t>C</a:t>
+            </a:r>
+            <a:r>
+              <a:rPr lang="en-US" altLang="en-US" baseline="-25000" dirty="0"/>
+              <a:t>xa</a:t>
+            </a:r>
+            <a:r>
+              <a:rPr lang="en-US" altLang="en-US" dirty="0"/>
+              <a:t> = 0.</a:t>
+            </a:r>
+            <a:r>
+              <a:rPr lang="ru-RU" altLang="en-US" dirty="0"/>
+              <a:t>00964</a:t>
+            </a:r>
+            <a:r>
+              <a:rPr lang="en-US" altLang="en-US" dirty="0"/>
+              <a:t>, ∆</a:t>
+            </a:r>
+            <a:r>
+              <a:rPr lang="en-US" altLang="en-US" dirty="0" err="1"/>
+              <a:t>C</a:t>
+            </a:r>
+            <a:r>
+              <a:rPr lang="en-US" altLang="en-US" baseline="-25000" dirty="0" err="1"/>
+              <a:t>xa</a:t>
+            </a:r>
+            <a:r>
+              <a:rPr lang="en-US" altLang="en-US" baseline="-25000" dirty="0"/>
+              <a:t> </a:t>
+            </a:r>
+            <a:r>
+              <a:rPr lang="en-US" altLang="en-US" dirty="0"/>
+              <a:t>= 0.00116 (10%)</a:t>
+            </a:r>
+            <a:endParaRPr lang="ru-RU" altLang="en-US" dirty="0"/>
+          </a:p>
+          <a:p>
+            <a:r>
+              <a:rPr lang="ru-RU" altLang="en-US" dirty="0"/>
+              <a:t>Штрафная функция на толщину показывает результат хуже, чем вытягивание профиля до нужной толщины </a:t>
+            </a:r>
+            <a:r>
+              <a:rPr lang="en-US" altLang="en-US" dirty="0"/>
+              <a:t>(0.5%)</a:t>
+            </a:r>
+            <a:endParaRPr lang="ru-RU" altLang="en-US" dirty="0"/>
+          </a:p>
+          <a:p>
+            <a:r>
+              <a:rPr lang="ru-RU" altLang="en-US" dirty="0"/>
+              <a:t>Вытягивание создает локальные минимумы </a:t>
+            </a:r>
           </a:p>
           <a:p>
             <a:pPr marL="0" indent="0">
@@ -5492,11 +5713,84 @@
           <a:p>
             <a:fld id="{39D93D24-9446-4BD4-975C-09DCDF7E2057}" type="slidenum">
               <a:rPr lang="en-US" smtClean="0"/>
+              <a:t>9</a:t>
             </a:fld>
             <a:endParaRPr lang="en-US"/>
           </a:p>
         </p:txBody>
       </p:sp>
+      <p:pic>
+        <p:nvPicPr>
+          <p:cNvPr id="6" name="Picture 5">
+            <a:extLst>
+              <a:ext uri="{FF2B5EF4-FFF2-40B4-BE49-F238E27FC236}">
+                <a16:creationId xmlns:a16="http://schemas.microsoft.com/office/drawing/2014/main" id="{C688A952-2CD3-282D-8E16-DBEF394A99B1}"/>
+              </a:ext>
+            </a:extLst>
+          </p:cNvPr>
+          <p:cNvPicPr>
+            <a:picLocks noChangeAspect="1"/>
+          </p:cNvPicPr>
+          <p:nvPr/>
+        </p:nvPicPr>
+        <p:blipFill>
+          <a:blip r:embed="rId3">
+            <a:extLst>
+              <a:ext uri="{28A0092B-C50C-407E-A947-70E740481C1C}">
+                <a14:useLocalDpi xmlns:a14="http://schemas.microsoft.com/office/drawing/2010/main" val="0"/>
+              </a:ext>
+            </a:extLst>
+          </a:blip>
+          <a:stretch>
+            <a:fillRect/>
+          </a:stretch>
+        </p:blipFill>
+        <p:spPr>
+          <a:xfrm>
+            <a:off x="6845293" y="1318413"/>
+            <a:ext cx="4508507" cy="2705105"/>
+          </a:xfrm>
+          <a:prstGeom prst="rect">
+            <a:avLst/>
+          </a:prstGeom>
+        </p:spPr>
+      </p:pic>
+      <p:pic>
+        <p:nvPicPr>
+          <p:cNvPr id="8" name="Picture 7">
+            <a:extLst>
+              <a:ext uri="{FF2B5EF4-FFF2-40B4-BE49-F238E27FC236}">
+                <a16:creationId xmlns:a16="http://schemas.microsoft.com/office/drawing/2014/main" id="{0337EF1E-EE27-1B4B-1EE8-A97D4FD68A5D}"/>
+              </a:ext>
+            </a:extLst>
+          </p:cNvPr>
+          <p:cNvPicPr>
+            <a:picLocks noChangeAspect="1"/>
+          </p:cNvPicPr>
+          <p:nvPr/>
+        </p:nvPicPr>
+        <p:blipFill>
+          <a:blip r:embed="rId4">
+            <a:extLst>
+              <a:ext uri="{28A0092B-C50C-407E-A947-70E740481C1C}">
+                <a14:useLocalDpi xmlns:a14="http://schemas.microsoft.com/office/drawing/2010/main" val="0"/>
+              </a:ext>
+            </a:extLst>
+          </a:blip>
+          <a:stretch>
+            <a:fillRect/>
+          </a:stretch>
+        </p:blipFill>
+        <p:spPr>
+          <a:xfrm>
+            <a:off x="7150098" y="4001452"/>
+            <a:ext cx="3886821" cy="2354898"/>
+          </a:xfrm>
+          <a:prstGeom prst="rect">
+            <a:avLst/>
+          </a:prstGeom>
+        </p:spPr>
+      </p:pic>
     </p:spTree>
   </p:cSld>
   <p:clrMapOvr>
@@ -5756,6 +6050,8 @@
       </a:bgFillStyleLst>
     </a:fmtScheme>
   </a:themeElements>
+  <a:objectDefaults/>
+  <a:extraClrSchemeLst/>
   <a:extLst>
     <a:ext uri="{05A4C25C-085E-4340-85A3-A5531E510DB2}">
       <thm15:themeFamily xmlns:thm15="http://schemas.microsoft.com/office/thememl/2012/main" name="Office Theme" id="{62F939B6-93AF-4DB8-9C6B-D6C7DFDC589F}" vid="{4A3C46E8-61CC-4603-A589-7422A47A8E4A}"/>
@@ -6015,6 +6311,8 @@
       </a:bgFillStyleLst>
     </a:fmtScheme>
   </a:themeElements>
+  <a:objectDefaults/>
+  <a:extraClrSchemeLst/>
   <a:extLst>
     <a:ext uri="{05A4C25C-085E-4340-85A3-A5531E510DB2}">
       <thm15:themeFamily xmlns:thm15="http://schemas.microsoft.com/office/thememl/2012/main" name="Office Theme" id="{62F939B6-93AF-4DB8-9C6B-D6C7DFDC589F}" vid="{4A3C46E8-61CC-4603-A589-7422A47A8E4A}"/>
